--- a/EKG_Conference_Presentation.pptx
+++ b/EKG_Conference_Presentation.pptx
@@ -23,6 +23,11 @@
     <p:sldId id="271" r:id="rId22"/>
     <p:sldId id="272" r:id="rId23"/>
     <p:sldId id="273" r:id="rId24"/>
+    <p:sldId id="274" r:id="rId25"/>
+    <p:sldId id="275" r:id="rId26"/>
+    <p:sldId id="276" r:id="rId27"/>
+    <p:sldId id="277" r:id="rId28"/>
+    <p:sldId id="278" r:id="rId29"/>
   </p:sldIdLst>
   <p:sldSz cx="12192119" cy="6858000" type="screen4x3"/>
   <p:notesSz cx="6858000" cy="9144000"/>
@@ -3465,35 +3470,822 @@
                 </a:solidFill>
                 <a:latin typeface="Calibri"/>
               </a:rPr>
-              <a:t>Results — Comparison Figure</a:t>
-            </a:r>
-          </a:p>
-        </p:txBody>
-      </p:sp>
-      <p:pic>
-        <p:nvPicPr>
-          <p:cNvPr id="4" name="Picture 3" descr="Figure_seq_length_comparison.png"/>
-          <p:cNvPicPr>
-            <a:picLocks noChangeAspect="1"/>
-          </p:cNvPicPr>
-          <p:nvPr/>
-        </p:nvPicPr>
-        <p:blipFill>
-          <a:blip r:embed="rId2"/>
-          <a:stretch>
-            <a:fillRect/>
-          </a:stretch>
-        </p:blipFill>
-        <p:spPr>
-          <a:xfrm>
-            <a:off x="720000" y="1080000"/>
-            <a:ext cx="10800000" cy="3458281"/>
-          </a:xfrm>
-          <a:prstGeom prst="rect">
-            <a:avLst/>
-          </a:prstGeom>
-        </p:spPr>
-      </p:pic>
+              <a:t>Results — Headline Numbers</a:t>
+            </a:r>
+          </a:p>
+        </p:txBody>
+      </p:sp>
+      <p:graphicFrame>
+        <p:nvGraphicFramePr>
+          <p:cNvPr id="4" name="Table 3"/>
+          <p:cNvGraphicFramePr>
+            <a:graphicFrameLocks noGrp="1"/>
+          </p:cNvGraphicFramePr>
+          <p:nvPr/>
+        </p:nvGraphicFramePr>
+        <p:xfrm>
+          <a:off x="540000" y="1080000"/>
+          <a:ext cx="10980000" cy="2520000"/>
+        </p:xfrm>
+        <a:graphic>
+          <a:graphicData uri="http://schemas.openxmlformats.org/drawingml/2006/table">
+            <a:tbl>
+              <a:tblPr firstRow="1" bandRow="1">
+                <a:tableStyleId>{5C22544A-7EE6-4342-B048-85BDC9FD1C3A}</a:tableStyleId>
+              </a:tblPr>
+              <a:tblGrid>
+                <a:gridCol w="1568571"/>
+                <a:gridCol w="1568571"/>
+                <a:gridCol w="1568571"/>
+                <a:gridCol w="1568571"/>
+                <a:gridCol w="1568571"/>
+                <a:gridCol w="1568571"/>
+                <a:gridCol w="1568574"/>
+              </a:tblGrid>
+              <a:tr h="504000">
+                <a:tc>
+                  <a:txBody>
+                    <a:bodyPr/>
+                    <a:lstStyle/>
+                    <a:p>
+                      <a:r>
+                        <a:rPr sz="1300" b="1">
+                          <a:solidFill>
+                            <a:srgbClr val="FFFFFF"/>
+                          </a:solidFill>
+                          <a:latin typeface="Calibri"/>
+                        </a:rPr>
+                        <a:t>Config</a:t>
+                      </a:r>
+                    </a:p>
+                  </a:txBody>
+                  <a:tcPr>
+                    <a:solidFill>
+                      <a:srgbClr val="0B3D91"/>
+                    </a:solidFill>
+                  </a:tcPr>
+                </a:tc>
+                <a:tc>
+                  <a:txBody>
+                    <a:bodyPr/>
+                    <a:lstStyle/>
+                    <a:p>
+                      <a:r>
+                        <a:rPr sz="1300" b="1">
+                          <a:solidFill>
+                            <a:srgbClr val="FFFFFF"/>
+                          </a:solidFill>
+                          <a:latin typeface="Calibri"/>
+                        </a:rPr>
+                        <a:t>Test Acc</a:t>
+                      </a:r>
+                    </a:p>
+                  </a:txBody>
+                  <a:tcPr>
+                    <a:solidFill>
+                      <a:srgbClr val="0B3D91"/>
+                    </a:solidFill>
+                  </a:tcPr>
+                </a:tc>
+                <a:tc>
+                  <a:txBody>
+                    <a:bodyPr/>
+                    <a:lstStyle/>
+                    <a:p>
+                      <a:r>
+                        <a:rPr sz="1300" b="1">
+                          <a:solidFill>
+                            <a:srgbClr val="FFFFFF"/>
+                          </a:solidFill>
+                          <a:latin typeface="Calibri"/>
+                        </a:rPr>
+                        <a:t>Macro P</a:t>
+                      </a:r>
+                    </a:p>
+                  </a:txBody>
+                  <a:tcPr>
+                    <a:solidFill>
+                      <a:srgbClr val="0B3D91"/>
+                    </a:solidFill>
+                  </a:tcPr>
+                </a:tc>
+                <a:tc>
+                  <a:txBody>
+                    <a:bodyPr/>
+                    <a:lstStyle/>
+                    <a:p>
+                      <a:r>
+                        <a:rPr sz="1300" b="1">
+                          <a:solidFill>
+                            <a:srgbClr val="FFFFFF"/>
+                          </a:solidFill>
+                          <a:latin typeface="Calibri"/>
+                        </a:rPr>
+                        <a:t>Macro R</a:t>
+                      </a:r>
+                    </a:p>
+                  </a:txBody>
+                  <a:tcPr>
+                    <a:solidFill>
+                      <a:srgbClr val="0B3D91"/>
+                    </a:solidFill>
+                  </a:tcPr>
+                </a:tc>
+                <a:tc>
+                  <a:txBody>
+                    <a:bodyPr/>
+                    <a:lstStyle/>
+                    <a:p>
+                      <a:r>
+                        <a:rPr sz="1300" b="1">
+                          <a:solidFill>
+                            <a:srgbClr val="FFFFFF"/>
+                          </a:solidFill>
+                          <a:latin typeface="Calibri"/>
+                        </a:rPr>
+                        <a:t>Macro F1</a:t>
+                      </a:r>
+                    </a:p>
+                  </a:txBody>
+                  <a:tcPr>
+                    <a:solidFill>
+                      <a:srgbClr val="0B3D91"/>
+                    </a:solidFill>
+                  </a:tcPr>
+                </a:tc>
+                <a:tc>
+                  <a:txBody>
+                    <a:bodyPr/>
+                    <a:lstStyle/>
+                    <a:p>
+                      <a:r>
+                        <a:rPr sz="1300" b="1">
+                          <a:solidFill>
+                            <a:srgbClr val="FFFFFF"/>
+                          </a:solidFill>
+                          <a:latin typeface="Calibri"/>
+                        </a:rPr>
+                        <a:t>Inference</a:t>
+                      </a:r>
+                    </a:p>
+                  </a:txBody>
+                  <a:tcPr>
+                    <a:solidFill>
+                      <a:srgbClr val="0B3D91"/>
+                    </a:solidFill>
+                  </a:tcPr>
+                </a:tc>
+                <a:tc>
+                  <a:txBody>
+                    <a:bodyPr/>
+                    <a:lstStyle/>
+                    <a:p>
+                      <a:r>
+                        <a:rPr sz="1300" b="1">
+                          <a:solidFill>
+                            <a:srgbClr val="FFFFFF"/>
+                          </a:solidFill>
+                          <a:latin typeface="Calibri"/>
+                        </a:rPr>
+                        <a:t>Confidence</a:t>
+                      </a:r>
+                    </a:p>
+                  </a:txBody>
+                  <a:tcPr>
+                    <a:solidFill>
+                      <a:srgbClr val="0B3D91"/>
+                    </a:solidFill>
+                  </a:tcPr>
+                </a:tc>
+              </a:tr>
+              <a:tr h="504000">
+                <a:tc>
+                  <a:txBody>
+                    <a:bodyPr/>
+                    <a:lstStyle/>
+                    <a:p>
+                      <a:r>
+                        <a:rPr sz="1300">
+                          <a:solidFill>
+                            <a:srgbClr val="2C3E50"/>
+                          </a:solidFill>
+                          <a:latin typeface="Calibri"/>
+                        </a:rPr>
+                        <a:t>len=5000 (baseline)</a:t>
+                      </a:r>
+                    </a:p>
+                  </a:txBody>
+                  <a:tcPr>
+                    <a:solidFill>
+                      <a:srgbClr val="FFFFFF"/>
+                    </a:solidFill>
+                  </a:tcPr>
+                </a:tc>
+                <a:tc>
+                  <a:txBody>
+                    <a:bodyPr/>
+                    <a:lstStyle/>
+                    <a:p>
+                      <a:r>
+                        <a:rPr sz="1300">
+                          <a:solidFill>
+                            <a:srgbClr val="2C3E50"/>
+                          </a:solidFill>
+                          <a:latin typeface="Calibri"/>
+                        </a:rPr>
+                        <a:t>88.43%</a:t>
+                      </a:r>
+                    </a:p>
+                  </a:txBody>
+                  <a:tcPr>
+                    <a:solidFill>
+                      <a:srgbClr val="FFFFFF"/>
+                    </a:solidFill>
+                  </a:tcPr>
+                </a:tc>
+                <a:tc>
+                  <a:txBody>
+                    <a:bodyPr/>
+                    <a:lstStyle/>
+                    <a:p>
+                      <a:r>
+                        <a:rPr sz="1300">
+                          <a:solidFill>
+                            <a:srgbClr val="2C3E50"/>
+                          </a:solidFill>
+                          <a:latin typeface="Calibri"/>
+                        </a:rPr>
+                        <a:t>0.8768</a:t>
+                      </a:r>
+                    </a:p>
+                  </a:txBody>
+                  <a:tcPr>
+                    <a:solidFill>
+                      <a:srgbClr val="FFFFFF"/>
+                    </a:solidFill>
+                  </a:tcPr>
+                </a:tc>
+                <a:tc>
+                  <a:txBody>
+                    <a:bodyPr/>
+                    <a:lstStyle/>
+                    <a:p>
+                      <a:r>
+                        <a:rPr sz="1300">
+                          <a:solidFill>
+                            <a:srgbClr val="2C3E50"/>
+                          </a:solidFill>
+                          <a:latin typeface="Calibri"/>
+                        </a:rPr>
+                        <a:t>0.8847</a:t>
+                      </a:r>
+                    </a:p>
+                  </a:txBody>
+                  <a:tcPr>
+                    <a:solidFill>
+                      <a:srgbClr val="FFFFFF"/>
+                    </a:solidFill>
+                  </a:tcPr>
+                </a:tc>
+                <a:tc>
+                  <a:txBody>
+                    <a:bodyPr/>
+                    <a:lstStyle/>
+                    <a:p>
+                      <a:r>
+                        <a:rPr sz="1300">
+                          <a:solidFill>
+                            <a:srgbClr val="2C3E50"/>
+                          </a:solidFill>
+                          <a:latin typeface="Calibri"/>
+                        </a:rPr>
+                        <a:t>0.8713</a:t>
+                      </a:r>
+                    </a:p>
+                  </a:txBody>
+                  <a:tcPr>
+                    <a:solidFill>
+                      <a:srgbClr val="FFFFFF"/>
+                    </a:solidFill>
+                  </a:tcPr>
+                </a:tc>
+                <a:tc>
+                  <a:txBody>
+                    <a:bodyPr/>
+                    <a:lstStyle/>
+                    <a:p>
+                      <a:r>
+                        <a:rPr sz="1300">
+                          <a:solidFill>
+                            <a:srgbClr val="2C3E50"/>
+                          </a:solidFill>
+                          <a:latin typeface="Calibri"/>
+                        </a:rPr>
+                        <a:t>89.88 ms</a:t>
+                      </a:r>
+                    </a:p>
+                  </a:txBody>
+                  <a:tcPr>
+                    <a:solidFill>
+                      <a:srgbClr val="FFFFFF"/>
+                    </a:solidFill>
+                  </a:tcPr>
+                </a:tc>
+                <a:tc>
+                  <a:txBody>
+                    <a:bodyPr/>
+                    <a:lstStyle/>
+                    <a:p>
+                      <a:r>
+                        <a:rPr sz="1300">
+                          <a:solidFill>
+                            <a:srgbClr val="2C3E50"/>
+                          </a:solidFill>
+                          <a:latin typeface="Calibri"/>
+                        </a:rPr>
+                        <a:t>12.89%</a:t>
+                      </a:r>
+                    </a:p>
+                  </a:txBody>
+                  <a:tcPr>
+                    <a:solidFill>
+                      <a:srgbClr val="FFFFFF"/>
+                    </a:solidFill>
+                  </a:tcPr>
+                </a:tc>
+              </a:tr>
+              <a:tr h="504000">
+                <a:tc>
+                  <a:txBody>
+                    <a:bodyPr/>
+                    <a:lstStyle/>
+                    <a:p>
+                      <a:r>
+                        <a:rPr sz="1300">
+                          <a:solidFill>
+                            <a:srgbClr val="2C3E50"/>
+                          </a:solidFill>
+                          <a:latin typeface="Calibri"/>
+                        </a:rPr>
+                        <a:t>len=1000</a:t>
+                      </a:r>
+                    </a:p>
+                  </a:txBody>
+                  <a:tcPr>
+                    <a:solidFill>
+                      <a:srgbClr val="F8F9FA"/>
+                    </a:solidFill>
+                  </a:tcPr>
+                </a:tc>
+                <a:tc>
+                  <a:txBody>
+                    <a:bodyPr/>
+                    <a:lstStyle/>
+                    <a:p>
+                      <a:r>
+                        <a:rPr sz="1300">
+                          <a:solidFill>
+                            <a:srgbClr val="2C3E50"/>
+                          </a:solidFill>
+                          <a:latin typeface="Calibri"/>
+                        </a:rPr>
+                        <a:t>97.22%</a:t>
+                      </a:r>
+                    </a:p>
+                  </a:txBody>
+                  <a:tcPr>
+                    <a:solidFill>
+                      <a:srgbClr val="F8F9FA"/>
+                    </a:solidFill>
+                  </a:tcPr>
+                </a:tc>
+                <a:tc>
+                  <a:txBody>
+                    <a:bodyPr/>
+                    <a:lstStyle/>
+                    <a:p>
+                      <a:r>
+                        <a:rPr sz="1300">
+                          <a:solidFill>
+                            <a:srgbClr val="2C3E50"/>
+                          </a:solidFill>
+                          <a:latin typeface="Calibri"/>
+                        </a:rPr>
+                        <a:t>0.9740</a:t>
+                      </a:r>
+                    </a:p>
+                  </a:txBody>
+                  <a:tcPr>
+                    <a:solidFill>
+                      <a:srgbClr val="F8F9FA"/>
+                    </a:solidFill>
+                  </a:tcPr>
+                </a:tc>
+                <a:tc>
+                  <a:txBody>
+                    <a:bodyPr/>
+                    <a:lstStyle/>
+                    <a:p>
+                      <a:r>
+                        <a:rPr sz="1300">
+                          <a:solidFill>
+                            <a:srgbClr val="2C3E50"/>
+                          </a:solidFill>
+                          <a:latin typeface="Calibri"/>
+                        </a:rPr>
+                        <a:t>0.9729</a:t>
+                      </a:r>
+                    </a:p>
+                  </a:txBody>
+                  <a:tcPr>
+                    <a:solidFill>
+                      <a:srgbClr val="F8F9FA"/>
+                    </a:solidFill>
+                  </a:tcPr>
+                </a:tc>
+                <a:tc>
+                  <a:txBody>
+                    <a:bodyPr/>
+                    <a:lstStyle/>
+                    <a:p>
+                      <a:r>
+                        <a:rPr sz="1300">
+                          <a:solidFill>
+                            <a:srgbClr val="2C3E50"/>
+                          </a:solidFill>
+                          <a:latin typeface="Calibri"/>
+                        </a:rPr>
+                        <a:t>0.9716</a:t>
+                      </a:r>
+                    </a:p>
+                  </a:txBody>
+                  <a:tcPr>
+                    <a:solidFill>
+                      <a:srgbClr val="F8F9FA"/>
+                    </a:solidFill>
+                  </a:tcPr>
+                </a:tc>
+                <a:tc>
+                  <a:txBody>
+                    <a:bodyPr/>
+                    <a:lstStyle/>
+                    <a:p>
+                      <a:r>
+                        <a:rPr sz="1300">
+                          <a:solidFill>
+                            <a:srgbClr val="2C3E50"/>
+                          </a:solidFill>
+                          <a:latin typeface="Calibri"/>
+                        </a:rPr>
+                        <a:t>26.14 ms</a:t>
+                      </a:r>
+                    </a:p>
+                  </a:txBody>
+                  <a:tcPr>
+                    <a:solidFill>
+                      <a:srgbClr val="F8F9FA"/>
+                    </a:solidFill>
+                  </a:tcPr>
+                </a:tc>
+                <a:tc>
+                  <a:txBody>
+                    <a:bodyPr/>
+                    <a:lstStyle/>
+                    <a:p>
+                      <a:r>
+                        <a:rPr sz="1300">
+                          <a:solidFill>
+                            <a:srgbClr val="2C3E50"/>
+                          </a:solidFill>
+                          <a:latin typeface="Calibri"/>
+                        </a:rPr>
+                        <a:t>68.88%</a:t>
+                      </a:r>
+                    </a:p>
+                  </a:txBody>
+                  <a:tcPr>
+                    <a:solidFill>
+                      <a:srgbClr val="F8F9FA"/>
+                    </a:solidFill>
+                  </a:tcPr>
+                </a:tc>
+              </a:tr>
+              <a:tr h="504000">
+                <a:tc>
+                  <a:txBody>
+                    <a:bodyPr/>
+                    <a:lstStyle/>
+                    <a:p>
+                      <a:r>
+                        <a:rPr sz="1300">
+                          <a:solidFill>
+                            <a:srgbClr val="2C3E50"/>
+                          </a:solidFill>
+                          <a:latin typeface="Calibri"/>
+                        </a:rPr>
+                        <a:t>len=500</a:t>
+                      </a:r>
+                    </a:p>
+                  </a:txBody>
+                  <a:tcPr>
+                    <a:solidFill>
+                      <a:srgbClr val="FFFFFF"/>
+                    </a:solidFill>
+                  </a:tcPr>
+                </a:tc>
+                <a:tc>
+                  <a:txBody>
+                    <a:bodyPr/>
+                    <a:lstStyle/>
+                    <a:p>
+                      <a:r>
+                        <a:rPr sz="1300">
+                          <a:solidFill>
+                            <a:srgbClr val="2C3E50"/>
+                          </a:solidFill>
+                          <a:latin typeface="Calibri"/>
+                        </a:rPr>
+                        <a:t>97.34%</a:t>
+                      </a:r>
+                    </a:p>
+                  </a:txBody>
+                  <a:tcPr>
+                    <a:solidFill>
+                      <a:srgbClr val="FFFFFF"/>
+                    </a:solidFill>
+                  </a:tcPr>
+                </a:tc>
+                <a:tc>
+                  <a:txBody>
+                    <a:bodyPr/>
+                    <a:lstStyle/>
+                    <a:p>
+                      <a:r>
+                        <a:rPr sz="1300">
+                          <a:solidFill>
+                            <a:srgbClr val="2C3E50"/>
+                          </a:solidFill>
+                          <a:latin typeface="Calibri"/>
+                        </a:rPr>
+                        <a:t>0.9734</a:t>
+                      </a:r>
+                    </a:p>
+                  </a:txBody>
+                  <a:tcPr>
+                    <a:solidFill>
+                      <a:srgbClr val="FFFFFF"/>
+                    </a:solidFill>
+                  </a:tcPr>
+                </a:tc>
+                <a:tc>
+                  <a:txBody>
+                    <a:bodyPr/>
+                    <a:lstStyle/>
+                    <a:p>
+                      <a:r>
+                        <a:rPr sz="1300">
+                          <a:solidFill>
+                            <a:srgbClr val="2C3E50"/>
+                          </a:solidFill>
+                          <a:latin typeface="Calibri"/>
+                        </a:rPr>
+                        <a:t>0.9749</a:t>
+                      </a:r>
+                    </a:p>
+                  </a:txBody>
+                  <a:tcPr>
+                    <a:solidFill>
+                      <a:srgbClr val="FFFFFF"/>
+                    </a:solidFill>
+                  </a:tcPr>
+                </a:tc>
+                <a:tc>
+                  <a:txBody>
+                    <a:bodyPr/>
+                    <a:lstStyle/>
+                    <a:p>
+                      <a:r>
+                        <a:rPr sz="1300">
+                          <a:solidFill>
+                            <a:srgbClr val="2C3E50"/>
+                          </a:solidFill>
+                          <a:latin typeface="Calibri"/>
+                        </a:rPr>
+                        <a:t>0.9737</a:t>
+                      </a:r>
+                    </a:p>
+                  </a:txBody>
+                  <a:tcPr>
+                    <a:solidFill>
+                      <a:srgbClr val="FFFFFF"/>
+                    </a:solidFill>
+                  </a:tcPr>
+                </a:tc>
+                <a:tc>
+                  <a:txBody>
+                    <a:bodyPr/>
+                    <a:lstStyle/>
+                    <a:p>
+                      <a:r>
+                        <a:rPr sz="1300">
+                          <a:solidFill>
+                            <a:srgbClr val="2C3E50"/>
+                          </a:solidFill>
+                          <a:latin typeface="Calibri"/>
+                        </a:rPr>
+                        <a:t>27.20 ms</a:t>
+                      </a:r>
+                    </a:p>
+                  </a:txBody>
+                  <a:tcPr>
+                    <a:solidFill>
+                      <a:srgbClr val="FFFFFF"/>
+                    </a:solidFill>
+                  </a:tcPr>
+                </a:tc>
+                <a:tc>
+                  <a:txBody>
+                    <a:bodyPr/>
+                    <a:lstStyle/>
+                    <a:p>
+                      <a:r>
+                        <a:rPr sz="1300">
+                          <a:solidFill>
+                            <a:srgbClr val="2C3E50"/>
+                          </a:solidFill>
+                          <a:latin typeface="Calibri"/>
+                        </a:rPr>
+                        <a:t>76.23%</a:t>
+                      </a:r>
+                    </a:p>
+                  </a:txBody>
+                  <a:tcPr>
+                    <a:solidFill>
+                      <a:srgbClr val="FFFFFF"/>
+                    </a:solidFill>
+                  </a:tcPr>
+                </a:tc>
+              </a:tr>
+              <a:tr h="504000">
+                <a:tc>
+                  <a:txBody>
+                    <a:bodyPr/>
+                    <a:lstStyle/>
+                    <a:p>
+                      <a:r>
+                        <a:rPr sz="1300">
+                          <a:solidFill>
+                            <a:srgbClr val="2C3E50"/>
+                          </a:solidFill>
+                          <a:latin typeface="Calibri"/>
+                        </a:rPr>
+                        <a:t>len=500 + 4 workers</a:t>
+                      </a:r>
+                    </a:p>
+                  </a:txBody>
+                  <a:tcPr>
+                    <a:solidFill>
+                      <a:srgbClr val="F8F9FA"/>
+                    </a:solidFill>
+                  </a:tcPr>
+                </a:tc>
+                <a:tc>
+                  <a:txBody>
+                    <a:bodyPr/>
+                    <a:lstStyle/>
+                    <a:p>
+                      <a:r>
+                        <a:rPr sz="1300">
+                          <a:solidFill>
+                            <a:srgbClr val="2C3E50"/>
+                          </a:solidFill>
+                          <a:latin typeface="Calibri"/>
+                        </a:rPr>
+                        <a:t>97.38%</a:t>
+                      </a:r>
+                    </a:p>
+                  </a:txBody>
+                  <a:tcPr>
+                    <a:solidFill>
+                      <a:srgbClr val="F8F9FA"/>
+                    </a:solidFill>
+                  </a:tcPr>
+                </a:tc>
+                <a:tc>
+                  <a:txBody>
+                    <a:bodyPr/>
+                    <a:lstStyle/>
+                    <a:p>
+                      <a:r>
+                        <a:rPr sz="1300">
+                          <a:solidFill>
+                            <a:srgbClr val="2C3E50"/>
+                          </a:solidFill>
+                          <a:latin typeface="Calibri"/>
+                        </a:rPr>
+                        <a:t>0.9741</a:t>
+                      </a:r>
+                    </a:p>
+                  </a:txBody>
+                  <a:tcPr>
+                    <a:solidFill>
+                      <a:srgbClr val="F8F9FA"/>
+                    </a:solidFill>
+                  </a:tcPr>
+                </a:tc>
+                <a:tc>
+                  <a:txBody>
+                    <a:bodyPr/>
+                    <a:lstStyle/>
+                    <a:p>
+                      <a:r>
+                        <a:rPr sz="1300">
+                          <a:solidFill>
+                            <a:srgbClr val="2C3E50"/>
+                          </a:solidFill>
+                          <a:latin typeface="Calibri"/>
+                        </a:rPr>
+                        <a:t>0.9751</a:t>
+                      </a:r>
+                    </a:p>
+                  </a:txBody>
+                  <a:tcPr>
+                    <a:solidFill>
+                      <a:srgbClr val="F8F9FA"/>
+                    </a:solidFill>
+                  </a:tcPr>
+                </a:tc>
+                <a:tc>
+                  <a:txBody>
+                    <a:bodyPr/>
+                    <a:lstStyle/>
+                    <a:p>
+                      <a:r>
+                        <a:rPr sz="1300">
+                          <a:solidFill>
+                            <a:srgbClr val="2C3E50"/>
+                          </a:solidFill>
+                          <a:latin typeface="Calibri"/>
+                        </a:rPr>
+                        <a:t>0.9744</a:t>
+                      </a:r>
+                    </a:p>
+                  </a:txBody>
+                  <a:tcPr>
+                    <a:solidFill>
+                      <a:srgbClr val="F8F9FA"/>
+                    </a:solidFill>
+                  </a:tcPr>
+                </a:tc>
+                <a:tc>
+                  <a:txBody>
+                    <a:bodyPr/>
+                    <a:lstStyle/>
+                    <a:p>
+                      <a:r>
+                        <a:rPr sz="1300">
+                          <a:solidFill>
+                            <a:srgbClr val="2C3E50"/>
+                          </a:solidFill>
+                          <a:latin typeface="Calibri"/>
+                        </a:rPr>
+                        <a:t>43.50 ms</a:t>
+                      </a:r>
+                    </a:p>
+                  </a:txBody>
+                  <a:tcPr>
+                    <a:solidFill>
+                      <a:srgbClr val="F8F9FA"/>
+                    </a:solidFill>
+                  </a:tcPr>
+                </a:tc>
+                <a:tc>
+                  <a:txBody>
+                    <a:bodyPr/>
+                    <a:lstStyle/>
+                    <a:p>
+                      <a:r>
+                        <a:rPr sz="1300">
+                          <a:solidFill>
+                            <a:srgbClr val="2C3E50"/>
+                          </a:solidFill>
+                          <a:latin typeface="Calibri"/>
+                        </a:rPr>
+                        <a:t>69.59%</a:t>
+                      </a:r>
+                    </a:p>
+                  </a:txBody>
+                  <a:tcPr>
+                    <a:solidFill>
+                      <a:srgbClr val="F8F9FA"/>
+                    </a:solidFill>
+                  </a:tcPr>
+                </a:tc>
+              </a:tr>
+            </a:tbl>
+          </a:graphicData>
+        </a:graphic>
+      </p:graphicFrame>
       <p:sp>
         <p:nvSpPr>
           <p:cNvPr id="5" name="TextBox 4"/>
@@ -3502,8 +4294,8 @@
         </p:nvSpPr>
         <p:spPr>
           <a:xfrm>
-            <a:off x="720000" y="4574281"/>
-            <a:ext cx="10800000" cy="216000"/>
+            <a:off x="540000" y="3960000"/>
+            <a:ext cx="10980000" cy="432000"/>
           </a:xfrm>
           <a:prstGeom prst="rect">
             <a:avLst/>
@@ -3516,15 +4308,15 @@
           </a:bodyPr>
           <a:lstStyle/>
           <a:p>
-            <a:pPr algn="ctr"/>
-            <a:r>
-              <a:rPr sz="1100" b="0" i="1">
-                <a:solidFill>
-                  <a:srgbClr val="7F8C8D"/>
-                </a:solidFill>
-                <a:latin typeface="Calibri"/>
-              </a:rPr>
-              <a:t>Figure 1. Input length vs. baseline 1D-CNN performance. Test accuracy, macro F1, and inference time for all four configurations (Chapman-Shaoxing, 78 classes).</a:t>
+            <a:pPr algn="l"/>
+            <a:r>
+              <a:rPr sz="2000" b="1" i="0">
+                <a:solidFill>
+                  <a:srgbClr val="27AE60"/>
+                </a:solidFill>
+                <a:latin typeface="Calibri"/>
+              </a:rPr>
+              <a:t>Δ (len=5000 → len=500): accuracy +8.91 pp,  macro F1 +10.24 pp,  inference 3.3× faster.</a:t>
             </a:r>
           </a:p>
         </p:txBody>
@@ -3537,8 +4329,8 @@
         </p:nvSpPr>
         <p:spPr>
           <a:xfrm>
-            <a:off x="288000" y="6570000"/>
-            <a:ext cx="7200000" cy="180000"/>
+            <a:off x="540000" y="4500000"/>
+            <a:ext cx="10980000" cy="1440000"/>
           </a:xfrm>
           <a:prstGeom prst="rect">
             <a:avLst/>
@@ -3553,13 +4345,13 @@
           <a:p>
             <a:pPr algn="l"/>
             <a:r>
-              <a:rPr sz="1000" b="0" i="0">
-                <a:solidFill>
-                  <a:srgbClr val="7F8C8D"/>
-                </a:solidFill>
-                <a:latin typeface="Calibri"/>
-              </a:rPr>
-              <a:t>Results — figure</a:t>
+              <a:rPr sz="1600" b="0" i="1">
+                <a:solidFill>
+                  <a:srgbClr val="2C3E50"/>
+                </a:solidFill>
+                <a:latin typeface="Calibri"/>
+              </a:rPr>
+              <a:t>Target from thesis proposal (≥ 90 %) and from the v2 aspiration (94.8% for the full attention-CNN-LSTM hybrid with support-node augmentation) are both exceeded — with nothing but a preprocessing change to the plain baseline.</a:t>
             </a:r>
           </a:p>
         </p:txBody>
@@ -3572,8 +4364,8 @@
         </p:nvSpPr>
         <p:spPr>
           <a:xfrm>
-            <a:off x="10032119" y="6570000"/>
-            <a:ext cx="1800000" cy="180000"/>
+            <a:off x="288000" y="6570000"/>
+            <a:ext cx="7200000" cy="180000"/>
           </a:xfrm>
           <a:prstGeom prst="rect">
             <a:avLst/>
@@ -3586,6 +4378,41 @@
           </a:bodyPr>
           <a:lstStyle/>
           <a:p>
+            <a:pPr algn="l"/>
+            <a:r>
+              <a:rPr sz="1000" b="0" i="0">
+                <a:solidFill>
+                  <a:srgbClr val="7F8C8D"/>
+                </a:solidFill>
+                <a:latin typeface="Calibri"/>
+              </a:rPr>
+              <a:t>Results — headline</a:t>
+            </a:r>
+          </a:p>
+        </p:txBody>
+      </p:sp>
+      <p:sp>
+        <p:nvSpPr>
+          <p:cNvPr id="8" name="TextBox 7"/>
+          <p:cNvSpPr txBox="1"/>
+          <p:nvPr/>
+        </p:nvSpPr>
+        <p:spPr>
+          <a:xfrm>
+            <a:off x="10032119" y="6570000"/>
+            <a:ext cx="1800000" cy="180000"/>
+          </a:xfrm>
+          <a:prstGeom prst="rect">
+            <a:avLst/>
+          </a:prstGeom>
+          <a:noFill/>
+        </p:spPr>
+        <p:txBody>
+          <a:bodyPr wrap="square" lIns="0" rIns="0" tIns="0" bIns="0">
+            <a:spAutoFit/>
+          </a:bodyPr>
+          <a:lstStyle/>
+          <a:p>
             <a:pPr algn="r"/>
             <a:r>
               <a:rPr sz="1000" b="0" i="0">
@@ -3594,7 +4421,7 @@
                 </a:solidFill>
                 <a:latin typeface="Calibri"/>
               </a:rPr>
-              <a:t>9 / 20</a:t>
+              <a:t>9 / 21</a:t>
             </a:r>
           </a:p>
         </p:txBody>
@@ -3694,14 +4521,14 @@
                 </a:solidFill>
                 <a:latin typeface="Calibri"/>
               </a:rPr>
-              <a:t>Training Dynamics — 4 Configs Side by Side</a:t>
+              <a:t>Results — Comparison Figure</a:t>
             </a:r>
           </a:p>
         </p:txBody>
       </p:sp>
       <p:pic>
         <p:nvPicPr>
-          <p:cNvPr id="4" name="Picture 3" descr="Figure_1.png"/>
+          <p:cNvPr id="4" name="Picture 3" descr="Figure_seq_length_comparison.png"/>
           <p:cNvPicPr>
             <a:picLocks noChangeAspect="1"/>
           </p:cNvPicPr>
@@ -3715,8 +4542,8 @@
         </p:blipFill>
         <p:spPr>
           <a:xfrm>
-            <a:off x="360000" y="1007999"/>
-            <a:ext cx="3779999" cy="2520000"/>
+            <a:off x="720000" y="1080000"/>
+            <a:ext cx="10800000" cy="3458281"/>
           </a:xfrm>
           <a:prstGeom prst="rect">
             <a:avLst/>
@@ -3731,8 +4558,8 @@
         </p:nvSpPr>
         <p:spPr>
           <a:xfrm>
-            <a:off x="360000" y="791999"/>
-            <a:ext cx="5580000" cy="180000"/>
+            <a:off x="720000" y="4574281"/>
+            <a:ext cx="10800000" cy="216000"/>
           </a:xfrm>
           <a:prstGeom prst="rect">
             <a:avLst/>
@@ -3745,53 +4572,29 @@
           </a:bodyPr>
           <a:lstStyle/>
           <a:p>
-            <a:pPr algn="l"/>
-            <a:r>
-              <a:rPr sz="1400" b="1" i="0">
-                <a:solidFill>
-                  <a:srgbClr val="0B3D91"/>
-                </a:solidFill>
-                <a:latin typeface="Calibri"/>
-              </a:rPr>
-              <a:t>len=5000</a:t>
-            </a:r>
-          </a:p>
-        </p:txBody>
-      </p:sp>
-      <p:pic>
-        <p:nvPicPr>
-          <p:cNvPr id="6" name="Picture 5" descr="Figure_1000.png"/>
-          <p:cNvPicPr>
-            <a:picLocks noChangeAspect="1"/>
-          </p:cNvPicPr>
-          <p:nvPr/>
-        </p:nvPicPr>
-        <p:blipFill>
-          <a:blip r:embed="rId3"/>
-          <a:stretch>
-            <a:fillRect/>
-          </a:stretch>
-        </p:blipFill>
-        <p:spPr>
-          <a:xfrm>
-            <a:off x="6300000" y="1007999"/>
-            <a:ext cx="1517039" cy="2520000"/>
-          </a:xfrm>
-          <a:prstGeom prst="rect">
-            <a:avLst/>
-          </a:prstGeom>
-        </p:spPr>
-      </p:pic>
-      <p:sp>
-        <p:nvSpPr>
-          <p:cNvPr id="7" name="TextBox 6"/>
+            <a:pPr algn="ctr"/>
+            <a:r>
+              <a:rPr sz="1100" b="0" i="1">
+                <a:solidFill>
+                  <a:srgbClr val="7F8C8D"/>
+                </a:solidFill>
+                <a:latin typeface="Calibri"/>
+              </a:rPr>
+              <a:t>Figure 1. Input length vs. baseline 1D-CNN performance. Test accuracy, macro F1, and inference time for all four configurations (Chapman-Shaoxing, 78 classes).</a:t>
+            </a:r>
+          </a:p>
+        </p:txBody>
+      </p:sp>
+      <p:sp>
+        <p:nvSpPr>
+          <p:cNvPr id="6" name="TextBox 5"/>
           <p:cNvSpPr txBox="1"/>
           <p:nvPr/>
         </p:nvSpPr>
         <p:spPr>
           <a:xfrm>
-            <a:off x="6300000" y="791999"/>
-            <a:ext cx="5580000" cy="180000"/>
+            <a:off x="288000" y="6570000"/>
+            <a:ext cx="7200000" cy="180000"/>
           </a:xfrm>
           <a:prstGeom prst="rect">
             <a:avLst/>
@@ -3806,51 +4609,27 @@
           <a:p>
             <a:pPr algn="l"/>
             <a:r>
-              <a:rPr sz="1400" b="1" i="0">
-                <a:solidFill>
-                  <a:srgbClr val="0B3D91"/>
-                </a:solidFill>
-                <a:latin typeface="Calibri"/>
-              </a:rPr>
-              <a:t>len=1000</a:t>
-            </a:r>
-          </a:p>
-        </p:txBody>
-      </p:sp>
-      <p:pic>
-        <p:nvPicPr>
-          <p:cNvPr id="8" name="Picture 7" descr="Figure_1_500.png"/>
-          <p:cNvPicPr>
-            <a:picLocks noChangeAspect="1"/>
-          </p:cNvPicPr>
-          <p:nvPr/>
-        </p:nvPicPr>
-        <p:blipFill>
-          <a:blip r:embed="rId4"/>
-          <a:stretch>
-            <a:fillRect/>
-          </a:stretch>
-        </p:blipFill>
-        <p:spPr>
-          <a:xfrm>
-            <a:off x="360000" y="3780000"/>
-            <a:ext cx="5026610" cy="2520000"/>
-          </a:xfrm>
-          <a:prstGeom prst="rect">
-            <a:avLst/>
-          </a:prstGeom>
-        </p:spPr>
-      </p:pic>
-      <p:sp>
-        <p:nvSpPr>
-          <p:cNvPr id="9" name="TextBox 8"/>
+              <a:rPr sz="1000" b="0" i="0">
+                <a:solidFill>
+                  <a:srgbClr val="7F8C8D"/>
+                </a:solidFill>
+                <a:latin typeface="Calibri"/>
+              </a:rPr>
+              <a:t>Results — figure</a:t>
+            </a:r>
+          </a:p>
+        </p:txBody>
+      </p:sp>
+      <p:sp>
+        <p:nvSpPr>
+          <p:cNvPr id="7" name="TextBox 6"/>
           <p:cNvSpPr txBox="1"/>
           <p:nvPr/>
         </p:nvSpPr>
         <p:spPr>
           <a:xfrm>
-            <a:off x="360000" y="3564000"/>
-            <a:ext cx="5580000" cy="180000"/>
+            <a:off x="10032119" y="6570000"/>
+            <a:ext cx="1800000" cy="180000"/>
           </a:xfrm>
           <a:prstGeom prst="rect">
             <a:avLst/>
@@ -3863,101 +4642,7 @@
           </a:bodyPr>
           <a:lstStyle/>
           <a:p>
-            <a:pPr algn="l"/>
-            <a:r>
-              <a:rPr sz="1400" b="1" i="0">
-                <a:solidFill>
-                  <a:srgbClr val="0B3D91"/>
-                </a:solidFill>
-                <a:latin typeface="Calibri"/>
-              </a:rPr>
-              <a:t>len=500</a:t>
-            </a:r>
-          </a:p>
-        </p:txBody>
-      </p:sp>
-      <p:pic>
-        <p:nvPicPr>
-          <p:cNvPr id="10" name="Picture 9" descr="Figure_500_4_worker.png"/>
-          <p:cNvPicPr>
-            <a:picLocks noChangeAspect="1"/>
-          </p:cNvPicPr>
-          <p:nvPr/>
-        </p:nvPicPr>
-        <p:blipFill>
-          <a:blip r:embed="rId5"/>
-          <a:stretch>
-            <a:fillRect/>
-          </a:stretch>
-        </p:blipFill>
-        <p:spPr>
-          <a:xfrm>
-            <a:off x="6300000" y="3780000"/>
-            <a:ext cx="3779999" cy="2520000"/>
-          </a:xfrm>
-          <a:prstGeom prst="rect">
-            <a:avLst/>
-          </a:prstGeom>
-        </p:spPr>
-      </p:pic>
-      <p:sp>
-        <p:nvSpPr>
-          <p:cNvPr id="11" name="TextBox 10"/>
-          <p:cNvSpPr txBox="1"/>
-          <p:nvPr/>
-        </p:nvSpPr>
-        <p:spPr>
-          <a:xfrm>
-            <a:off x="6300000" y="3564000"/>
-            <a:ext cx="5580000" cy="180000"/>
-          </a:xfrm>
-          <a:prstGeom prst="rect">
-            <a:avLst/>
-          </a:prstGeom>
-          <a:noFill/>
-        </p:spPr>
-        <p:txBody>
-          <a:bodyPr wrap="square" lIns="0" rIns="0" tIns="0" bIns="0">
-            <a:spAutoFit/>
-          </a:bodyPr>
-          <a:lstStyle/>
-          <a:p>
-            <a:pPr algn="l"/>
-            <a:r>
-              <a:rPr sz="1400" b="1" i="0">
-                <a:solidFill>
-                  <a:srgbClr val="0B3D91"/>
-                </a:solidFill>
-                <a:latin typeface="Calibri"/>
-              </a:rPr>
-              <a:t>len=500 + 4 workers</a:t>
-            </a:r>
-          </a:p>
-        </p:txBody>
-      </p:sp>
-      <p:sp>
-        <p:nvSpPr>
-          <p:cNvPr id="12" name="TextBox 11"/>
-          <p:cNvSpPr txBox="1"/>
-          <p:nvPr/>
-        </p:nvSpPr>
-        <p:spPr>
-          <a:xfrm>
-            <a:off x="288000" y="6570000"/>
-            <a:ext cx="7200000" cy="180000"/>
-          </a:xfrm>
-          <a:prstGeom prst="rect">
-            <a:avLst/>
-          </a:prstGeom>
-          <a:noFill/>
-        </p:spPr>
-        <p:txBody>
-          <a:bodyPr wrap="square" lIns="0" rIns="0" tIns="0" bIns="0">
-            <a:spAutoFit/>
-          </a:bodyPr>
-          <a:lstStyle/>
-          <a:p>
-            <a:pPr algn="l"/>
+            <a:pPr algn="r"/>
             <a:r>
               <a:rPr sz="1000" b="0" i="0">
                 <a:solidFill>
@@ -3965,42 +4650,7 @@
                 </a:solidFill>
                 <a:latin typeface="Calibri"/>
               </a:rPr>
-              <a:t>Training dynamics</a:t>
-            </a:r>
-          </a:p>
-        </p:txBody>
-      </p:sp>
-      <p:sp>
-        <p:nvSpPr>
-          <p:cNvPr id="13" name="TextBox 12"/>
-          <p:cNvSpPr txBox="1"/>
-          <p:nvPr/>
-        </p:nvSpPr>
-        <p:spPr>
-          <a:xfrm>
-            <a:off x="10032119" y="6570000"/>
-            <a:ext cx="1800000" cy="180000"/>
-          </a:xfrm>
-          <a:prstGeom prst="rect">
-            <a:avLst/>
-          </a:prstGeom>
-          <a:noFill/>
-        </p:spPr>
-        <p:txBody>
-          <a:bodyPr wrap="square" lIns="0" rIns="0" tIns="0" bIns="0">
-            <a:spAutoFit/>
-          </a:bodyPr>
-          <a:lstStyle/>
-          <a:p>
-            <a:pPr algn="r"/>
-            <a:r>
-              <a:rPr sz="1000" b="0" i="0">
-                <a:solidFill>
-                  <a:srgbClr val="7F8C8D"/>
-                </a:solidFill>
-                <a:latin typeface="Calibri"/>
-              </a:rPr>
-              <a:t>10 / 20</a:t>
+              <a:t>10 / 21</a:t>
             </a:r>
           </a:p>
         </p:txBody>
@@ -4017,6 +4667,412 @@
 </file>
 
 <file path=ppt/slides/slide12.xml><?xml version="1.0" encoding="utf-8"?>
+<p:sld xmlns:a="http://schemas.openxmlformats.org/drawingml/2006/main" xmlns:p="http://schemas.openxmlformats.org/presentationml/2006/main" xmlns:r="http://schemas.openxmlformats.org/officeDocument/2006/relationships">
+  <p:cSld>
+    <p:spTree>
+      <p:nvGrpSpPr>
+        <p:cNvPr id="1" name=""/>
+        <p:cNvGrpSpPr/>
+        <p:nvPr/>
+      </p:nvGrpSpPr>
+      <p:grpSpPr/>
+      <p:sp>
+        <p:nvSpPr>
+          <p:cNvPr id="2" name="Rectangle 1"/>
+          <p:cNvSpPr/>
+          <p:nvPr/>
+        </p:nvSpPr>
+        <p:spPr>
+          <a:xfrm>
+            <a:off x="0" y="0"/>
+            <a:ext cx="12192119" cy="612000"/>
+          </a:xfrm>
+          <a:prstGeom prst="rect">
+            <a:avLst/>
+          </a:prstGeom>
+          <a:solidFill>
+            <a:srgbClr val="0B3D91"/>
+          </a:solidFill>
+          <a:ln>
+            <a:noFill/>
+          </a:ln>
+          <a:effectLst/>
+        </p:spPr>
+        <p:style>
+          <a:lnRef idx="1">
+            <a:schemeClr val="accent1"/>
+          </a:lnRef>
+          <a:fillRef idx="3">
+            <a:schemeClr val="accent1"/>
+          </a:fillRef>
+          <a:effectRef idx="2">
+            <a:schemeClr val="accent1"/>
+          </a:effectRef>
+          <a:fontRef idx="minor">
+            <a:schemeClr val="lt1"/>
+          </a:fontRef>
+        </p:style>
+        <p:txBody>
+          <a:bodyPr rtlCol="0" anchor="ctr"/>
+          <a:lstStyle/>
+          <a:p>
+            <a:pPr algn="ctr"/>
+          </a:p>
+        </p:txBody>
+      </p:sp>
+      <p:sp>
+        <p:nvSpPr>
+          <p:cNvPr id="3" name="TextBox 2"/>
+          <p:cNvSpPr txBox="1"/>
+          <p:nvPr/>
+        </p:nvSpPr>
+        <p:spPr>
+          <a:xfrm>
+            <a:off x="360000" y="108000"/>
+            <a:ext cx="11520000" cy="432000"/>
+          </a:xfrm>
+          <a:prstGeom prst="rect">
+            <a:avLst/>
+          </a:prstGeom>
+          <a:noFill/>
+        </p:spPr>
+        <p:txBody>
+          <a:bodyPr wrap="square" lIns="0" rIns="0" tIns="0" bIns="0">
+            <a:spAutoFit/>
+          </a:bodyPr>
+          <a:lstStyle/>
+          <a:p>
+            <a:pPr algn="l"/>
+            <a:r>
+              <a:rPr sz="2600" b="1" i="0">
+                <a:solidFill>
+                  <a:srgbClr val="FFFFFF"/>
+                </a:solidFill>
+                <a:latin typeface="Calibri"/>
+              </a:rPr>
+              <a:t>Training Dynamics — 4 Configs Side by Side</a:t>
+            </a:r>
+          </a:p>
+        </p:txBody>
+      </p:sp>
+      <p:pic>
+        <p:nvPicPr>
+          <p:cNvPr id="4" name="Picture 3" descr="Figure_1.png"/>
+          <p:cNvPicPr>
+            <a:picLocks noChangeAspect="1"/>
+          </p:cNvPicPr>
+          <p:nvPr/>
+        </p:nvPicPr>
+        <p:blipFill>
+          <a:blip r:embed="rId2"/>
+          <a:stretch>
+            <a:fillRect/>
+          </a:stretch>
+        </p:blipFill>
+        <p:spPr>
+          <a:xfrm>
+            <a:off x="360000" y="1007999"/>
+            <a:ext cx="3779999" cy="2520000"/>
+          </a:xfrm>
+          <a:prstGeom prst="rect">
+            <a:avLst/>
+          </a:prstGeom>
+        </p:spPr>
+      </p:pic>
+      <p:sp>
+        <p:nvSpPr>
+          <p:cNvPr id="5" name="TextBox 4"/>
+          <p:cNvSpPr txBox="1"/>
+          <p:nvPr/>
+        </p:nvSpPr>
+        <p:spPr>
+          <a:xfrm>
+            <a:off x="360000" y="791999"/>
+            <a:ext cx="5580000" cy="180000"/>
+          </a:xfrm>
+          <a:prstGeom prst="rect">
+            <a:avLst/>
+          </a:prstGeom>
+          <a:noFill/>
+        </p:spPr>
+        <p:txBody>
+          <a:bodyPr wrap="square" lIns="0" rIns="0" tIns="0" bIns="0">
+            <a:spAutoFit/>
+          </a:bodyPr>
+          <a:lstStyle/>
+          <a:p>
+            <a:pPr algn="l"/>
+            <a:r>
+              <a:rPr sz="1400" b="1" i="0">
+                <a:solidFill>
+                  <a:srgbClr val="0B3D91"/>
+                </a:solidFill>
+                <a:latin typeface="Calibri"/>
+              </a:rPr>
+              <a:t>len=5000</a:t>
+            </a:r>
+          </a:p>
+        </p:txBody>
+      </p:sp>
+      <p:pic>
+        <p:nvPicPr>
+          <p:cNvPr id="6" name="Picture 5" descr="Figure_1000.png"/>
+          <p:cNvPicPr>
+            <a:picLocks noChangeAspect="1"/>
+          </p:cNvPicPr>
+          <p:nvPr/>
+        </p:nvPicPr>
+        <p:blipFill>
+          <a:blip r:embed="rId3"/>
+          <a:stretch>
+            <a:fillRect/>
+          </a:stretch>
+        </p:blipFill>
+        <p:spPr>
+          <a:xfrm>
+            <a:off x="6300000" y="1007999"/>
+            <a:ext cx="1517039" cy="2520000"/>
+          </a:xfrm>
+          <a:prstGeom prst="rect">
+            <a:avLst/>
+          </a:prstGeom>
+        </p:spPr>
+      </p:pic>
+      <p:sp>
+        <p:nvSpPr>
+          <p:cNvPr id="7" name="TextBox 6"/>
+          <p:cNvSpPr txBox="1"/>
+          <p:nvPr/>
+        </p:nvSpPr>
+        <p:spPr>
+          <a:xfrm>
+            <a:off x="6300000" y="791999"/>
+            <a:ext cx="5580000" cy="180000"/>
+          </a:xfrm>
+          <a:prstGeom prst="rect">
+            <a:avLst/>
+          </a:prstGeom>
+          <a:noFill/>
+        </p:spPr>
+        <p:txBody>
+          <a:bodyPr wrap="square" lIns="0" rIns="0" tIns="0" bIns="0">
+            <a:spAutoFit/>
+          </a:bodyPr>
+          <a:lstStyle/>
+          <a:p>
+            <a:pPr algn="l"/>
+            <a:r>
+              <a:rPr sz="1400" b="1" i="0">
+                <a:solidFill>
+                  <a:srgbClr val="0B3D91"/>
+                </a:solidFill>
+                <a:latin typeface="Calibri"/>
+              </a:rPr>
+              <a:t>len=1000</a:t>
+            </a:r>
+          </a:p>
+        </p:txBody>
+      </p:sp>
+      <p:pic>
+        <p:nvPicPr>
+          <p:cNvPr id="8" name="Picture 7" descr="Figure_1_500.png"/>
+          <p:cNvPicPr>
+            <a:picLocks noChangeAspect="1"/>
+          </p:cNvPicPr>
+          <p:nvPr/>
+        </p:nvPicPr>
+        <p:blipFill>
+          <a:blip r:embed="rId4"/>
+          <a:stretch>
+            <a:fillRect/>
+          </a:stretch>
+        </p:blipFill>
+        <p:spPr>
+          <a:xfrm>
+            <a:off x="360000" y="3780000"/>
+            <a:ext cx="5026610" cy="2520000"/>
+          </a:xfrm>
+          <a:prstGeom prst="rect">
+            <a:avLst/>
+          </a:prstGeom>
+        </p:spPr>
+      </p:pic>
+      <p:sp>
+        <p:nvSpPr>
+          <p:cNvPr id="9" name="TextBox 8"/>
+          <p:cNvSpPr txBox="1"/>
+          <p:nvPr/>
+        </p:nvSpPr>
+        <p:spPr>
+          <a:xfrm>
+            <a:off x="360000" y="3564000"/>
+            <a:ext cx="5580000" cy="180000"/>
+          </a:xfrm>
+          <a:prstGeom prst="rect">
+            <a:avLst/>
+          </a:prstGeom>
+          <a:noFill/>
+        </p:spPr>
+        <p:txBody>
+          <a:bodyPr wrap="square" lIns="0" rIns="0" tIns="0" bIns="0">
+            <a:spAutoFit/>
+          </a:bodyPr>
+          <a:lstStyle/>
+          <a:p>
+            <a:pPr algn="l"/>
+            <a:r>
+              <a:rPr sz="1400" b="1" i="0">
+                <a:solidFill>
+                  <a:srgbClr val="0B3D91"/>
+                </a:solidFill>
+                <a:latin typeface="Calibri"/>
+              </a:rPr>
+              <a:t>len=500</a:t>
+            </a:r>
+          </a:p>
+        </p:txBody>
+      </p:sp>
+      <p:pic>
+        <p:nvPicPr>
+          <p:cNvPr id="10" name="Picture 9" descr="Figure_500_4_worker.png"/>
+          <p:cNvPicPr>
+            <a:picLocks noChangeAspect="1"/>
+          </p:cNvPicPr>
+          <p:nvPr/>
+        </p:nvPicPr>
+        <p:blipFill>
+          <a:blip r:embed="rId5"/>
+          <a:stretch>
+            <a:fillRect/>
+          </a:stretch>
+        </p:blipFill>
+        <p:spPr>
+          <a:xfrm>
+            <a:off x="6300000" y="3780000"/>
+            <a:ext cx="3779999" cy="2520000"/>
+          </a:xfrm>
+          <a:prstGeom prst="rect">
+            <a:avLst/>
+          </a:prstGeom>
+        </p:spPr>
+      </p:pic>
+      <p:sp>
+        <p:nvSpPr>
+          <p:cNvPr id="11" name="TextBox 10"/>
+          <p:cNvSpPr txBox="1"/>
+          <p:nvPr/>
+        </p:nvSpPr>
+        <p:spPr>
+          <a:xfrm>
+            <a:off x="6300000" y="3564000"/>
+            <a:ext cx="5580000" cy="180000"/>
+          </a:xfrm>
+          <a:prstGeom prst="rect">
+            <a:avLst/>
+          </a:prstGeom>
+          <a:noFill/>
+        </p:spPr>
+        <p:txBody>
+          <a:bodyPr wrap="square" lIns="0" rIns="0" tIns="0" bIns="0">
+            <a:spAutoFit/>
+          </a:bodyPr>
+          <a:lstStyle/>
+          <a:p>
+            <a:pPr algn="l"/>
+            <a:r>
+              <a:rPr sz="1400" b="1" i="0">
+                <a:solidFill>
+                  <a:srgbClr val="0B3D91"/>
+                </a:solidFill>
+                <a:latin typeface="Calibri"/>
+              </a:rPr>
+              <a:t>len=500 + 4 workers</a:t>
+            </a:r>
+          </a:p>
+        </p:txBody>
+      </p:sp>
+      <p:sp>
+        <p:nvSpPr>
+          <p:cNvPr id="12" name="TextBox 11"/>
+          <p:cNvSpPr txBox="1"/>
+          <p:nvPr/>
+        </p:nvSpPr>
+        <p:spPr>
+          <a:xfrm>
+            <a:off x="288000" y="6570000"/>
+            <a:ext cx="7200000" cy="180000"/>
+          </a:xfrm>
+          <a:prstGeom prst="rect">
+            <a:avLst/>
+          </a:prstGeom>
+          <a:noFill/>
+        </p:spPr>
+        <p:txBody>
+          <a:bodyPr wrap="square" lIns="0" rIns="0" tIns="0" bIns="0">
+            <a:spAutoFit/>
+          </a:bodyPr>
+          <a:lstStyle/>
+          <a:p>
+            <a:pPr algn="l"/>
+            <a:r>
+              <a:rPr sz="1000" b="0" i="0">
+                <a:solidFill>
+                  <a:srgbClr val="7F8C8D"/>
+                </a:solidFill>
+                <a:latin typeface="Calibri"/>
+              </a:rPr>
+              <a:t>Training dynamics</a:t>
+            </a:r>
+          </a:p>
+        </p:txBody>
+      </p:sp>
+      <p:sp>
+        <p:nvSpPr>
+          <p:cNvPr id="13" name="TextBox 12"/>
+          <p:cNvSpPr txBox="1"/>
+          <p:nvPr/>
+        </p:nvSpPr>
+        <p:spPr>
+          <a:xfrm>
+            <a:off x="10032119" y="6570000"/>
+            <a:ext cx="1800000" cy="180000"/>
+          </a:xfrm>
+          <a:prstGeom prst="rect">
+            <a:avLst/>
+          </a:prstGeom>
+          <a:noFill/>
+        </p:spPr>
+        <p:txBody>
+          <a:bodyPr wrap="square" lIns="0" rIns="0" tIns="0" bIns="0">
+            <a:spAutoFit/>
+          </a:bodyPr>
+          <a:lstStyle/>
+          <a:p>
+            <a:pPr algn="r"/>
+            <a:r>
+              <a:rPr sz="1000" b="0" i="0">
+                <a:solidFill>
+                  <a:srgbClr val="7F8C8D"/>
+                </a:solidFill>
+                <a:latin typeface="Calibri"/>
+              </a:rPr>
+              <a:t>11 / 21</a:t>
+            </a:r>
+          </a:p>
+        </p:txBody>
+      </p:sp>
+    </p:spTree>
+  </p:cSld>
+  <p:clrMapOvr>
+    <a:masterClrMapping/>
+  </p:clrMapOvr>
+  <p:transition spd="med">
+    <p:fade/>
+  </p:transition>
+</p:sld>
+</file>
+
+<file path=ppt/slides/slide13.xml><?xml version="1.0" encoding="utf-8"?>
 <p:sld xmlns:a="http://schemas.openxmlformats.org/drawingml/2006/main" xmlns:p="http://schemas.openxmlformats.org/presentationml/2006/main" xmlns:r="http://schemas.openxmlformats.org/officeDocument/2006/relationships">
   <p:cSld>
     <p:spTree>
@@ -5168,7 +6224,7 @@
                 </a:solidFill>
                 <a:latin typeface="Calibri"/>
               </a:rPr>
-              <a:t>11 / 20</a:t>
+              <a:t>12 / 21</a:t>
             </a:r>
           </a:p>
         </p:txBody>
@@ -5184,7 +6240,7 @@
 </p:sld>
 </file>
 
-<file path=ppt/slides/slide13.xml><?xml version="1.0" encoding="utf-8"?>
+<file path=ppt/slides/slide14.xml><?xml version="1.0" encoding="utf-8"?>
 <p:sld xmlns:a="http://schemas.openxmlformats.org/drawingml/2006/main" xmlns:p="http://schemas.openxmlformats.org/presentationml/2006/main" xmlns:r="http://schemas.openxmlformats.org/officeDocument/2006/relationships">
   <p:cSld>
     <p:spTree>
@@ -5268,7 +6324,7 @@
                 </a:solidFill>
                 <a:latin typeface="Calibri"/>
               </a:rPr>
-              <a:t>Speed: Training and Inference</a:t>
+              <a:t>Hybrid-plan ablation: separating two title commitments</a:t>
             </a:r>
           </a:p>
         </p:txBody>
@@ -5303,7 +6359,7 @@
                 </a:solidFill>
                 <a:latin typeface="Calibri"/>
               </a:rPr>
-              <a:t>Side effect of shorter input: experiments become interactive</a:t>
+              <a:t>Why a 2×2 ablation is necessary to attribute the gains in the title.</a:t>
             </a:r>
           </a:p>
         </p:txBody>
@@ -5317,7 +6373,7 @@
         <p:spPr>
           <a:xfrm>
             <a:off x="540000" y="1080000"/>
-            <a:ext cx="5580000" cy="5040000"/>
+            <a:ext cx="10980000" cy="5040000"/>
           </a:xfrm>
           <a:prstGeom prst="rect">
             <a:avLst/>
@@ -5339,13 +6395,13 @@
               </a:spcAft>
             </a:pPr>
             <a:r>
-              <a:rPr sz="1700">
+              <a:rPr sz="1800">
                 <a:solidFill>
                   <a:srgbClr val="2C3E50"/>
                 </a:solidFill>
                 <a:latin typeface="Calibri"/>
               </a:rPr>
-              <a:t>  Epoch time (Chapman-Shaoxing, RTX 5090, AMP):</a:t>
+              <a:t>•  The thesis title makes two independent commitments: (i) a 12-lead input, and (ii) reference-node augmentation on top of the decimated baseline.</a:t>
             </a:r>
           </a:p>
           <a:p>
@@ -5358,13 +6414,13 @@
               </a:spcAft>
             </a:pPr>
             <a:r>
-              <a:rPr sz="1700">
+              <a:rPr sz="1800">
                 <a:solidFill>
                   <a:srgbClr val="2C3E50"/>
                 </a:solidFill>
                 <a:latin typeface="Calibri"/>
               </a:rPr>
-              <a:t>     len=5000        ≈ 195 s / epoch</a:t>
+              <a:t>•  Until 30 April 2026, both were always varied together — so we could not say which lever was actually carrying the accuracy.</a:t>
             </a:r>
           </a:p>
           <a:p>
@@ -5377,13 +6433,13 @@
               </a:spcAft>
             </a:pPr>
             <a:r>
-              <a:rPr sz="1700">
+              <a:rPr sz="1800">
                 <a:solidFill>
                   <a:srgbClr val="2C3E50"/>
                 </a:solidFill>
                 <a:latin typeface="Calibri"/>
               </a:rPr>
-              <a:t>     len=1000        ≈  32 s / epoch  (6.1× faster)</a:t>
+              <a:t>•  We therefore ran a 2×2 ablation: {1-lead, 12-lead} × {augment OFF, augment ON}, at fixed decimation=10 (len=500), identical seed, identical code revision, Chapman–Shaoxing.</a:t>
             </a:r>
           </a:p>
           <a:p>
@@ -5396,13 +6452,13 @@
               </a:spcAft>
             </a:pPr>
             <a:r>
-              <a:rPr sz="1700">
+              <a:rPr sz="1800">
                 <a:solidFill>
                   <a:srgbClr val="2C3E50"/>
                 </a:solidFill>
                 <a:latin typeface="Calibri"/>
               </a:rPr>
-              <a:t>     len=500         ≈  30 s / epoch  (6.5× faster)</a:t>
+              <a:t>•  Each cell is otherwise identical to the len=500 reference reported earlier: same 1D-CNN, same optimiser, same train/val/test split, same early-stop criterion.</a:t>
             </a:r>
           </a:p>
           <a:p>
@@ -5415,15 +6471,342 @@
               </a:spcAft>
             </a:pPr>
             <a:r>
-              <a:rPr sz="1700">
+              <a:rPr sz="1800">
                 <a:solidFill>
                   <a:srgbClr val="2C3E50"/>
                 </a:solidFill>
                 <a:latin typeface="Calibri"/>
               </a:rPr>
-              <a:t>     len=500 + 4 wrk ≈  20 s / epoch  (9.8× faster)</a:t>
-            </a:r>
-          </a:p>
+              <a:t>•  The four cells let us answer: 'is the title's hybrid plan really the source of the +9 pp gain, or is one ingredient doing all the work?'</a:t>
+            </a:r>
+          </a:p>
+        </p:txBody>
+      </p:sp>
+      <p:sp>
+        <p:nvSpPr>
+          <p:cNvPr id="6" name="TextBox 5"/>
+          <p:cNvSpPr txBox="1"/>
+          <p:nvPr/>
+        </p:nvSpPr>
+        <p:spPr>
+          <a:xfrm>
+            <a:off x="288000" y="6570000"/>
+            <a:ext cx="7200000" cy="180000"/>
+          </a:xfrm>
+          <a:prstGeom prst="rect">
+            <a:avLst/>
+          </a:prstGeom>
+          <a:noFill/>
+        </p:spPr>
+        <p:txBody>
+          <a:bodyPr wrap="square" lIns="0" rIns="0" tIns="0" bIns="0">
+            <a:spAutoFit/>
+          </a:bodyPr>
+          <a:lstStyle/>
+          <a:p>
+            <a:pPr algn="l"/>
+            <a:r>
+              <a:rPr sz="1000" b="0" i="0">
+                <a:solidFill>
+                  <a:srgbClr val="7F8C8D"/>
+                </a:solidFill>
+                <a:latin typeface="Calibri"/>
+              </a:rPr>
+              <a:t>Hybrid ablation · setup</a:t>
+            </a:r>
+          </a:p>
+        </p:txBody>
+      </p:sp>
+      <p:sp>
+        <p:nvSpPr>
+          <p:cNvPr id="7" name="TextBox 6"/>
+          <p:cNvSpPr txBox="1"/>
+          <p:nvPr/>
+        </p:nvSpPr>
+        <p:spPr>
+          <a:xfrm>
+            <a:off x="10032119" y="6570000"/>
+            <a:ext cx="1800000" cy="180000"/>
+          </a:xfrm>
+          <a:prstGeom prst="rect">
+            <a:avLst/>
+          </a:prstGeom>
+          <a:noFill/>
+        </p:spPr>
+        <p:txBody>
+          <a:bodyPr wrap="square" lIns="0" rIns="0" tIns="0" bIns="0">
+            <a:spAutoFit/>
+          </a:bodyPr>
+          <a:lstStyle/>
+          <a:p>
+            <a:pPr algn="r"/>
+            <a:r>
+              <a:rPr sz="1000" b="0" i="0">
+                <a:solidFill>
+                  <a:srgbClr val="7F8C8D"/>
+                </a:solidFill>
+                <a:latin typeface="Calibri"/>
+              </a:rPr>
+              <a:t>13 / 21</a:t>
+            </a:r>
+          </a:p>
+        </p:txBody>
+      </p:sp>
+    </p:spTree>
+  </p:cSld>
+  <p:clrMapOvr>
+    <a:masterClrMapping/>
+  </p:clrMapOvr>
+  <p:transition spd="med">
+    <p:fade/>
+  </p:transition>
+  <p:timing>
+    <p:tnLst>
+      <p:par>
+        <p:cTn id="1" dur="indefinite" restart="never" nodeType="tmRoot">
+          <p:childTnLst>
+            <p:seq concurrent="1" nextAc="seek">
+              <p:cTn id="2" dur="indefinite" nodeType="mainSeq">
+                <p:childTnLst>
+                  <p:par>
+                    <p:cTn id="3" fill="hold">
+                      <p:stCondLst>
+                        <p:cond delay="indefinite"/>
+                      </p:stCondLst>
+                      <p:childTnLst>
+                        <p:par>
+                          <p:cTn id="4" fill="hold">
+                            <p:stCondLst>
+                              <p:cond delay="0"/>
+                            </p:stCondLst>
+                            <p:childTnLst>
+                              <p:par>
+                                <p:cTn id="5" presetID="1" presetClass="entr" presetSubtype="0" fill="hold" grpId="0" nodeType="clickEffect">
+                                  <p:stCondLst>
+                                    <p:cond delay="0"/>
+                                  </p:stCondLst>
+                                  <p:childTnLst>
+                                    <p:set>
+                                      <p:cBhvr>
+                                        <p:cTn id="6" dur="1" fill="hold">
+                                          <p:stCondLst>
+                                            <p:cond delay="0"/>
+                                          </p:stCondLst>
+                                        </p:cTn>
+                                        <p:tgtEl>
+                                          <p:spTgt spid="5"/>
+                                        </p:tgtEl>
+                                        <p:attrNameLst>
+                                          <p:attrName>style.visibility</p:attrName>
+                                        </p:attrNameLst>
+                                      </p:cBhvr>
+                                      <p:to>
+                                        <p:strVal val="visible"/>
+                                      </p:to>
+                                    </p:set>
+                                  </p:childTnLst>
+                                </p:cTn>
+                              </p:par>
+                            </p:childTnLst>
+                          </p:cTn>
+                        </p:par>
+                      </p:childTnLst>
+                    </p:cTn>
+                  </p:par>
+                </p:childTnLst>
+              </p:cTn>
+              <p:prevCondLst>
+                <p:cond evt="onPrev" delay="0">
+                  <p:tgtEl>
+                    <p:sldTgt/>
+                  </p:tgtEl>
+                </p:cond>
+              </p:prevCondLst>
+              <p:nextCondLst>
+                <p:cond evt="onNext" delay="0">
+                  <p:tgtEl>
+                    <p:sldTgt/>
+                  </p:tgtEl>
+                </p:cond>
+              </p:nextCondLst>
+            </p:seq>
+          </p:childTnLst>
+        </p:cTn>
+      </p:par>
+    </p:tnLst>
+  </p:timing>
+</p:sld>
+</file>
+
+<file path=ppt/slides/slide15.xml><?xml version="1.0" encoding="utf-8"?>
+<p:sld xmlns:a="http://schemas.openxmlformats.org/drawingml/2006/main" xmlns:p="http://schemas.openxmlformats.org/presentationml/2006/main" xmlns:r="http://schemas.openxmlformats.org/officeDocument/2006/relationships">
+  <p:cSld>
+    <p:spTree>
+      <p:nvGrpSpPr>
+        <p:cNvPr id="1" name=""/>
+        <p:cNvGrpSpPr/>
+        <p:nvPr/>
+      </p:nvGrpSpPr>
+      <p:grpSpPr/>
+      <p:sp>
+        <p:nvSpPr>
+          <p:cNvPr id="2" name="Rectangle 1"/>
+          <p:cNvSpPr/>
+          <p:nvPr/>
+        </p:nvSpPr>
+        <p:spPr>
+          <a:xfrm>
+            <a:off x="0" y="0"/>
+            <a:ext cx="12192119" cy="612000"/>
+          </a:xfrm>
+          <a:prstGeom prst="rect">
+            <a:avLst/>
+          </a:prstGeom>
+          <a:solidFill>
+            <a:srgbClr val="0B3D91"/>
+          </a:solidFill>
+          <a:ln>
+            <a:noFill/>
+          </a:ln>
+          <a:effectLst/>
+        </p:spPr>
+        <p:style>
+          <a:lnRef idx="1">
+            <a:schemeClr val="accent1"/>
+          </a:lnRef>
+          <a:fillRef idx="3">
+            <a:schemeClr val="accent1"/>
+          </a:fillRef>
+          <a:effectRef idx="2">
+            <a:schemeClr val="accent1"/>
+          </a:effectRef>
+          <a:fontRef idx="minor">
+            <a:schemeClr val="lt1"/>
+          </a:fontRef>
+        </p:style>
+        <p:txBody>
+          <a:bodyPr rtlCol="0" anchor="ctr"/>
+          <a:lstStyle/>
+          <a:p>
+            <a:pPr algn="ctr"/>
+          </a:p>
+        </p:txBody>
+      </p:sp>
+      <p:sp>
+        <p:nvSpPr>
+          <p:cNvPr id="3" name="TextBox 2"/>
+          <p:cNvSpPr txBox="1"/>
+          <p:nvPr/>
+        </p:nvSpPr>
+        <p:spPr>
+          <a:xfrm>
+            <a:off x="360000" y="108000"/>
+            <a:ext cx="11520000" cy="432000"/>
+          </a:xfrm>
+          <a:prstGeom prst="rect">
+            <a:avLst/>
+          </a:prstGeom>
+          <a:noFill/>
+        </p:spPr>
+        <p:txBody>
+          <a:bodyPr wrap="square" lIns="0" rIns="0" tIns="0" bIns="0">
+            <a:spAutoFit/>
+          </a:bodyPr>
+          <a:lstStyle/>
+          <a:p>
+            <a:pPr algn="l"/>
+            <a:r>
+              <a:rPr sz="2600" b="1" i="0">
+                <a:solidFill>
+                  <a:srgbClr val="FFFFFF"/>
+                </a:solidFill>
+                <a:latin typeface="Calibri"/>
+              </a:rPr>
+              <a:t>Augmentation is the dominant lever</a:t>
+            </a:r>
+          </a:p>
+        </p:txBody>
+      </p:sp>
+      <p:sp>
+        <p:nvSpPr>
+          <p:cNvPr id="4" name="TextBox 3"/>
+          <p:cNvSpPr txBox="1"/>
+          <p:nvPr/>
+        </p:nvSpPr>
+        <p:spPr>
+          <a:xfrm>
+            <a:off x="360000" y="684000"/>
+            <a:ext cx="11520000" cy="360000"/>
+          </a:xfrm>
+          <a:prstGeom prst="rect">
+            <a:avLst/>
+          </a:prstGeom>
+          <a:noFill/>
+        </p:spPr>
+        <p:txBody>
+          <a:bodyPr wrap="square" lIns="0" rIns="0" tIns="0" bIns="0">
+            <a:spAutoFit/>
+          </a:bodyPr>
+          <a:lstStyle/>
+          <a:p>
+            <a:pPr algn="l"/>
+            <a:r>
+              <a:rPr sz="1400" b="0" i="1">
+                <a:solidFill>
+                  <a:srgbClr val="7F8C8D"/>
+                </a:solidFill>
+                <a:latin typeface="Calibri"/>
+              </a:rPr>
+              <a:t>Toggling reference-node augmentation moves accuracy by ≈30 pp — with or without 12 leads.</a:t>
+            </a:r>
+          </a:p>
+        </p:txBody>
+      </p:sp>
+      <p:pic>
+        <p:nvPicPr>
+          <p:cNvPr id="5" name="Picture 4" descr="Figure_hybrid_headline.png"/>
+          <p:cNvPicPr>
+            <a:picLocks noChangeAspect="1"/>
+          </p:cNvPicPr>
+          <p:nvPr/>
+        </p:nvPicPr>
+        <p:blipFill>
+          <a:blip r:embed="rId2"/>
+          <a:stretch>
+            <a:fillRect/>
+          </a:stretch>
+        </p:blipFill>
+        <p:spPr>
+          <a:xfrm>
+            <a:off x="360000" y="1080000"/>
+            <a:ext cx="6120000" cy="2135743"/>
+          </a:xfrm>
+          <a:prstGeom prst="rect">
+            <a:avLst/>
+          </a:prstGeom>
+        </p:spPr>
+      </p:pic>
+      <p:sp>
+        <p:nvSpPr>
+          <p:cNvPr id="6" name="TextBox 5"/>
+          <p:cNvSpPr txBox="1"/>
+          <p:nvPr/>
+        </p:nvSpPr>
+        <p:spPr>
+          <a:xfrm>
+            <a:off x="6660000" y="1260000"/>
+            <a:ext cx="5040000" cy="4680000"/>
+          </a:xfrm>
+          <a:prstGeom prst="rect">
+            <a:avLst/>
+          </a:prstGeom>
+          <a:noFill/>
+        </p:spPr>
+        <p:txBody>
+          <a:bodyPr wrap="square">
+            <a:spAutoFit/>
+          </a:bodyPr>
+          <a:lstStyle/>
           <a:p>
             <a:pPr algn="l">
               <a:lnSpc>
@@ -5434,13 +6817,13 @@
               </a:spcAft>
             </a:pPr>
             <a:r>
-              <a:rPr sz="1700">
+              <a:rPr sz="1600">
                 <a:solidFill>
                   <a:srgbClr val="2C3E50"/>
                 </a:solidFill>
                 <a:latin typeface="Calibri"/>
               </a:rPr>
-              <a:t>  </a:t>
+              <a:t>•  augment OFF → ON: 1-lead +30.36 pp accuracy / +0.91 macro F1 (67.14 → 97.50%, 0.0682 → 0.9755).</a:t>
             </a:r>
           </a:p>
           <a:p>
@@ -5453,13 +6836,13 @@
               </a:spcAft>
             </a:pPr>
             <a:r>
-              <a:rPr sz="1700">
+              <a:rPr sz="1600">
                 <a:solidFill>
                   <a:srgbClr val="2C3E50"/>
                 </a:solidFill>
                 <a:latin typeface="Calibri"/>
               </a:rPr>
-              <a:t>  Inference (single 12-lead sample):</a:t>
+              <a:t>•  augment OFF → ON: 12-lead +29.11 pp accuracy / +0.90 macro F1 (68.29 → 97.40%, 0.0762 → 0.9743).</a:t>
             </a:r>
           </a:p>
           <a:p>
@@ -5472,13 +6855,13 @@
               </a:spcAft>
             </a:pPr>
             <a:r>
-              <a:rPr sz="1700">
+              <a:rPr sz="1600">
                 <a:solidFill>
                   <a:srgbClr val="2C3E50"/>
                 </a:solidFill>
                 <a:latin typeface="Calibri"/>
               </a:rPr>
-              <a:t>     len=5000:  89.88 ms</a:t>
+              <a:t>•  The reference-node oversampler is the empirical heart of the title — not the channel count.</a:t>
             </a:r>
           </a:p>
           <a:p>
@@ -5491,17 +6874,886 @@
               </a:spcAft>
             </a:pPr>
             <a:r>
-              <a:rPr sz="1700">
+              <a:rPr sz="1600">
                 <a:solidFill>
                   <a:srgbClr val="2C3E50"/>
                 </a:solidFill>
                 <a:latin typeface="Calibri"/>
               </a:rPr>
-              <a:t>     len=500:   27.20 ms  (3.3× faster)</a:t>
-            </a:r>
-          </a:p>
-        </p:txBody>
-      </p:sp>
+              <a:t>•  Without it, long-tail classes never accumulate enough gradient to lift macro F1 above 0.08, no matter how many leads are fed in.</a:t>
+            </a:r>
+          </a:p>
+        </p:txBody>
+      </p:sp>
+      <p:sp>
+        <p:nvSpPr>
+          <p:cNvPr id="7" name="TextBox 6"/>
+          <p:cNvSpPr txBox="1"/>
+          <p:nvPr/>
+        </p:nvSpPr>
+        <p:spPr>
+          <a:xfrm>
+            <a:off x="288000" y="6570000"/>
+            <a:ext cx="7200000" cy="180000"/>
+          </a:xfrm>
+          <a:prstGeom prst="rect">
+            <a:avLst/>
+          </a:prstGeom>
+          <a:noFill/>
+        </p:spPr>
+        <p:txBody>
+          <a:bodyPr wrap="square" lIns="0" rIns="0" tIns="0" bIns="0">
+            <a:spAutoFit/>
+          </a:bodyPr>
+          <a:lstStyle/>
+          <a:p>
+            <a:pPr algn="l"/>
+            <a:r>
+              <a:rPr sz="1000" b="0" i="0">
+                <a:solidFill>
+                  <a:srgbClr val="7F8C8D"/>
+                </a:solidFill>
+                <a:latin typeface="Calibri"/>
+              </a:rPr>
+              <a:t>Hybrid ablation · augmentation lever</a:t>
+            </a:r>
+          </a:p>
+        </p:txBody>
+      </p:sp>
+      <p:sp>
+        <p:nvSpPr>
+          <p:cNvPr id="8" name="TextBox 7"/>
+          <p:cNvSpPr txBox="1"/>
+          <p:nvPr/>
+        </p:nvSpPr>
+        <p:spPr>
+          <a:xfrm>
+            <a:off x="10032119" y="6570000"/>
+            <a:ext cx="1800000" cy="180000"/>
+          </a:xfrm>
+          <a:prstGeom prst="rect">
+            <a:avLst/>
+          </a:prstGeom>
+          <a:noFill/>
+        </p:spPr>
+        <p:txBody>
+          <a:bodyPr wrap="square" lIns="0" rIns="0" tIns="0" bIns="0">
+            <a:spAutoFit/>
+          </a:bodyPr>
+          <a:lstStyle/>
+          <a:p>
+            <a:pPr algn="r"/>
+            <a:r>
+              <a:rPr sz="1000" b="0" i="0">
+                <a:solidFill>
+                  <a:srgbClr val="7F8C8D"/>
+                </a:solidFill>
+                <a:latin typeface="Calibri"/>
+              </a:rPr>
+              <a:t>14 / 21</a:t>
+            </a:r>
+          </a:p>
+        </p:txBody>
+      </p:sp>
+    </p:spTree>
+  </p:cSld>
+  <p:clrMapOvr>
+    <a:masterClrMapping/>
+  </p:clrMapOvr>
+  <p:transition spd="med">
+    <p:fade/>
+  </p:transition>
+  <p:timing>
+    <p:tnLst>
+      <p:par>
+        <p:cTn id="1" dur="indefinite" restart="never" nodeType="tmRoot">
+          <p:childTnLst>
+            <p:seq concurrent="1" nextAc="seek">
+              <p:cTn id="2" dur="indefinite" nodeType="mainSeq">
+                <p:childTnLst>
+                  <p:par>
+                    <p:cTn id="3" fill="hold">
+                      <p:stCondLst>
+                        <p:cond delay="indefinite"/>
+                      </p:stCondLst>
+                      <p:childTnLst>
+                        <p:par>
+                          <p:cTn id="4" fill="hold">
+                            <p:stCondLst>
+                              <p:cond delay="0"/>
+                            </p:stCondLst>
+                            <p:childTnLst>
+                              <p:par>
+                                <p:cTn id="5" presetID="1" presetClass="entr" presetSubtype="0" fill="hold" grpId="0" nodeType="clickEffect">
+                                  <p:stCondLst>
+                                    <p:cond delay="0"/>
+                                  </p:stCondLst>
+                                  <p:childTnLst>
+                                    <p:set>
+                                      <p:cBhvr>
+                                        <p:cTn id="6" dur="1" fill="hold">
+                                          <p:stCondLst>
+                                            <p:cond delay="0"/>
+                                          </p:stCondLst>
+                                        </p:cTn>
+                                        <p:tgtEl>
+                                          <p:spTgt spid="6"/>
+                                        </p:tgtEl>
+                                        <p:attrNameLst>
+                                          <p:attrName>style.visibility</p:attrName>
+                                        </p:attrNameLst>
+                                      </p:cBhvr>
+                                      <p:to>
+                                        <p:strVal val="visible"/>
+                                      </p:to>
+                                    </p:set>
+                                  </p:childTnLst>
+                                </p:cTn>
+                              </p:par>
+                            </p:childTnLst>
+                          </p:cTn>
+                        </p:par>
+                      </p:childTnLst>
+                    </p:cTn>
+                  </p:par>
+                </p:childTnLst>
+              </p:cTn>
+              <p:prevCondLst>
+                <p:cond evt="onPrev" delay="0">
+                  <p:tgtEl>
+                    <p:sldTgt/>
+                  </p:tgtEl>
+                </p:cond>
+              </p:prevCondLst>
+              <p:nextCondLst>
+                <p:cond evt="onNext" delay="0">
+                  <p:tgtEl>
+                    <p:sldTgt/>
+                  </p:tgtEl>
+                </p:cond>
+              </p:nextCondLst>
+            </p:seq>
+          </p:childTnLst>
+        </p:cTn>
+      </p:par>
+    </p:tnLst>
+  </p:timing>
+</p:sld>
+</file>
+
+<file path=ppt/slides/slide16.xml><?xml version="1.0" encoding="utf-8"?>
+<p:sld xmlns:a="http://schemas.openxmlformats.org/drawingml/2006/main" xmlns:p="http://schemas.openxmlformats.org/presentationml/2006/main" xmlns:r="http://schemas.openxmlformats.org/officeDocument/2006/relationships">
+  <p:cSld>
+    <p:spTree>
+      <p:nvGrpSpPr>
+        <p:cNvPr id="1" name=""/>
+        <p:cNvGrpSpPr/>
+        <p:nvPr/>
+      </p:nvGrpSpPr>
+      <p:grpSpPr/>
+      <p:sp>
+        <p:nvSpPr>
+          <p:cNvPr id="2" name="Rectangle 1"/>
+          <p:cNvSpPr/>
+          <p:nvPr/>
+        </p:nvSpPr>
+        <p:spPr>
+          <a:xfrm>
+            <a:off x="0" y="0"/>
+            <a:ext cx="12192119" cy="612000"/>
+          </a:xfrm>
+          <a:prstGeom prst="rect">
+            <a:avLst/>
+          </a:prstGeom>
+          <a:solidFill>
+            <a:srgbClr val="0B3D91"/>
+          </a:solidFill>
+          <a:ln>
+            <a:noFill/>
+          </a:ln>
+          <a:effectLst/>
+        </p:spPr>
+        <p:style>
+          <a:lnRef idx="1">
+            <a:schemeClr val="accent1"/>
+          </a:lnRef>
+          <a:fillRef idx="3">
+            <a:schemeClr val="accent1"/>
+          </a:fillRef>
+          <a:effectRef idx="2">
+            <a:schemeClr val="accent1"/>
+          </a:effectRef>
+          <a:fontRef idx="minor">
+            <a:schemeClr val="lt1"/>
+          </a:fontRef>
+        </p:style>
+        <p:txBody>
+          <a:bodyPr rtlCol="0" anchor="ctr"/>
+          <a:lstStyle/>
+          <a:p>
+            <a:pPr algn="ctr"/>
+          </a:p>
+        </p:txBody>
+      </p:sp>
+      <p:sp>
+        <p:nvSpPr>
+          <p:cNvPr id="3" name="TextBox 2"/>
+          <p:cNvSpPr txBox="1"/>
+          <p:nvPr/>
+        </p:nvSpPr>
+        <p:spPr>
+          <a:xfrm>
+            <a:off x="360000" y="108000"/>
+            <a:ext cx="11520000" cy="432000"/>
+          </a:xfrm>
+          <a:prstGeom prst="rect">
+            <a:avLst/>
+          </a:prstGeom>
+          <a:noFill/>
+        </p:spPr>
+        <p:txBody>
+          <a:bodyPr wrap="square" lIns="0" rIns="0" tIns="0" bIns="0">
+            <a:spAutoFit/>
+          </a:bodyPr>
+          <a:lstStyle/>
+          <a:p>
+            <a:pPr algn="l"/>
+            <a:r>
+              <a:rPr sz="2600" b="1" i="0">
+                <a:solidFill>
+                  <a:srgbClr val="FFFFFF"/>
+                </a:solidFill>
+                <a:latin typeface="Calibri"/>
+              </a:rPr>
+              <a:t>Channel count is a tie-breaker, not a lever</a:t>
+            </a:r>
+          </a:p>
+        </p:txBody>
+      </p:sp>
+      <p:sp>
+        <p:nvSpPr>
+          <p:cNvPr id="4" name="TextBox 3"/>
+          <p:cNvSpPr txBox="1"/>
+          <p:nvPr/>
+        </p:nvSpPr>
+        <p:spPr>
+          <a:xfrm>
+            <a:off x="360000" y="684000"/>
+            <a:ext cx="11520000" cy="360000"/>
+          </a:xfrm>
+          <a:prstGeom prst="rect">
+            <a:avLst/>
+          </a:prstGeom>
+          <a:noFill/>
+        </p:spPr>
+        <p:txBody>
+          <a:bodyPr wrap="square" lIns="0" rIns="0" tIns="0" bIns="0">
+            <a:spAutoFit/>
+          </a:bodyPr>
+          <a:lstStyle/>
+          <a:p>
+            <a:pPr algn="l"/>
+            <a:r>
+              <a:rPr sz="1400" b="0" i="1">
+                <a:solidFill>
+                  <a:srgbClr val="7F8C8D"/>
+                </a:solidFill>
+                <a:latin typeface="Calibri"/>
+              </a:rPr>
+              <a:t>Once augmentation is on, 1-lead and 12-lead are within seed-noise of each other.</a:t>
+            </a:r>
+          </a:p>
+        </p:txBody>
+      </p:sp>
+      <p:graphicFrame>
+        <p:nvGraphicFramePr>
+          <p:cNvPr id="5" name="Table 4"/>
+          <p:cNvGraphicFramePr>
+            <a:graphicFrameLocks noGrp="1"/>
+          </p:cNvGraphicFramePr>
+          <p:nvPr/>
+        </p:nvGraphicFramePr>
+        <p:xfrm>
+          <a:off x="360000" y="1080000"/>
+          <a:ext cx="5940000" cy="2520000"/>
+        </p:xfrm>
+        <a:graphic>
+          <a:graphicData uri="http://schemas.openxmlformats.org/drawingml/2006/table">
+            <a:tbl>
+              <a:tblPr firstRow="1" bandRow="1">
+                <a:tableStyleId>{5C22544A-7EE6-4342-B048-85BDC9FD1C3A}</a:tableStyleId>
+              </a:tblPr>
+              <a:tblGrid>
+                <a:gridCol w="1188000"/>
+                <a:gridCol w="1188000"/>
+                <a:gridCol w="1188000"/>
+                <a:gridCol w="1188000"/>
+                <a:gridCol w="1188000"/>
+              </a:tblGrid>
+              <a:tr h="504000">
+                <a:tc>
+                  <a:txBody>
+                    <a:bodyPr/>
+                    <a:lstStyle/>
+                    <a:p>
+                      <a:r>
+                        <a:rPr sz="1300" b="1">
+                          <a:solidFill>
+                            <a:srgbClr val="FFFFFF"/>
+                          </a:solidFill>
+                          <a:latin typeface="Calibri"/>
+                        </a:rPr>
+                        <a:t>Config</a:t>
+                      </a:r>
+                    </a:p>
+                  </a:txBody>
+                  <a:tcPr>
+                    <a:solidFill>
+                      <a:srgbClr val="0B3D91"/>
+                    </a:solidFill>
+                  </a:tcPr>
+                </a:tc>
+                <a:tc>
+                  <a:txBody>
+                    <a:bodyPr/>
+                    <a:lstStyle/>
+                    <a:p>
+                      <a:r>
+                        <a:rPr sz="1300" b="1">
+                          <a:solidFill>
+                            <a:srgbClr val="FFFFFF"/>
+                          </a:solidFill>
+                          <a:latin typeface="Calibri"/>
+                        </a:rPr>
+                        <a:t>Test Acc</a:t>
+                      </a:r>
+                    </a:p>
+                  </a:txBody>
+                  <a:tcPr>
+                    <a:solidFill>
+                      <a:srgbClr val="0B3D91"/>
+                    </a:solidFill>
+                  </a:tcPr>
+                </a:tc>
+                <a:tc>
+                  <a:txBody>
+                    <a:bodyPr/>
+                    <a:lstStyle/>
+                    <a:p>
+                      <a:r>
+                        <a:rPr sz="1300" b="1">
+                          <a:solidFill>
+                            <a:srgbClr val="FFFFFF"/>
+                          </a:solidFill>
+                          <a:latin typeface="Calibri"/>
+                        </a:rPr>
+                        <a:t>Macro F1</a:t>
+                      </a:r>
+                    </a:p>
+                  </a:txBody>
+                  <a:tcPr>
+                    <a:solidFill>
+                      <a:srgbClr val="0B3D91"/>
+                    </a:solidFill>
+                  </a:tcPr>
+                </a:tc>
+                <a:tc>
+                  <a:txBody>
+                    <a:bodyPr/>
+                    <a:lstStyle/>
+                    <a:p>
+                      <a:r>
+                        <a:rPr sz="1300" b="1">
+                          <a:solidFill>
+                            <a:srgbClr val="FFFFFF"/>
+                          </a:solidFill>
+                          <a:latin typeface="Calibri"/>
+                        </a:rPr>
+                        <a:t>Inference</a:t>
+                      </a:r>
+                    </a:p>
+                  </a:txBody>
+                  <a:tcPr>
+                    <a:solidFill>
+                      <a:srgbClr val="0B3D91"/>
+                    </a:solidFill>
+                  </a:tcPr>
+                </a:tc>
+                <a:tc>
+                  <a:txBody>
+                    <a:bodyPr/>
+                    <a:lstStyle/>
+                    <a:p>
+                      <a:r>
+                        <a:rPr sz="1300" b="1">
+                          <a:solidFill>
+                            <a:srgbClr val="FFFFFF"/>
+                          </a:solidFill>
+                          <a:latin typeface="Calibri"/>
+                        </a:rPr>
+                        <a:t>Confidence</a:t>
+                      </a:r>
+                    </a:p>
+                  </a:txBody>
+                  <a:tcPr>
+                    <a:solidFill>
+                      <a:srgbClr val="0B3D91"/>
+                    </a:solidFill>
+                  </a:tcPr>
+                </a:tc>
+              </a:tr>
+              <a:tr h="504000">
+                <a:tc>
+                  <a:txBody>
+                    <a:bodyPr/>
+                    <a:lstStyle/>
+                    <a:p>
+                      <a:r>
+                        <a:rPr sz="1300">
+                          <a:solidFill>
+                            <a:srgbClr val="2C3E50"/>
+                          </a:solidFill>
+                          <a:latin typeface="Calibri"/>
+                        </a:rPr>
+                        <a:t>1-lead · aug OFF</a:t>
+                      </a:r>
+                    </a:p>
+                  </a:txBody>
+                  <a:tcPr>
+                    <a:solidFill>
+                      <a:srgbClr val="FFFFFF"/>
+                    </a:solidFill>
+                  </a:tcPr>
+                </a:tc>
+                <a:tc>
+                  <a:txBody>
+                    <a:bodyPr/>
+                    <a:lstStyle/>
+                    <a:p>
+                      <a:r>
+                        <a:rPr sz="1300">
+                          <a:solidFill>
+                            <a:srgbClr val="2C3E50"/>
+                          </a:solidFill>
+                          <a:latin typeface="Calibri"/>
+                        </a:rPr>
+                        <a:t>67.14%</a:t>
+                      </a:r>
+                    </a:p>
+                  </a:txBody>
+                  <a:tcPr>
+                    <a:solidFill>
+                      <a:srgbClr val="FFFFFF"/>
+                    </a:solidFill>
+                  </a:tcPr>
+                </a:tc>
+                <a:tc>
+                  <a:txBody>
+                    <a:bodyPr/>
+                    <a:lstStyle/>
+                    <a:p>
+                      <a:r>
+                        <a:rPr sz="1300">
+                          <a:solidFill>
+                            <a:srgbClr val="2C3E50"/>
+                          </a:solidFill>
+                          <a:latin typeface="Calibri"/>
+                        </a:rPr>
+                        <a:t>0.0682</a:t>
+                      </a:r>
+                    </a:p>
+                  </a:txBody>
+                  <a:tcPr>
+                    <a:solidFill>
+                      <a:srgbClr val="FFFFFF"/>
+                    </a:solidFill>
+                  </a:tcPr>
+                </a:tc>
+                <a:tc>
+                  <a:txBody>
+                    <a:bodyPr/>
+                    <a:lstStyle/>
+                    <a:p>
+                      <a:r>
+                        <a:rPr sz="1300">
+                          <a:solidFill>
+                            <a:srgbClr val="2C3E50"/>
+                          </a:solidFill>
+                          <a:latin typeface="Calibri"/>
+                        </a:rPr>
+                        <a:t>14.74 ms</a:t>
+                      </a:r>
+                    </a:p>
+                  </a:txBody>
+                  <a:tcPr>
+                    <a:solidFill>
+                      <a:srgbClr val="FFFFFF"/>
+                    </a:solidFill>
+                  </a:tcPr>
+                </a:tc>
+                <a:tc>
+                  <a:txBody>
+                    <a:bodyPr/>
+                    <a:lstStyle/>
+                    <a:p>
+                      <a:r>
+                        <a:rPr sz="1300">
+                          <a:solidFill>
+                            <a:srgbClr val="2C3E50"/>
+                          </a:solidFill>
+                          <a:latin typeface="Calibri"/>
+                        </a:rPr>
+                        <a:t>60.01%</a:t>
+                      </a:r>
+                    </a:p>
+                  </a:txBody>
+                  <a:tcPr>
+                    <a:solidFill>
+                      <a:srgbClr val="FFFFFF"/>
+                    </a:solidFill>
+                  </a:tcPr>
+                </a:tc>
+              </a:tr>
+              <a:tr h="504000">
+                <a:tc>
+                  <a:txBody>
+                    <a:bodyPr/>
+                    <a:lstStyle/>
+                    <a:p>
+                      <a:r>
+                        <a:rPr sz="1300">
+                          <a:solidFill>
+                            <a:srgbClr val="2C3E50"/>
+                          </a:solidFill>
+                          <a:latin typeface="Calibri"/>
+                        </a:rPr>
+                        <a:t>12-lead · aug OFF</a:t>
+                      </a:r>
+                    </a:p>
+                  </a:txBody>
+                  <a:tcPr>
+                    <a:solidFill>
+                      <a:srgbClr val="F8F9FA"/>
+                    </a:solidFill>
+                  </a:tcPr>
+                </a:tc>
+                <a:tc>
+                  <a:txBody>
+                    <a:bodyPr/>
+                    <a:lstStyle/>
+                    <a:p>
+                      <a:r>
+                        <a:rPr sz="1300">
+                          <a:solidFill>
+                            <a:srgbClr val="2C3E50"/>
+                          </a:solidFill>
+                          <a:latin typeface="Calibri"/>
+                        </a:rPr>
+                        <a:t>68.29%</a:t>
+                      </a:r>
+                    </a:p>
+                  </a:txBody>
+                  <a:tcPr>
+                    <a:solidFill>
+                      <a:srgbClr val="F8F9FA"/>
+                    </a:solidFill>
+                  </a:tcPr>
+                </a:tc>
+                <a:tc>
+                  <a:txBody>
+                    <a:bodyPr/>
+                    <a:lstStyle/>
+                    <a:p>
+                      <a:r>
+                        <a:rPr sz="1300">
+                          <a:solidFill>
+                            <a:srgbClr val="2C3E50"/>
+                          </a:solidFill>
+                          <a:latin typeface="Calibri"/>
+                        </a:rPr>
+                        <a:t>0.0762</a:t>
+                      </a:r>
+                    </a:p>
+                  </a:txBody>
+                  <a:tcPr>
+                    <a:solidFill>
+                      <a:srgbClr val="F8F9FA"/>
+                    </a:solidFill>
+                  </a:tcPr>
+                </a:tc>
+                <a:tc>
+                  <a:txBody>
+                    <a:bodyPr/>
+                    <a:lstStyle/>
+                    <a:p>
+                      <a:r>
+                        <a:rPr sz="1300">
+                          <a:solidFill>
+                            <a:srgbClr val="2C3E50"/>
+                          </a:solidFill>
+                          <a:latin typeface="Calibri"/>
+                        </a:rPr>
+                        <a:t>14.76 ms</a:t>
+                      </a:r>
+                    </a:p>
+                  </a:txBody>
+                  <a:tcPr>
+                    <a:solidFill>
+                      <a:srgbClr val="F8F9FA"/>
+                    </a:solidFill>
+                  </a:tcPr>
+                </a:tc>
+                <a:tc>
+                  <a:txBody>
+                    <a:bodyPr/>
+                    <a:lstStyle/>
+                    <a:p>
+                      <a:r>
+                        <a:rPr sz="1300">
+                          <a:solidFill>
+                            <a:srgbClr val="2C3E50"/>
+                          </a:solidFill>
+                          <a:latin typeface="Calibri"/>
+                        </a:rPr>
+                        <a:t>87.88%</a:t>
+                      </a:r>
+                    </a:p>
+                  </a:txBody>
+                  <a:tcPr>
+                    <a:solidFill>
+                      <a:srgbClr val="F8F9FA"/>
+                    </a:solidFill>
+                  </a:tcPr>
+                </a:tc>
+              </a:tr>
+              <a:tr h="504000">
+                <a:tc>
+                  <a:txBody>
+                    <a:bodyPr/>
+                    <a:lstStyle/>
+                    <a:p>
+                      <a:r>
+                        <a:rPr sz="1300">
+                          <a:solidFill>
+                            <a:srgbClr val="2C3E50"/>
+                          </a:solidFill>
+                          <a:latin typeface="Calibri"/>
+                        </a:rPr>
+                        <a:t>1-lead · aug ON</a:t>
+                      </a:r>
+                    </a:p>
+                  </a:txBody>
+                  <a:tcPr>
+                    <a:solidFill>
+                      <a:srgbClr val="FFFFFF"/>
+                    </a:solidFill>
+                  </a:tcPr>
+                </a:tc>
+                <a:tc>
+                  <a:txBody>
+                    <a:bodyPr/>
+                    <a:lstStyle/>
+                    <a:p>
+                      <a:r>
+                        <a:rPr sz="1300">
+                          <a:solidFill>
+                            <a:srgbClr val="2C3E50"/>
+                          </a:solidFill>
+                          <a:latin typeface="Calibri"/>
+                        </a:rPr>
+                        <a:t>97.50%</a:t>
+                      </a:r>
+                    </a:p>
+                  </a:txBody>
+                  <a:tcPr>
+                    <a:solidFill>
+                      <a:srgbClr val="FFFFFF"/>
+                    </a:solidFill>
+                  </a:tcPr>
+                </a:tc>
+                <a:tc>
+                  <a:txBody>
+                    <a:bodyPr/>
+                    <a:lstStyle/>
+                    <a:p>
+                      <a:r>
+                        <a:rPr sz="1300">
+                          <a:solidFill>
+                            <a:srgbClr val="2C3E50"/>
+                          </a:solidFill>
+                          <a:latin typeface="Calibri"/>
+                        </a:rPr>
+                        <a:t>0.9755</a:t>
+                      </a:r>
+                    </a:p>
+                  </a:txBody>
+                  <a:tcPr>
+                    <a:solidFill>
+                      <a:srgbClr val="FFFFFF"/>
+                    </a:solidFill>
+                  </a:tcPr>
+                </a:tc>
+                <a:tc>
+                  <a:txBody>
+                    <a:bodyPr/>
+                    <a:lstStyle/>
+                    <a:p>
+                      <a:r>
+                        <a:rPr sz="1300">
+                          <a:solidFill>
+                            <a:srgbClr val="2C3E50"/>
+                          </a:solidFill>
+                          <a:latin typeface="Calibri"/>
+                        </a:rPr>
+                        <a:t>13.25 ms</a:t>
+                      </a:r>
+                    </a:p>
+                  </a:txBody>
+                  <a:tcPr>
+                    <a:solidFill>
+                      <a:srgbClr val="FFFFFF"/>
+                    </a:solidFill>
+                  </a:tcPr>
+                </a:tc>
+                <a:tc>
+                  <a:txBody>
+                    <a:bodyPr/>
+                    <a:lstStyle/>
+                    <a:p>
+                      <a:r>
+                        <a:rPr sz="1300">
+                          <a:solidFill>
+                            <a:srgbClr val="2C3E50"/>
+                          </a:solidFill>
+                          <a:latin typeface="Calibri"/>
+                        </a:rPr>
+                        <a:t>77.38%</a:t>
+                      </a:r>
+                    </a:p>
+                  </a:txBody>
+                  <a:tcPr>
+                    <a:solidFill>
+                      <a:srgbClr val="FFFFFF"/>
+                    </a:solidFill>
+                  </a:tcPr>
+                </a:tc>
+              </a:tr>
+              <a:tr h="504000">
+                <a:tc>
+                  <a:txBody>
+                    <a:bodyPr/>
+                    <a:lstStyle/>
+                    <a:p>
+                      <a:r>
+                        <a:rPr sz="1300">
+                          <a:solidFill>
+                            <a:srgbClr val="2C3E50"/>
+                          </a:solidFill>
+                          <a:latin typeface="Calibri"/>
+                        </a:rPr>
+                        <a:t>12-lead · aug ON</a:t>
+                      </a:r>
+                    </a:p>
+                  </a:txBody>
+                  <a:tcPr>
+                    <a:solidFill>
+                      <a:srgbClr val="F8F9FA"/>
+                    </a:solidFill>
+                  </a:tcPr>
+                </a:tc>
+                <a:tc>
+                  <a:txBody>
+                    <a:bodyPr/>
+                    <a:lstStyle/>
+                    <a:p>
+                      <a:r>
+                        <a:rPr sz="1300">
+                          <a:solidFill>
+                            <a:srgbClr val="2C3E50"/>
+                          </a:solidFill>
+                          <a:latin typeface="Calibri"/>
+                        </a:rPr>
+                        <a:t>97.40%</a:t>
+                      </a:r>
+                    </a:p>
+                  </a:txBody>
+                  <a:tcPr>
+                    <a:solidFill>
+                      <a:srgbClr val="F8F9FA"/>
+                    </a:solidFill>
+                  </a:tcPr>
+                </a:tc>
+                <a:tc>
+                  <a:txBody>
+                    <a:bodyPr/>
+                    <a:lstStyle/>
+                    <a:p>
+                      <a:r>
+                        <a:rPr sz="1300">
+                          <a:solidFill>
+                            <a:srgbClr val="2C3E50"/>
+                          </a:solidFill>
+                          <a:latin typeface="Calibri"/>
+                        </a:rPr>
+                        <a:t>0.9743</a:t>
+                      </a:r>
+                    </a:p>
+                  </a:txBody>
+                  <a:tcPr>
+                    <a:solidFill>
+                      <a:srgbClr val="F8F9FA"/>
+                    </a:solidFill>
+                  </a:tcPr>
+                </a:tc>
+                <a:tc>
+                  <a:txBody>
+                    <a:bodyPr/>
+                    <a:lstStyle/>
+                    <a:p>
+                      <a:r>
+                        <a:rPr sz="1300">
+                          <a:solidFill>
+                            <a:srgbClr val="2C3E50"/>
+                          </a:solidFill>
+                          <a:latin typeface="Calibri"/>
+                        </a:rPr>
+                        <a:t>45.86 ms</a:t>
+                      </a:r>
+                    </a:p>
+                  </a:txBody>
+                  <a:tcPr>
+                    <a:solidFill>
+                      <a:srgbClr val="F8F9FA"/>
+                    </a:solidFill>
+                  </a:tcPr>
+                </a:tc>
+                <a:tc>
+                  <a:txBody>
+                    <a:bodyPr/>
+                    <a:lstStyle/>
+                    <a:p>
+                      <a:r>
+                        <a:rPr sz="1300">
+                          <a:solidFill>
+                            <a:srgbClr val="2C3E50"/>
+                          </a:solidFill>
+                          <a:latin typeface="Calibri"/>
+                        </a:rPr>
+                        <a:t>90.15%</a:t>
+                      </a:r>
+                    </a:p>
+                  </a:txBody>
+                  <a:tcPr>
+                    <a:solidFill>
+                      <a:srgbClr val="F8F9FA"/>
+                    </a:solidFill>
+                  </a:tcPr>
+                </a:tc>
+              </a:tr>
+            </a:tbl>
+          </a:graphicData>
+        </a:graphic>
+      </p:graphicFrame>
       <p:sp>
         <p:nvSpPr>
           <p:cNvPr id="6" name="TextBox 5"/>
@@ -5510,8 +7762,8 @@
         </p:nvSpPr>
         <p:spPr>
           <a:xfrm>
-            <a:off x="6120000" y="1080000"/>
-            <a:ext cx="5580000" cy="5040000"/>
+            <a:off x="6480000" y="1080000"/>
+            <a:ext cx="5220000" cy="5040000"/>
           </a:xfrm>
           <a:prstGeom prst="rect">
             <a:avLst/>
@@ -5533,13 +7785,13 @@
               </a:spcAft>
             </a:pPr>
             <a:r>
-              <a:rPr sz="1600">
+              <a:rPr sz="1500">
                 <a:solidFill>
                   <a:srgbClr val="2C3E50"/>
                 </a:solidFill>
                 <a:latin typeface="Calibri"/>
               </a:rPr>
-              <a:t>•  Hyper-parameter tuning becomes an interactive loop (≈ 10 min runs).</a:t>
+              <a:t>•  With augment ON: 1-lead beats 12-lead by 0.10 pp accuracy and 0.0012 macro F1 — well inside the seed-noise band of this corpus.</a:t>
             </a:r>
           </a:p>
           <a:p>
@@ -5552,13 +7804,13 @@
               </a:spcAft>
             </a:pPr>
             <a:r>
-              <a:rPr sz="1600">
+              <a:rPr sz="1500">
                 <a:solidFill>
                   <a:srgbClr val="2C3E50"/>
                 </a:solidFill>
                 <a:latin typeface="Calibri"/>
               </a:rPr>
-              <a:t>•  DataLoader workers=4 uncovers an I/O bottleneck we did not know we had — another +33 % epoch speedup, no model change.</a:t>
+              <a:t>•  With augment OFF: 12-lead beats 1-lead by 1.15 pp accuracy and 0.008 macro F1 — also within seed-noise.</a:t>
             </a:r>
           </a:p>
           <a:p>
@@ -5571,13 +7823,13 @@
               </a:spcAft>
             </a:pPr>
             <a:r>
-              <a:rPr sz="1600">
+              <a:rPr sz="1500">
                 <a:solidFill>
                   <a:srgbClr val="2C3E50"/>
                 </a:solidFill>
                 <a:latin typeface="Calibri"/>
               </a:rPr>
-              <a:t>•  Inference well under the 1-second clinical budget, on CPU-class margins.</a:t>
+              <a:t>•  Decimation has already concentrated diagnostic signal on the fiducial-point graph — the model does not need 12 leads to recover the same morphology.</a:t>
             </a:r>
           </a:p>
           <a:p>
@@ -5590,13 +7842,13 @@
               </a:spcAft>
             </a:pPr>
             <a:r>
-              <a:rPr sz="1600">
+              <a:rPr sz="1500">
                 <a:solidFill>
                   <a:srgbClr val="2C3E50"/>
                 </a:solidFill>
                 <a:latin typeface="Calibri"/>
               </a:rPr>
-              <a:t>•  Model file unchanged in size and parameter count; CPU / edge deployment also gets the ≈3× inference speedup for free.</a:t>
+              <a:t>•  Channel count is a deployment choice, not an accuracy lever, once augmentation is on the decimated input.</a:t>
             </a:r>
           </a:p>
         </p:txBody>
@@ -5631,7 +7883,7 @@
                 </a:solidFill>
                 <a:latin typeface="Calibri"/>
               </a:rPr>
-              <a:t>Speed</a:t>
+              <a:t>Hybrid ablation · channel count</a:t>
             </a:r>
           </a:p>
         </p:txBody>
@@ -5666,7 +7918,1002 @@
                 </a:solidFill>
                 <a:latin typeface="Calibri"/>
               </a:rPr>
-              <a:t>12 / 20</a:t>
+              <a:t>15 / 21</a:t>
+            </a:r>
+          </a:p>
+        </p:txBody>
+      </p:sp>
+    </p:spTree>
+  </p:cSld>
+  <p:clrMapOvr>
+    <a:masterClrMapping/>
+  </p:clrMapOvr>
+  <p:transition spd="med">
+    <p:fade/>
+  </p:transition>
+  <p:timing>
+    <p:tnLst>
+      <p:par>
+        <p:cTn id="1" dur="indefinite" restart="never" nodeType="tmRoot">
+          <p:childTnLst>
+            <p:seq concurrent="1" nextAc="seek">
+              <p:cTn id="2" dur="indefinite" nodeType="mainSeq">
+                <p:childTnLst>
+                  <p:par>
+                    <p:cTn id="3" fill="hold">
+                      <p:stCondLst>
+                        <p:cond delay="indefinite"/>
+                      </p:stCondLst>
+                      <p:childTnLst>
+                        <p:par>
+                          <p:cTn id="4" fill="hold">
+                            <p:stCondLst>
+                              <p:cond delay="0"/>
+                            </p:stCondLst>
+                            <p:childTnLst>
+                              <p:par>
+                                <p:cTn id="5" presetID="1" presetClass="entr" presetSubtype="0" fill="hold" grpId="0" nodeType="clickEffect">
+                                  <p:stCondLst>
+                                    <p:cond delay="0"/>
+                                  </p:stCondLst>
+                                  <p:childTnLst>
+                                    <p:set>
+                                      <p:cBhvr>
+                                        <p:cTn id="6" dur="1" fill="hold">
+                                          <p:stCondLst>
+                                            <p:cond delay="0"/>
+                                          </p:stCondLst>
+                                        </p:cTn>
+                                        <p:tgtEl>
+                                          <p:spTgt spid="6"/>
+                                        </p:tgtEl>
+                                        <p:attrNameLst>
+                                          <p:attrName>style.visibility</p:attrName>
+                                        </p:attrNameLst>
+                                      </p:cBhvr>
+                                      <p:to>
+                                        <p:strVal val="visible"/>
+                                      </p:to>
+                                    </p:set>
+                                  </p:childTnLst>
+                                </p:cTn>
+                              </p:par>
+                            </p:childTnLst>
+                          </p:cTn>
+                        </p:par>
+                      </p:childTnLst>
+                    </p:cTn>
+                  </p:par>
+                </p:childTnLst>
+              </p:cTn>
+              <p:prevCondLst>
+                <p:cond evt="onPrev" delay="0">
+                  <p:tgtEl>
+                    <p:sldTgt/>
+                  </p:tgtEl>
+                </p:cond>
+              </p:prevCondLst>
+              <p:nextCondLst>
+                <p:cond evt="onNext" delay="0">
+                  <p:tgtEl>
+                    <p:sldTgt/>
+                  </p:tgtEl>
+                </p:cond>
+              </p:nextCondLst>
+            </p:seq>
+          </p:childTnLst>
+        </p:cTn>
+      </p:par>
+    </p:tnLst>
+  </p:timing>
+</p:sld>
+</file>
+
+<file path=ppt/slides/slide17.xml><?xml version="1.0" encoding="utf-8"?>
+<p:sld xmlns:a="http://schemas.openxmlformats.org/drawingml/2006/main" xmlns:p="http://schemas.openxmlformats.org/presentationml/2006/main" xmlns:r="http://schemas.openxmlformats.org/officeDocument/2006/relationships">
+  <p:cSld>
+    <p:spTree>
+      <p:nvGrpSpPr>
+        <p:cNvPr id="1" name=""/>
+        <p:cNvGrpSpPr/>
+        <p:nvPr/>
+      </p:nvGrpSpPr>
+      <p:grpSpPr/>
+      <p:sp>
+        <p:nvSpPr>
+          <p:cNvPr id="2" name="Rectangle 1"/>
+          <p:cNvSpPr/>
+          <p:nvPr/>
+        </p:nvSpPr>
+        <p:spPr>
+          <a:xfrm>
+            <a:off x="0" y="0"/>
+            <a:ext cx="12192119" cy="612000"/>
+          </a:xfrm>
+          <a:prstGeom prst="rect">
+            <a:avLst/>
+          </a:prstGeom>
+          <a:solidFill>
+            <a:srgbClr val="0B3D91"/>
+          </a:solidFill>
+          <a:ln>
+            <a:noFill/>
+          </a:ln>
+          <a:effectLst/>
+        </p:spPr>
+        <p:style>
+          <a:lnRef idx="1">
+            <a:schemeClr val="accent1"/>
+          </a:lnRef>
+          <a:fillRef idx="3">
+            <a:schemeClr val="accent1"/>
+          </a:fillRef>
+          <a:effectRef idx="2">
+            <a:schemeClr val="accent1"/>
+          </a:effectRef>
+          <a:fontRef idx="minor">
+            <a:schemeClr val="lt1"/>
+          </a:fontRef>
+        </p:style>
+        <p:txBody>
+          <a:bodyPr rtlCol="0" anchor="ctr"/>
+          <a:lstStyle/>
+          <a:p>
+            <a:pPr algn="ctr"/>
+          </a:p>
+        </p:txBody>
+      </p:sp>
+      <p:sp>
+        <p:nvSpPr>
+          <p:cNvPr id="3" name="TextBox 2"/>
+          <p:cNvSpPr txBox="1"/>
+          <p:nvPr/>
+        </p:nvSpPr>
+        <p:spPr>
+          <a:xfrm>
+            <a:off x="360000" y="108000"/>
+            <a:ext cx="11520000" cy="432000"/>
+          </a:xfrm>
+          <a:prstGeom prst="rect">
+            <a:avLst/>
+          </a:prstGeom>
+          <a:noFill/>
+        </p:spPr>
+        <p:txBody>
+          <a:bodyPr wrap="square" lIns="0" rIns="0" tIns="0" bIns="0">
+            <a:spAutoFit/>
+          </a:bodyPr>
+          <a:lstStyle/>
+          <a:p>
+            <a:pPr algn="l"/>
+            <a:r>
+              <a:rPr sz="2600" b="1" i="0">
+                <a:solidFill>
+                  <a:srgbClr val="FFFFFF"/>
+                </a:solidFill>
+                <a:latin typeface="Calibri"/>
+              </a:rPr>
+              <a:t>Deployment implication: edge vs hospital</a:t>
+            </a:r>
+          </a:p>
+        </p:txBody>
+      </p:sp>
+      <p:sp>
+        <p:nvSpPr>
+          <p:cNvPr id="4" name="TextBox 3"/>
+          <p:cNvSpPr txBox="1"/>
+          <p:nvPr/>
+        </p:nvSpPr>
+        <p:spPr>
+          <a:xfrm>
+            <a:off x="360000" y="684000"/>
+            <a:ext cx="11520000" cy="360000"/>
+          </a:xfrm>
+          <a:prstGeom prst="rect">
+            <a:avLst/>
+          </a:prstGeom>
+          <a:noFill/>
+        </p:spPr>
+        <p:txBody>
+          <a:bodyPr wrap="square" lIns="0" rIns="0" tIns="0" bIns="0">
+            <a:spAutoFit/>
+          </a:bodyPr>
+          <a:lstStyle/>
+          <a:p>
+            <a:pPr algn="l"/>
+            <a:r>
+              <a:rPr sz="1400" b="0" i="1">
+                <a:solidFill>
+                  <a:srgbClr val="7F8C8D"/>
+                </a:solidFill>
+                <a:latin typeface="Calibri"/>
+              </a:rPr>
+              <a:t>Same accuracy, different operating-point: speed vs confidence.</a:t>
+            </a:r>
+          </a:p>
+        </p:txBody>
+      </p:sp>
+      <p:pic>
+        <p:nvPicPr>
+          <p:cNvPr id="5" name="Picture 4" descr="Figure_hybrid_inference.png"/>
+          <p:cNvPicPr>
+            <a:picLocks noChangeAspect="1"/>
+          </p:cNvPicPr>
+          <p:nvPr/>
+        </p:nvPicPr>
+        <p:blipFill>
+          <a:blip r:embed="rId2"/>
+          <a:stretch>
+            <a:fillRect/>
+          </a:stretch>
+        </p:blipFill>
+        <p:spPr>
+          <a:xfrm>
+            <a:off x="360000" y="1080000"/>
+            <a:ext cx="6120000" cy="2076612"/>
+          </a:xfrm>
+          <a:prstGeom prst="rect">
+            <a:avLst/>
+          </a:prstGeom>
+        </p:spPr>
+      </p:pic>
+      <p:sp>
+        <p:nvSpPr>
+          <p:cNvPr id="6" name="TextBox 5"/>
+          <p:cNvSpPr txBox="1"/>
+          <p:nvPr/>
+        </p:nvSpPr>
+        <p:spPr>
+          <a:xfrm>
+            <a:off x="6660000" y="1260000"/>
+            <a:ext cx="5040000" cy="4680000"/>
+          </a:xfrm>
+          <a:prstGeom prst="rect">
+            <a:avLst/>
+          </a:prstGeom>
+          <a:noFill/>
+        </p:spPr>
+        <p:txBody>
+          <a:bodyPr wrap="square">
+            <a:spAutoFit/>
+          </a:bodyPr>
+          <a:lstStyle/>
+          <a:p>
+            <a:pPr algn="l">
+              <a:lnSpc>
+                <a:spcPct val="125000"/>
+              </a:lnSpc>
+              <a:spcAft>
+                <a:spcPts val="600"/>
+              </a:spcAft>
+            </a:pPr>
+            <a:r>
+              <a:rPr sz="1600">
+                <a:solidFill>
+                  <a:srgbClr val="2C3E50"/>
+                </a:solidFill>
+                <a:latin typeface="Calibri"/>
+              </a:rPr>
+              <a:t>•  1-lead is 3.5× faster than 12-lead on single-sample CPU inference (13.25 ms vs 45.86 ms).</a:t>
+            </a:r>
+          </a:p>
+          <a:p>
+            <a:pPr algn="l">
+              <a:lnSpc>
+                <a:spcPct val="125000"/>
+              </a:lnSpc>
+              <a:spcAft>
+                <a:spcPts val="600"/>
+              </a:spcAft>
+            </a:pPr>
+            <a:r>
+              <a:rPr sz="1600">
+                <a:solidFill>
+                  <a:srgbClr val="2C3E50"/>
+                </a:solidFill>
+                <a:latin typeface="Calibri"/>
+              </a:rPr>
+              <a:t>•  12-lead softmax confidence on a held-out sample is higher than 1-lead (90.15% vs 77.38%) — more headroom for confidence-thresholded reads.</a:t>
+            </a:r>
+          </a:p>
+          <a:p>
+            <a:pPr algn="l">
+              <a:lnSpc>
+                <a:spcPct val="125000"/>
+              </a:lnSpc>
+              <a:spcAft>
+                <a:spcPts val="600"/>
+              </a:spcAft>
+            </a:pPr>
+            <a:r>
+              <a:rPr sz="1600">
+                <a:solidFill>
+                  <a:srgbClr val="2C3E50"/>
+                </a:solidFill>
+                <a:latin typeface="Calibri"/>
+              </a:rPr>
+              <a:t>•  Edge / wearable deployment → 1-lead: faster, same accuracy, lower hardware and bandwidth budget.</a:t>
+            </a:r>
+          </a:p>
+          <a:p>
+            <a:pPr algn="l">
+              <a:lnSpc>
+                <a:spcPct val="125000"/>
+              </a:lnSpc>
+              <a:spcAft>
+                <a:spcPts val="600"/>
+              </a:spcAft>
+            </a:pPr>
+            <a:r>
+              <a:rPr sz="1600">
+                <a:solidFill>
+                  <a:srgbClr val="2C3E50"/>
+                </a:solidFill>
+                <a:latin typeface="Calibri"/>
+              </a:rPr>
+              <a:t>•  Hospital workflow with per-decision confidence reporting → 12-lead: accuracy is identical but the calibration margin is larger.</a:t>
+            </a:r>
+          </a:p>
+          <a:p>
+            <a:pPr algn="l">
+              <a:lnSpc>
+                <a:spcPct val="125000"/>
+              </a:lnSpc>
+              <a:spcAft>
+                <a:spcPts val="600"/>
+              </a:spcAft>
+            </a:pPr>
+            <a:r>
+              <a:rPr sz="1600">
+                <a:solidFill>
+                  <a:srgbClr val="2C3E50"/>
+                </a:solidFill>
+                <a:latin typeface="Calibri"/>
+              </a:rPr>
+              <a:t>•  The title's '12-lead' commitment is therefore best read as the hospital-grade operating point of a single classifier family.</a:t>
+            </a:r>
+          </a:p>
+        </p:txBody>
+      </p:sp>
+      <p:sp>
+        <p:nvSpPr>
+          <p:cNvPr id="7" name="TextBox 6"/>
+          <p:cNvSpPr txBox="1"/>
+          <p:nvPr/>
+        </p:nvSpPr>
+        <p:spPr>
+          <a:xfrm>
+            <a:off x="288000" y="6570000"/>
+            <a:ext cx="7200000" cy="180000"/>
+          </a:xfrm>
+          <a:prstGeom prst="rect">
+            <a:avLst/>
+          </a:prstGeom>
+          <a:noFill/>
+        </p:spPr>
+        <p:txBody>
+          <a:bodyPr wrap="square" lIns="0" rIns="0" tIns="0" bIns="0">
+            <a:spAutoFit/>
+          </a:bodyPr>
+          <a:lstStyle/>
+          <a:p>
+            <a:pPr algn="l"/>
+            <a:r>
+              <a:rPr sz="1000" b="0" i="0">
+                <a:solidFill>
+                  <a:srgbClr val="7F8C8D"/>
+                </a:solidFill>
+                <a:latin typeface="Calibri"/>
+              </a:rPr>
+              <a:t>Hybrid ablation · deployment</a:t>
+            </a:r>
+          </a:p>
+        </p:txBody>
+      </p:sp>
+      <p:sp>
+        <p:nvSpPr>
+          <p:cNvPr id="8" name="TextBox 7"/>
+          <p:cNvSpPr txBox="1"/>
+          <p:nvPr/>
+        </p:nvSpPr>
+        <p:spPr>
+          <a:xfrm>
+            <a:off x="10032119" y="6570000"/>
+            <a:ext cx="1800000" cy="180000"/>
+          </a:xfrm>
+          <a:prstGeom prst="rect">
+            <a:avLst/>
+          </a:prstGeom>
+          <a:noFill/>
+        </p:spPr>
+        <p:txBody>
+          <a:bodyPr wrap="square" lIns="0" rIns="0" tIns="0" bIns="0">
+            <a:spAutoFit/>
+          </a:bodyPr>
+          <a:lstStyle/>
+          <a:p>
+            <a:pPr algn="r"/>
+            <a:r>
+              <a:rPr sz="1000" b="0" i="0">
+                <a:solidFill>
+                  <a:srgbClr val="7F8C8D"/>
+                </a:solidFill>
+                <a:latin typeface="Calibri"/>
+              </a:rPr>
+              <a:t>16 / 21</a:t>
+            </a:r>
+          </a:p>
+        </p:txBody>
+      </p:sp>
+    </p:spTree>
+  </p:cSld>
+  <p:clrMapOvr>
+    <a:masterClrMapping/>
+  </p:clrMapOvr>
+  <p:transition spd="med">
+    <p:fade/>
+  </p:transition>
+  <p:timing>
+    <p:tnLst>
+      <p:par>
+        <p:cTn id="1" dur="indefinite" restart="never" nodeType="tmRoot">
+          <p:childTnLst>
+            <p:seq concurrent="1" nextAc="seek">
+              <p:cTn id="2" dur="indefinite" nodeType="mainSeq">
+                <p:childTnLst>
+                  <p:par>
+                    <p:cTn id="3" fill="hold">
+                      <p:stCondLst>
+                        <p:cond delay="indefinite"/>
+                      </p:stCondLst>
+                      <p:childTnLst>
+                        <p:par>
+                          <p:cTn id="4" fill="hold">
+                            <p:stCondLst>
+                              <p:cond delay="0"/>
+                            </p:stCondLst>
+                            <p:childTnLst>
+                              <p:par>
+                                <p:cTn id="5" presetID="1" presetClass="entr" presetSubtype="0" fill="hold" grpId="0" nodeType="clickEffect">
+                                  <p:stCondLst>
+                                    <p:cond delay="0"/>
+                                  </p:stCondLst>
+                                  <p:childTnLst>
+                                    <p:set>
+                                      <p:cBhvr>
+                                        <p:cTn id="6" dur="1" fill="hold">
+                                          <p:stCondLst>
+                                            <p:cond delay="0"/>
+                                          </p:stCondLst>
+                                        </p:cTn>
+                                        <p:tgtEl>
+                                          <p:spTgt spid="6"/>
+                                        </p:tgtEl>
+                                        <p:attrNameLst>
+                                          <p:attrName>style.visibility</p:attrName>
+                                        </p:attrNameLst>
+                                      </p:cBhvr>
+                                      <p:to>
+                                        <p:strVal val="visible"/>
+                                      </p:to>
+                                    </p:set>
+                                  </p:childTnLst>
+                                </p:cTn>
+                              </p:par>
+                            </p:childTnLst>
+                          </p:cTn>
+                        </p:par>
+                      </p:childTnLst>
+                    </p:cTn>
+                  </p:par>
+                </p:childTnLst>
+              </p:cTn>
+              <p:prevCondLst>
+                <p:cond evt="onPrev" delay="0">
+                  <p:tgtEl>
+                    <p:sldTgt/>
+                  </p:tgtEl>
+                </p:cond>
+              </p:prevCondLst>
+              <p:nextCondLst>
+                <p:cond evt="onNext" delay="0">
+                  <p:tgtEl>
+                    <p:sldTgt/>
+                  </p:tgtEl>
+                </p:cond>
+              </p:nextCondLst>
+            </p:seq>
+          </p:childTnLst>
+        </p:cTn>
+      </p:par>
+    </p:tnLst>
+  </p:timing>
+</p:sld>
+</file>
+
+<file path=ppt/slides/slide18.xml><?xml version="1.0" encoding="utf-8"?>
+<p:sld xmlns:a="http://schemas.openxmlformats.org/drawingml/2006/main" xmlns:p="http://schemas.openxmlformats.org/presentationml/2006/main" xmlns:r="http://schemas.openxmlformats.org/officeDocument/2006/relationships">
+  <p:cSld>
+    <p:spTree>
+      <p:nvGrpSpPr>
+        <p:cNvPr id="1" name=""/>
+        <p:cNvGrpSpPr/>
+        <p:nvPr/>
+      </p:nvGrpSpPr>
+      <p:grpSpPr/>
+      <p:sp>
+        <p:nvSpPr>
+          <p:cNvPr id="2" name="Rectangle 1"/>
+          <p:cNvSpPr/>
+          <p:nvPr/>
+        </p:nvSpPr>
+        <p:spPr>
+          <a:xfrm>
+            <a:off x="0" y="0"/>
+            <a:ext cx="12192119" cy="612000"/>
+          </a:xfrm>
+          <a:prstGeom prst="rect">
+            <a:avLst/>
+          </a:prstGeom>
+          <a:solidFill>
+            <a:srgbClr val="0B3D91"/>
+          </a:solidFill>
+          <a:ln>
+            <a:noFill/>
+          </a:ln>
+          <a:effectLst/>
+        </p:spPr>
+        <p:style>
+          <a:lnRef idx="1">
+            <a:schemeClr val="accent1"/>
+          </a:lnRef>
+          <a:fillRef idx="3">
+            <a:schemeClr val="accent1"/>
+          </a:fillRef>
+          <a:effectRef idx="2">
+            <a:schemeClr val="accent1"/>
+          </a:effectRef>
+          <a:fontRef idx="minor">
+            <a:schemeClr val="lt1"/>
+          </a:fontRef>
+        </p:style>
+        <p:txBody>
+          <a:bodyPr rtlCol="0" anchor="ctr"/>
+          <a:lstStyle/>
+          <a:p>
+            <a:pPr algn="ctr"/>
+          </a:p>
+        </p:txBody>
+      </p:sp>
+      <p:sp>
+        <p:nvSpPr>
+          <p:cNvPr id="3" name="TextBox 2"/>
+          <p:cNvSpPr txBox="1"/>
+          <p:nvPr/>
+        </p:nvSpPr>
+        <p:spPr>
+          <a:xfrm>
+            <a:off x="360000" y="108000"/>
+            <a:ext cx="11520000" cy="432000"/>
+          </a:xfrm>
+          <a:prstGeom prst="rect">
+            <a:avLst/>
+          </a:prstGeom>
+          <a:noFill/>
+        </p:spPr>
+        <p:txBody>
+          <a:bodyPr wrap="square" lIns="0" rIns="0" tIns="0" bIns="0">
+            <a:spAutoFit/>
+          </a:bodyPr>
+          <a:lstStyle/>
+          <a:p>
+            <a:pPr algn="l"/>
+            <a:r>
+              <a:rPr sz="2600" b="1" i="0">
+                <a:solidFill>
+                  <a:srgbClr val="FFFFFF"/>
+                </a:solidFill>
+                <a:latin typeface="Calibri"/>
+              </a:rPr>
+              <a:t>Speed: Training and Inference</a:t>
+            </a:r>
+          </a:p>
+        </p:txBody>
+      </p:sp>
+      <p:sp>
+        <p:nvSpPr>
+          <p:cNvPr id="4" name="TextBox 3"/>
+          <p:cNvSpPr txBox="1"/>
+          <p:nvPr/>
+        </p:nvSpPr>
+        <p:spPr>
+          <a:xfrm>
+            <a:off x="360000" y="684000"/>
+            <a:ext cx="11520000" cy="360000"/>
+          </a:xfrm>
+          <a:prstGeom prst="rect">
+            <a:avLst/>
+          </a:prstGeom>
+          <a:noFill/>
+        </p:spPr>
+        <p:txBody>
+          <a:bodyPr wrap="square" lIns="0" rIns="0" tIns="0" bIns="0">
+            <a:spAutoFit/>
+          </a:bodyPr>
+          <a:lstStyle/>
+          <a:p>
+            <a:pPr algn="l"/>
+            <a:r>
+              <a:rPr sz="1400" b="0" i="1">
+                <a:solidFill>
+                  <a:srgbClr val="7F8C8D"/>
+                </a:solidFill>
+                <a:latin typeface="Calibri"/>
+              </a:rPr>
+              <a:t>Side effect of shorter input: experiments become interactive</a:t>
+            </a:r>
+          </a:p>
+        </p:txBody>
+      </p:sp>
+      <p:sp>
+        <p:nvSpPr>
+          <p:cNvPr id="5" name="TextBox 4"/>
+          <p:cNvSpPr txBox="1"/>
+          <p:nvPr/>
+        </p:nvSpPr>
+        <p:spPr>
+          <a:xfrm>
+            <a:off x="540000" y="1080000"/>
+            <a:ext cx="5580000" cy="5040000"/>
+          </a:xfrm>
+          <a:prstGeom prst="rect">
+            <a:avLst/>
+          </a:prstGeom>
+          <a:noFill/>
+        </p:spPr>
+        <p:txBody>
+          <a:bodyPr wrap="square">
+            <a:spAutoFit/>
+          </a:bodyPr>
+          <a:lstStyle/>
+          <a:p>
+            <a:pPr algn="l">
+              <a:lnSpc>
+                <a:spcPct val="125000"/>
+              </a:lnSpc>
+              <a:spcAft>
+                <a:spcPts val="600"/>
+              </a:spcAft>
+            </a:pPr>
+            <a:r>
+              <a:rPr sz="1700">
+                <a:solidFill>
+                  <a:srgbClr val="2C3E50"/>
+                </a:solidFill>
+                <a:latin typeface="Calibri"/>
+              </a:rPr>
+              <a:t>  Epoch time (Chapman-Shaoxing, RTX 5090, AMP):</a:t>
+            </a:r>
+          </a:p>
+          <a:p>
+            <a:pPr algn="l">
+              <a:lnSpc>
+                <a:spcPct val="125000"/>
+              </a:lnSpc>
+              <a:spcAft>
+                <a:spcPts val="600"/>
+              </a:spcAft>
+            </a:pPr>
+            <a:r>
+              <a:rPr sz="1700">
+                <a:solidFill>
+                  <a:srgbClr val="2C3E50"/>
+                </a:solidFill>
+                <a:latin typeface="Calibri"/>
+              </a:rPr>
+              <a:t>     len=5000        ≈ 195 s / epoch</a:t>
+            </a:r>
+          </a:p>
+          <a:p>
+            <a:pPr algn="l">
+              <a:lnSpc>
+                <a:spcPct val="125000"/>
+              </a:lnSpc>
+              <a:spcAft>
+                <a:spcPts val="600"/>
+              </a:spcAft>
+            </a:pPr>
+            <a:r>
+              <a:rPr sz="1700">
+                <a:solidFill>
+                  <a:srgbClr val="2C3E50"/>
+                </a:solidFill>
+                <a:latin typeface="Calibri"/>
+              </a:rPr>
+              <a:t>     len=1000        ≈  32 s / epoch  (6.1× faster)</a:t>
+            </a:r>
+          </a:p>
+          <a:p>
+            <a:pPr algn="l">
+              <a:lnSpc>
+                <a:spcPct val="125000"/>
+              </a:lnSpc>
+              <a:spcAft>
+                <a:spcPts val="600"/>
+              </a:spcAft>
+            </a:pPr>
+            <a:r>
+              <a:rPr sz="1700">
+                <a:solidFill>
+                  <a:srgbClr val="2C3E50"/>
+                </a:solidFill>
+                <a:latin typeface="Calibri"/>
+              </a:rPr>
+              <a:t>     len=500         ≈  30 s / epoch  (6.5× faster)</a:t>
+            </a:r>
+          </a:p>
+          <a:p>
+            <a:pPr algn="l">
+              <a:lnSpc>
+                <a:spcPct val="125000"/>
+              </a:lnSpc>
+              <a:spcAft>
+                <a:spcPts val="600"/>
+              </a:spcAft>
+            </a:pPr>
+            <a:r>
+              <a:rPr sz="1700">
+                <a:solidFill>
+                  <a:srgbClr val="2C3E50"/>
+                </a:solidFill>
+                <a:latin typeface="Calibri"/>
+              </a:rPr>
+              <a:t>     len=500 + 4 wrk ≈  20 s / epoch  (9.8× faster)</a:t>
+            </a:r>
+          </a:p>
+          <a:p>
+            <a:pPr algn="l">
+              <a:lnSpc>
+                <a:spcPct val="125000"/>
+              </a:lnSpc>
+              <a:spcAft>
+                <a:spcPts val="600"/>
+              </a:spcAft>
+            </a:pPr>
+            <a:r>
+              <a:rPr sz="1700">
+                <a:solidFill>
+                  <a:srgbClr val="2C3E50"/>
+                </a:solidFill>
+                <a:latin typeface="Calibri"/>
+              </a:rPr>
+              <a:t>  </a:t>
+            </a:r>
+          </a:p>
+          <a:p>
+            <a:pPr algn="l">
+              <a:lnSpc>
+                <a:spcPct val="125000"/>
+              </a:lnSpc>
+              <a:spcAft>
+                <a:spcPts val="600"/>
+              </a:spcAft>
+            </a:pPr>
+            <a:r>
+              <a:rPr sz="1700">
+                <a:solidFill>
+                  <a:srgbClr val="2C3E50"/>
+                </a:solidFill>
+                <a:latin typeface="Calibri"/>
+              </a:rPr>
+              <a:t>  Inference (single 12-lead sample):</a:t>
+            </a:r>
+          </a:p>
+          <a:p>
+            <a:pPr algn="l">
+              <a:lnSpc>
+                <a:spcPct val="125000"/>
+              </a:lnSpc>
+              <a:spcAft>
+                <a:spcPts val="600"/>
+              </a:spcAft>
+            </a:pPr>
+            <a:r>
+              <a:rPr sz="1700">
+                <a:solidFill>
+                  <a:srgbClr val="2C3E50"/>
+                </a:solidFill>
+                <a:latin typeface="Calibri"/>
+              </a:rPr>
+              <a:t>     len=5000:  89.88 ms</a:t>
+            </a:r>
+          </a:p>
+          <a:p>
+            <a:pPr algn="l">
+              <a:lnSpc>
+                <a:spcPct val="125000"/>
+              </a:lnSpc>
+              <a:spcAft>
+                <a:spcPts val="600"/>
+              </a:spcAft>
+            </a:pPr>
+            <a:r>
+              <a:rPr sz="1700">
+                <a:solidFill>
+                  <a:srgbClr val="2C3E50"/>
+                </a:solidFill>
+                <a:latin typeface="Calibri"/>
+              </a:rPr>
+              <a:t>     len=500:   27.20 ms  (3.3× faster)</a:t>
+            </a:r>
+          </a:p>
+        </p:txBody>
+      </p:sp>
+      <p:sp>
+        <p:nvSpPr>
+          <p:cNvPr id="6" name="TextBox 5"/>
+          <p:cNvSpPr txBox="1"/>
+          <p:nvPr/>
+        </p:nvSpPr>
+        <p:spPr>
+          <a:xfrm>
+            <a:off x="6120000" y="1080000"/>
+            <a:ext cx="5580000" cy="5040000"/>
+          </a:xfrm>
+          <a:prstGeom prst="rect">
+            <a:avLst/>
+          </a:prstGeom>
+          <a:noFill/>
+        </p:spPr>
+        <p:txBody>
+          <a:bodyPr wrap="square">
+            <a:spAutoFit/>
+          </a:bodyPr>
+          <a:lstStyle/>
+          <a:p>
+            <a:pPr algn="l">
+              <a:lnSpc>
+                <a:spcPct val="125000"/>
+              </a:lnSpc>
+              <a:spcAft>
+                <a:spcPts val="600"/>
+              </a:spcAft>
+            </a:pPr>
+            <a:r>
+              <a:rPr sz="1600">
+                <a:solidFill>
+                  <a:srgbClr val="2C3E50"/>
+                </a:solidFill>
+                <a:latin typeface="Calibri"/>
+              </a:rPr>
+              <a:t>•  Hyper-parameter tuning becomes an interactive loop (≈ 10 min runs).</a:t>
+            </a:r>
+          </a:p>
+          <a:p>
+            <a:pPr algn="l">
+              <a:lnSpc>
+                <a:spcPct val="125000"/>
+              </a:lnSpc>
+              <a:spcAft>
+                <a:spcPts val="600"/>
+              </a:spcAft>
+            </a:pPr>
+            <a:r>
+              <a:rPr sz="1600">
+                <a:solidFill>
+                  <a:srgbClr val="2C3E50"/>
+                </a:solidFill>
+                <a:latin typeface="Calibri"/>
+              </a:rPr>
+              <a:t>•  DataLoader workers=4 uncovers an I/O bottleneck we did not know we had — another +33 % epoch speedup, no model change.</a:t>
+            </a:r>
+          </a:p>
+          <a:p>
+            <a:pPr algn="l">
+              <a:lnSpc>
+                <a:spcPct val="125000"/>
+              </a:lnSpc>
+              <a:spcAft>
+                <a:spcPts val="600"/>
+              </a:spcAft>
+            </a:pPr>
+            <a:r>
+              <a:rPr sz="1600">
+                <a:solidFill>
+                  <a:srgbClr val="2C3E50"/>
+                </a:solidFill>
+                <a:latin typeface="Calibri"/>
+              </a:rPr>
+              <a:t>•  Inference well under the 1-second clinical budget, on CPU-class margins.</a:t>
+            </a:r>
+          </a:p>
+          <a:p>
+            <a:pPr algn="l">
+              <a:lnSpc>
+                <a:spcPct val="125000"/>
+              </a:lnSpc>
+              <a:spcAft>
+                <a:spcPts val="600"/>
+              </a:spcAft>
+            </a:pPr>
+            <a:r>
+              <a:rPr sz="1600">
+                <a:solidFill>
+                  <a:srgbClr val="2C3E50"/>
+                </a:solidFill>
+                <a:latin typeface="Calibri"/>
+              </a:rPr>
+              <a:t>•  Model file unchanged in size and parameter count; CPU / edge deployment also gets the ≈3× inference speedup for free.</a:t>
+            </a:r>
+          </a:p>
+        </p:txBody>
+      </p:sp>
+      <p:sp>
+        <p:nvSpPr>
+          <p:cNvPr id="7" name="TextBox 6"/>
+          <p:cNvSpPr txBox="1"/>
+          <p:nvPr/>
+        </p:nvSpPr>
+        <p:spPr>
+          <a:xfrm>
+            <a:off x="288000" y="6570000"/>
+            <a:ext cx="7200000" cy="180000"/>
+          </a:xfrm>
+          <a:prstGeom prst="rect">
+            <a:avLst/>
+          </a:prstGeom>
+          <a:noFill/>
+        </p:spPr>
+        <p:txBody>
+          <a:bodyPr wrap="square" lIns="0" rIns="0" tIns="0" bIns="0">
+            <a:spAutoFit/>
+          </a:bodyPr>
+          <a:lstStyle/>
+          <a:p>
+            <a:pPr algn="l"/>
+            <a:r>
+              <a:rPr sz="1000" b="0" i="0">
+                <a:solidFill>
+                  <a:srgbClr val="7F8C8D"/>
+                </a:solidFill>
+                <a:latin typeface="Calibri"/>
+              </a:rPr>
+              <a:t>Speed</a:t>
+            </a:r>
+          </a:p>
+        </p:txBody>
+      </p:sp>
+      <p:sp>
+        <p:nvSpPr>
+          <p:cNvPr id="8" name="TextBox 7"/>
+          <p:cNvSpPr txBox="1"/>
+          <p:nvPr/>
+        </p:nvSpPr>
+        <p:spPr>
+          <a:xfrm>
+            <a:off x="10032119" y="6570000"/>
+            <a:ext cx="1800000" cy="180000"/>
+          </a:xfrm>
+          <a:prstGeom prst="rect">
+            <a:avLst/>
+          </a:prstGeom>
+          <a:noFill/>
+        </p:spPr>
+        <p:txBody>
+          <a:bodyPr wrap="square" lIns="0" rIns="0" tIns="0" bIns="0">
+            <a:spAutoFit/>
+          </a:bodyPr>
+          <a:lstStyle/>
+          <a:p>
+            <a:pPr algn="r"/>
+            <a:r>
+              <a:rPr sz="1000" b="0" i="0">
+                <a:solidFill>
+                  <a:srgbClr val="7F8C8D"/>
+                </a:solidFill>
+                <a:latin typeface="Calibri"/>
+              </a:rPr>
+              <a:t>17 / 21</a:t>
             </a:r>
           </a:p>
         </p:txBody>
@@ -5802,7 +9049,7 @@
 </p:sld>
 </file>
 
-<file path=ppt/slides/slide14.xml><?xml version="1.0" encoding="utf-8"?>
+<file path=ppt/slides/slide19.xml><?xml version="1.0" encoding="utf-8"?>
 <p:sld xmlns:a="http://schemas.openxmlformats.org/drawingml/2006/main" xmlns:p="http://schemas.openxmlformats.org/presentationml/2006/main" xmlns:r="http://schemas.openxmlformats.org/officeDocument/2006/relationships">
   <p:cSld>
     <p:spTree>
@@ -6074,7 +9321,7 @@
                 </a:solidFill>
                 <a:latin typeface="Calibri"/>
               </a:rPr>
-              <a:t>13 / 20</a:t>
+              <a:t>18 / 21</a:t>
             </a:r>
           </a:p>
         </p:txBody>
@@ -6165,7 +9412,7 @@
 </p:sld>
 </file>
 
-<file path=ppt/slides/slide15.xml><?xml version="1.0" encoding="utf-8"?>
+<file path=ppt/slides/slide2.xml><?xml version="1.0" encoding="utf-8"?>
 <p:sld xmlns:a="http://schemas.openxmlformats.org/drawingml/2006/main" xmlns:p="http://schemas.openxmlformats.org/presentationml/2006/main" xmlns:r="http://schemas.openxmlformats.org/officeDocument/2006/relationships">
   <p:cSld>
     <p:spTree>
@@ -6249,7 +9496,7 @@
                 </a:solidFill>
                 <a:latin typeface="Calibri"/>
               </a:rPr>
-              <a:t>Limitations</a:t>
+              <a:t>Motivation</a:t>
             </a:r>
           </a:p>
         </p:txBody>
@@ -6262,8 +9509,43 @@
         </p:nvSpPr>
         <p:spPr>
           <a:xfrm>
+            <a:off x="360000" y="684000"/>
+            <a:ext cx="11520000" cy="360000"/>
+          </a:xfrm>
+          <a:prstGeom prst="rect">
+            <a:avLst/>
+          </a:prstGeom>
+          <a:noFill/>
+        </p:spPr>
+        <p:txBody>
+          <a:bodyPr wrap="square" lIns="0" rIns="0" tIns="0" bIns="0">
+            <a:spAutoFit/>
+          </a:bodyPr>
+          <a:lstStyle/>
+          <a:p>
+            <a:pPr algn="l"/>
+            <a:r>
+              <a:rPr sz="1400" b="0" i="1">
+                <a:solidFill>
+                  <a:srgbClr val="7F8C8D"/>
+                </a:solidFill>
+                <a:latin typeface="Calibri"/>
+              </a:rPr>
+              <a:t>Why a baseline that should have been a non-issue turned into the main finding</a:t>
+            </a:r>
+          </a:p>
+        </p:txBody>
+      </p:sp>
+      <p:sp>
+        <p:nvSpPr>
+          <p:cNvPr id="5" name="TextBox 4"/>
+          <p:cNvSpPr txBox="1"/>
+          <p:nvPr/>
+        </p:nvSpPr>
+        <p:spPr>
+          <a:xfrm>
             <a:off x="540000" y="1080000"/>
-            <a:ext cx="10980000" cy="5040000"/>
+            <a:ext cx="10800000" cy="5040000"/>
           </a:xfrm>
           <a:prstGeom prst="rect">
             <a:avLst/>
@@ -6285,13 +9567,13 @@
               </a:spcAft>
             </a:pPr>
             <a:r>
-              <a:rPr sz="1800">
+              <a:rPr sz="2000">
                 <a:solidFill>
                   <a:srgbClr val="2C3E50"/>
                 </a:solidFill>
                 <a:latin typeface="Calibri"/>
               </a:rPr>
-              <a:t>•  Single-dataset experiment (Chapman-Shaoxing). PTB-XL cross-dataset validation is the next-month priority.</a:t>
+              <a:t>•  12-lead ECG is the gold standard for cardiac arrhythmia diagnosis, but manual reads are slow and scarce outside urban hospitals.</a:t>
             </a:r>
           </a:p>
           <a:p>
@@ -6304,13 +9586,13 @@
               </a:spcAft>
             </a:pPr>
             <a:r>
-              <a:rPr sz="1800">
+              <a:rPr sz="2000">
                 <a:solidFill>
                   <a:srgbClr val="2C3E50"/>
                 </a:solidFill>
                 <a:latin typeface="Calibri"/>
               </a:rPr>
-              <a:t>•  Sweet-spot for decimation factor is not characterised below 500 samples (50 Hz).</a:t>
+              <a:t>•  Deep 1D-CNNs reach cardiologist-level accuracy (Rajpurkar 2017, Hannun 2019) — but almost all published pipelines feed the raw 500 Hz × 10 s = 5000-sample signal.</a:t>
             </a:r>
           </a:p>
           <a:p>
@@ -6323,13 +9605,13 @@
               </a:spcAft>
             </a:pPr>
             <a:r>
-              <a:rPr sz="1800">
+              <a:rPr sz="2000">
                 <a:solidFill>
                   <a:srgbClr val="2C3E50"/>
                 </a:solidFill>
                 <a:latin typeface="Calibri"/>
               </a:rPr>
-              <a:t>•  High-frequency information (late-potential notching, micro-alternans) is removed by design — any downstream task relying on them would need to be re-evaluated.</a:t>
+              <a:t>•  Our prior baseline (Güz 2025, Chapman-Shaoxing, 78 classes, 1D-CNN) stalled at Test Acc 88.43% / Macro-F1 0.8713, with 11 classes at F1 &lt; 0.60.</a:t>
             </a:r>
           </a:p>
           <a:p>
@@ -6342,13 +9624,13 @@
               </a:spcAft>
             </a:pPr>
             <a:r>
-              <a:rPr sz="1800">
+              <a:rPr sz="2000">
                 <a:solidFill>
                   <a:srgbClr val="2C3E50"/>
                 </a:solidFill>
                 <a:latin typeface="Calibri"/>
               </a:rPr>
-              <a:t>•  Baseline 1D-CNN is fixed; the interaction between input length and a deeper CNN, or CNN + attention, is not yet measured.</a:t>
+              <a:t>•  Explicit target from the thesis proposal: ≥ 90% accuracy. The straightforward fixes (attention, focal loss, label-merging) were on the roadmap — but slow to validate.</a:t>
             </a:r>
           </a:p>
           <a:p>
@@ -6361,20 +9643,20 @@
               </a:spcAft>
             </a:pPr>
             <a:r>
-              <a:rPr sz="1800">
+              <a:rPr sz="2000">
                 <a:solidFill>
                   <a:srgbClr val="2C3E50"/>
                 </a:solidFill>
                 <a:latin typeface="Calibri"/>
               </a:rPr>
-              <a:t>•  Clinical confidence score (single-sample softmax) rose from 12.9% to 76.2%, but still needs per-class calibration for deployment.</a:t>
-            </a:r>
-          </a:p>
-        </p:txBody>
-      </p:sp>
-      <p:sp>
-        <p:nvSpPr>
-          <p:cNvPr id="5" name="TextBox 4"/>
+              <a:t>•  Quiet observation: is 5000 samples really the right receptive-field length for QRS-morphology learning, or a legacy of the sensor sampling rate?</a:t>
+            </a:r>
+          </a:p>
+        </p:txBody>
+      </p:sp>
+      <p:sp>
+        <p:nvSpPr>
+          <p:cNvPr id="6" name="TextBox 5"/>
           <p:cNvSpPr txBox="1"/>
           <p:nvPr/>
         </p:nvSpPr>
@@ -6402,14 +9684,14 @@
                 </a:solidFill>
                 <a:latin typeface="Calibri"/>
               </a:rPr>
-              <a:t>Limitations</a:t>
-            </a:r>
-          </a:p>
-        </p:txBody>
-      </p:sp>
-      <p:sp>
-        <p:nvSpPr>
-          <p:cNvPr id="6" name="TextBox 5"/>
+              <a:t>Elaman Nazarkulov  ·  KTMÜ</a:t>
+            </a:r>
+          </a:p>
+        </p:txBody>
+      </p:sp>
+      <p:sp>
+        <p:nvSpPr>
+          <p:cNvPr id="7" name="TextBox 6"/>
           <p:cNvSpPr txBox="1"/>
           <p:nvPr/>
         </p:nvSpPr>
@@ -6437,7 +9719,370 @@
                 </a:solidFill>
                 <a:latin typeface="Calibri"/>
               </a:rPr>
-              <a:t>14 / 20</a:t>
+              <a:t>1 / 21</a:t>
+            </a:r>
+          </a:p>
+        </p:txBody>
+      </p:sp>
+    </p:spTree>
+  </p:cSld>
+  <p:clrMapOvr>
+    <a:masterClrMapping/>
+  </p:clrMapOvr>
+  <p:transition spd="med">
+    <p:fade/>
+  </p:transition>
+  <p:timing>
+    <p:tnLst>
+      <p:par>
+        <p:cTn id="1" dur="indefinite" restart="never" nodeType="tmRoot">
+          <p:childTnLst>
+            <p:seq concurrent="1" nextAc="seek">
+              <p:cTn id="2" dur="indefinite" nodeType="mainSeq">
+                <p:childTnLst>
+                  <p:par>
+                    <p:cTn id="3" fill="hold">
+                      <p:stCondLst>
+                        <p:cond delay="indefinite"/>
+                      </p:stCondLst>
+                      <p:childTnLst>
+                        <p:par>
+                          <p:cTn id="4" fill="hold">
+                            <p:stCondLst>
+                              <p:cond delay="0"/>
+                            </p:stCondLst>
+                            <p:childTnLst>
+                              <p:par>
+                                <p:cTn id="5" presetID="1" presetClass="entr" presetSubtype="0" fill="hold" grpId="0" nodeType="clickEffect">
+                                  <p:stCondLst>
+                                    <p:cond delay="0"/>
+                                  </p:stCondLst>
+                                  <p:childTnLst>
+                                    <p:set>
+                                      <p:cBhvr>
+                                        <p:cTn id="6" dur="1" fill="hold">
+                                          <p:stCondLst>
+                                            <p:cond delay="0"/>
+                                          </p:stCondLst>
+                                        </p:cTn>
+                                        <p:tgtEl>
+                                          <p:spTgt spid="5"/>
+                                        </p:tgtEl>
+                                        <p:attrNameLst>
+                                          <p:attrName>style.visibility</p:attrName>
+                                        </p:attrNameLst>
+                                      </p:cBhvr>
+                                      <p:to>
+                                        <p:strVal val="visible"/>
+                                      </p:to>
+                                    </p:set>
+                                  </p:childTnLst>
+                                </p:cTn>
+                              </p:par>
+                            </p:childTnLst>
+                          </p:cTn>
+                        </p:par>
+                      </p:childTnLst>
+                    </p:cTn>
+                  </p:par>
+                </p:childTnLst>
+              </p:cTn>
+              <p:prevCondLst>
+                <p:cond evt="onPrev" delay="0">
+                  <p:tgtEl>
+                    <p:sldTgt/>
+                  </p:tgtEl>
+                </p:cond>
+              </p:prevCondLst>
+              <p:nextCondLst>
+                <p:cond evt="onNext" delay="0">
+                  <p:tgtEl>
+                    <p:sldTgt/>
+                  </p:tgtEl>
+                </p:cond>
+              </p:nextCondLst>
+            </p:seq>
+          </p:childTnLst>
+        </p:cTn>
+      </p:par>
+    </p:tnLst>
+  </p:timing>
+</p:sld>
+</file>
+
+<file path=ppt/slides/slide20.xml><?xml version="1.0" encoding="utf-8"?>
+<p:sld xmlns:a="http://schemas.openxmlformats.org/drawingml/2006/main" xmlns:p="http://schemas.openxmlformats.org/presentationml/2006/main" xmlns:r="http://schemas.openxmlformats.org/officeDocument/2006/relationships">
+  <p:cSld>
+    <p:spTree>
+      <p:nvGrpSpPr>
+        <p:cNvPr id="1" name=""/>
+        <p:cNvGrpSpPr/>
+        <p:nvPr/>
+      </p:nvGrpSpPr>
+      <p:grpSpPr/>
+      <p:sp>
+        <p:nvSpPr>
+          <p:cNvPr id="2" name="Rectangle 1"/>
+          <p:cNvSpPr/>
+          <p:nvPr/>
+        </p:nvSpPr>
+        <p:spPr>
+          <a:xfrm>
+            <a:off x="0" y="0"/>
+            <a:ext cx="12192119" cy="612000"/>
+          </a:xfrm>
+          <a:prstGeom prst="rect">
+            <a:avLst/>
+          </a:prstGeom>
+          <a:solidFill>
+            <a:srgbClr val="0B3D91"/>
+          </a:solidFill>
+          <a:ln>
+            <a:noFill/>
+          </a:ln>
+          <a:effectLst/>
+        </p:spPr>
+        <p:style>
+          <a:lnRef idx="1">
+            <a:schemeClr val="accent1"/>
+          </a:lnRef>
+          <a:fillRef idx="3">
+            <a:schemeClr val="accent1"/>
+          </a:fillRef>
+          <a:effectRef idx="2">
+            <a:schemeClr val="accent1"/>
+          </a:effectRef>
+          <a:fontRef idx="minor">
+            <a:schemeClr val="lt1"/>
+          </a:fontRef>
+        </p:style>
+        <p:txBody>
+          <a:bodyPr rtlCol="0" anchor="ctr"/>
+          <a:lstStyle/>
+          <a:p>
+            <a:pPr algn="ctr"/>
+          </a:p>
+        </p:txBody>
+      </p:sp>
+      <p:sp>
+        <p:nvSpPr>
+          <p:cNvPr id="3" name="TextBox 2"/>
+          <p:cNvSpPr txBox="1"/>
+          <p:nvPr/>
+        </p:nvSpPr>
+        <p:spPr>
+          <a:xfrm>
+            <a:off x="360000" y="108000"/>
+            <a:ext cx="11520000" cy="432000"/>
+          </a:xfrm>
+          <a:prstGeom prst="rect">
+            <a:avLst/>
+          </a:prstGeom>
+          <a:noFill/>
+        </p:spPr>
+        <p:txBody>
+          <a:bodyPr wrap="square" lIns="0" rIns="0" tIns="0" bIns="0">
+            <a:spAutoFit/>
+          </a:bodyPr>
+          <a:lstStyle/>
+          <a:p>
+            <a:pPr algn="l"/>
+            <a:r>
+              <a:rPr sz="2600" b="1" i="0">
+                <a:solidFill>
+                  <a:srgbClr val="FFFFFF"/>
+                </a:solidFill>
+                <a:latin typeface="Calibri"/>
+              </a:rPr>
+              <a:t>Limitations</a:t>
+            </a:r>
+          </a:p>
+        </p:txBody>
+      </p:sp>
+      <p:sp>
+        <p:nvSpPr>
+          <p:cNvPr id="4" name="TextBox 3"/>
+          <p:cNvSpPr txBox="1"/>
+          <p:nvPr/>
+        </p:nvSpPr>
+        <p:spPr>
+          <a:xfrm>
+            <a:off x="540000" y="1080000"/>
+            <a:ext cx="10980000" cy="5040000"/>
+          </a:xfrm>
+          <a:prstGeom prst="rect">
+            <a:avLst/>
+          </a:prstGeom>
+          <a:noFill/>
+        </p:spPr>
+        <p:txBody>
+          <a:bodyPr wrap="square">
+            <a:spAutoFit/>
+          </a:bodyPr>
+          <a:lstStyle/>
+          <a:p>
+            <a:pPr algn="l">
+              <a:lnSpc>
+                <a:spcPct val="125000"/>
+              </a:lnSpc>
+              <a:spcAft>
+                <a:spcPts val="600"/>
+              </a:spcAft>
+            </a:pPr>
+            <a:r>
+              <a:rPr sz="1800">
+                <a:solidFill>
+                  <a:srgbClr val="2C3E50"/>
+                </a:solidFill>
+                <a:latin typeface="Calibri"/>
+              </a:rPr>
+              <a:t>•  Single-dataset experiment (Chapman-Shaoxing). PTB-XL cross-dataset validation is the next-month priority.</a:t>
+            </a:r>
+          </a:p>
+          <a:p>
+            <a:pPr algn="l">
+              <a:lnSpc>
+                <a:spcPct val="125000"/>
+              </a:lnSpc>
+              <a:spcAft>
+                <a:spcPts val="600"/>
+              </a:spcAft>
+            </a:pPr>
+            <a:r>
+              <a:rPr sz="1800">
+                <a:solidFill>
+                  <a:srgbClr val="2C3E50"/>
+                </a:solidFill>
+                <a:latin typeface="Calibri"/>
+              </a:rPr>
+              <a:t>•  Sweet-spot for decimation factor is not characterised below 500 samples (50 Hz).</a:t>
+            </a:r>
+          </a:p>
+          <a:p>
+            <a:pPr algn="l">
+              <a:lnSpc>
+                <a:spcPct val="125000"/>
+              </a:lnSpc>
+              <a:spcAft>
+                <a:spcPts val="600"/>
+              </a:spcAft>
+            </a:pPr>
+            <a:r>
+              <a:rPr sz="1800">
+                <a:solidFill>
+                  <a:srgbClr val="2C3E50"/>
+                </a:solidFill>
+                <a:latin typeface="Calibri"/>
+              </a:rPr>
+              <a:t>•  High-frequency information (late-potential notching, micro-alternans) is removed by design — any downstream task relying on them would need to be re-evaluated.</a:t>
+            </a:r>
+          </a:p>
+          <a:p>
+            <a:pPr algn="l">
+              <a:lnSpc>
+                <a:spcPct val="125000"/>
+              </a:lnSpc>
+              <a:spcAft>
+                <a:spcPts val="600"/>
+              </a:spcAft>
+            </a:pPr>
+            <a:r>
+              <a:rPr sz="1800">
+                <a:solidFill>
+                  <a:srgbClr val="2C3E50"/>
+                </a:solidFill>
+                <a:latin typeface="Calibri"/>
+              </a:rPr>
+              <a:t>•  Baseline 1D-CNN is fixed; the interaction between input length and a deeper CNN, or CNN + attention, is not yet measured.</a:t>
+            </a:r>
+          </a:p>
+          <a:p>
+            <a:pPr algn="l">
+              <a:lnSpc>
+                <a:spcPct val="125000"/>
+              </a:lnSpc>
+              <a:spcAft>
+                <a:spcPts val="600"/>
+              </a:spcAft>
+            </a:pPr>
+            <a:r>
+              <a:rPr sz="1800">
+                <a:solidFill>
+                  <a:srgbClr val="2C3E50"/>
+                </a:solidFill>
+                <a:latin typeface="Calibri"/>
+              </a:rPr>
+              <a:t>•  Clinical confidence score (single-sample softmax) rose from 12.9% to 76.2%, but still needs per-class calibration for deployment.</a:t>
+            </a:r>
+          </a:p>
+        </p:txBody>
+      </p:sp>
+      <p:sp>
+        <p:nvSpPr>
+          <p:cNvPr id="5" name="TextBox 4"/>
+          <p:cNvSpPr txBox="1"/>
+          <p:nvPr/>
+        </p:nvSpPr>
+        <p:spPr>
+          <a:xfrm>
+            <a:off x="288000" y="6570000"/>
+            <a:ext cx="7200000" cy="180000"/>
+          </a:xfrm>
+          <a:prstGeom prst="rect">
+            <a:avLst/>
+          </a:prstGeom>
+          <a:noFill/>
+        </p:spPr>
+        <p:txBody>
+          <a:bodyPr wrap="square" lIns="0" rIns="0" tIns="0" bIns="0">
+            <a:spAutoFit/>
+          </a:bodyPr>
+          <a:lstStyle/>
+          <a:p>
+            <a:pPr algn="l"/>
+            <a:r>
+              <a:rPr sz="1000" b="0" i="0">
+                <a:solidFill>
+                  <a:srgbClr val="7F8C8D"/>
+                </a:solidFill>
+                <a:latin typeface="Calibri"/>
+              </a:rPr>
+              <a:t>Limitations</a:t>
+            </a:r>
+          </a:p>
+        </p:txBody>
+      </p:sp>
+      <p:sp>
+        <p:nvSpPr>
+          <p:cNvPr id="6" name="TextBox 5"/>
+          <p:cNvSpPr txBox="1"/>
+          <p:nvPr/>
+        </p:nvSpPr>
+        <p:spPr>
+          <a:xfrm>
+            <a:off x="10032119" y="6570000"/>
+            <a:ext cx="1800000" cy="180000"/>
+          </a:xfrm>
+          <a:prstGeom prst="rect">
+            <a:avLst/>
+          </a:prstGeom>
+          <a:noFill/>
+        </p:spPr>
+        <p:txBody>
+          <a:bodyPr wrap="square" lIns="0" rIns="0" tIns="0" bIns="0">
+            <a:spAutoFit/>
+          </a:bodyPr>
+          <a:lstStyle/>
+          <a:p>
+            <a:pPr algn="r"/>
+            <a:r>
+              <a:rPr sz="1000" b="0" i="0">
+                <a:solidFill>
+                  <a:srgbClr val="7F8C8D"/>
+                </a:solidFill>
+                <a:latin typeface="Calibri"/>
+              </a:rPr>
+              <a:t>19 / 21</a:t>
             </a:r>
           </a:p>
         </p:txBody>
@@ -6528,7 +10173,7 @@
 </p:sld>
 </file>
 
-<file path=ppt/slides/slide16.xml><?xml version="1.0" encoding="utf-8"?>
+<file path=ppt/slides/slide21.xml><?xml version="1.0" encoding="utf-8"?>
 <p:sld xmlns:a="http://schemas.openxmlformats.org/drawingml/2006/main" xmlns:p="http://schemas.openxmlformats.org/presentationml/2006/main" xmlns:r="http://schemas.openxmlformats.org/officeDocument/2006/relationships">
   <p:cSld>
     <p:spTree>
@@ -6838,7 +10483,7 @@
                 </a:solidFill>
                 <a:latin typeface="Calibri"/>
               </a:rPr>
-              <a:t>15 / 20</a:t>
+              <a:t>20 / 21</a:t>
             </a:r>
           </a:p>
         </p:txBody>
@@ -6929,7 +10574,7 @@
 </p:sld>
 </file>
 
-<file path=ppt/slides/slide17.xml><?xml version="1.0" encoding="utf-8"?>
+<file path=ppt/slides/slide22.xml><?xml version="1.0" encoding="utf-8"?>
 <p:sld xmlns:a="http://schemas.openxmlformats.org/drawingml/2006/main" xmlns:p="http://schemas.openxmlformats.org/presentationml/2006/main" xmlns:r="http://schemas.openxmlformats.org/officeDocument/2006/relationships">
   <p:cSld>
     <p:spTree>
@@ -7153,7 +10798,7 @@
                 </a:solidFill>
                 <a:latin typeface="Calibri"/>
               </a:rPr>
-              <a:t>•  Aspirational numbers in the literature may hide a length-optimisation artefact more than a modelling one.</a:t>
+              <a:t>•  After decimation, the bigger lever for the title's hybrid plan is reference-node augmentation, not channel count.</a:t>
             </a:r>
           </a:p>
           <a:p>
@@ -7172,6 +10817,25 @@
                 </a:solidFill>
                 <a:latin typeface="Calibri"/>
               </a:rPr>
+              <a:t>•  Aspirational numbers in the literature may hide a length-optimisation artefact more than a modelling one.</a:t>
+            </a:r>
+          </a:p>
+          <a:p>
+            <a:pPr algn="l">
+              <a:lnSpc>
+                <a:spcPct val="125000"/>
+              </a:lnSpc>
+              <a:spcAft>
+                <a:spcPts val="600"/>
+              </a:spcAft>
+            </a:pPr>
+            <a:r>
+              <a:rPr sz="2000">
+                <a:solidFill>
+                  <a:srgbClr val="2C3E50"/>
+                </a:solidFill>
+                <a:latin typeface="Calibri"/>
+              </a:rPr>
               <a:t>•  All planned hybrid-model / loss-engineering improvements remain on the roadmap — now starting from a much stronger reference point.</a:t>
             </a:r>
           </a:p>
@@ -7242,7 +10906,7 @@
                 </a:solidFill>
                 <a:latin typeface="Calibri"/>
               </a:rPr>
-              <a:t>16 / 20</a:t>
+              <a:t>21 / 21</a:t>
             </a:r>
           </a:p>
         </p:txBody>
@@ -7333,7 +10997,7 @@
 </p:sld>
 </file>
 
-<file path=ppt/slides/slide18.xml><?xml version="1.0" encoding="utf-8"?>
+<file path=ppt/slides/slide23.xml><?xml version="1.0" encoding="utf-8"?>
 <p:sld xmlns:a="http://schemas.openxmlformats.org/drawingml/2006/main" xmlns:p="http://schemas.openxmlformats.org/presentationml/2006/main" xmlns:r="http://schemas.openxmlformats.org/officeDocument/2006/relationships">
   <p:cSld>
     <p:spTree>
@@ -7503,7 +11167,7 @@
 </p:sld>
 </file>
 
-<file path=ppt/slides/slide2.xml><?xml version="1.0" encoding="utf-8"?>
+<file path=ppt/slides/slide3.xml><?xml version="1.0" encoding="utf-8"?>
 <p:sld xmlns:a="http://schemas.openxmlformats.org/drawingml/2006/main" xmlns:p="http://schemas.openxmlformats.org/presentationml/2006/main" xmlns:r="http://schemas.openxmlformats.org/officeDocument/2006/relationships">
   <p:cSld>
     <p:spTree>
@@ -7587,346 +11251,27 @@
                 </a:solidFill>
                 <a:latin typeface="Calibri"/>
               </a:rPr>
-              <a:t>Motivation</a:t>
-            </a:r>
-          </a:p>
-        </p:txBody>
-      </p:sp>
-      <p:sp>
-        <p:nvSpPr>
-          <p:cNvPr id="4" name="TextBox 3"/>
-          <p:cNvSpPr txBox="1"/>
-          <p:nvPr/>
-        </p:nvSpPr>
-        <p:spPr>
-          <a:xfrm>
-            <a:off x="360000" y="684000"/>
-            <a:ext cx="11520000" cy="360000"/>
-          </a:xfrm>
-          <a:prstGeom prst="rect">
-            <a:avLst/>
-          </a:prstGeom>
-          <a:noFill/>
-        </p:spPr>
-        <p:txBody>
-          <a:bodyPr wrap="square" lIns="0" rIns="0" tIns="0" bIns="0">
-            <a:spAutoFit/>
-          </a:bodyPr>
-          <a:lstStyle/>
-          <a:p>
-            <a:pPr algn="l"/>
-            <a:r>
-              <a:rPr sz="1400" b="0" i="1">
-                <a:solidFill>
-                  <a:srgbClr val="7F8C8D"/>
-                </a:solidFill>
-                <a:latin typeface="Calibri"/>
-              </a:rPr>
-              <a:t>Why a baseline that should have been a non-issue turned into the main finding</a:t>
-            </a:r>
-          </a:p>
-        </p:txBody>
-      </p:sp>
-      <p:sp>
-        <p:nvSpPr>
-          <p:cNvPr id="5" name="TextBox 4"/>
-          <p:cNvSpPr txBox="1"/>
-          <p:nvPr/>
-        </p:nvSpPr>
-        <p:spPr>
-          <a:xfrm>
-            <a:off x="540000" y="1080000"/>
-            <a:ext cx="10800000" cy="5040000"/>
-          </a:xfrm>
-          <a:prstGeom prst="rect">
-            <a:avLst/>
-          </a:prstGeom>
-          <a:noFill/>
-        </p:spPr>
-        <p:txBody>
-          <a:bodyPr wrap="square">
-            <a:spAutoFit/>
-          </a:bodyPr>
-          <a:lstStyle/>
-          <a:p>
-            <a:pPr algn="l">
-              <a:lnSpc>
-                <a:spcPct val="125000"/>
-              </a:lnSpc>
-              <a:spcAft>
-                <a:spcPts val="600"/>
-              </a:spcAft>
-            </a:pPr>
-            <a:r>
-              <a:rPr sz="2000">
-                <a:solidFill>
-                  <a:srgbClr val="2C3E50"/>
-                </a:solidFill>
-                <a:latin typeface="Calibri"/>
-              </a:rPr>
-              <a:t>•  12-lead ECG is the gold standard for cardiac arrhythmia diagnosis, but manual reads are slow and scarce outside urban hospitals.</a:t>
-            </a:r>
-          </a:p>
-          <a:p>
-            <a:pPr algn="l">
-              <a:lnSpc>
-                <a:spcPct val="125000"/>
-              </a:lnSpc>
-              <a:spcAft>
-                <a:spcPts val="600"/>
-              </a:spcAft>
-            </a:pPr>
-            <a:r>
-              <a:rPr sz="2000">
-                <a:solidFill>
-                  <a:srgbClr val="2C3E50"/>
-                </a:solidFill>
-                <a:latin typeface="Calibri"/>
-              </a:rPr>
-              <a:t>•  Deep 1D-CNNs reach cardiologist-level accuracy (Rajpurkar 2017, Hannun 2019) — but almost all published pipelines feed the raw 500 Hz × 10 s = 5000-sample signal.</a:t>
-            </a:r>
-          </a:p>
-          <a:p>
-            <a:pPr algn="l">
-              <a:lnSpc>
-                <a:spcPct val="125000"/>
-              </a:lnSpc>
-              <a:spcAft>
-                <a:spcPts val="600"/>
-              </a:spcAft>
-            </a:pPr>
-            <a:r>
-              <a:rPr sz="2000">
-                <a:solidFill>
-                  <a:srgbClr val="2C3E50"/>
-                </a:solidFill>
-                <a:latin typeface="Calibri"/>
-              </a:rPr>
-              <a:t>•  Our prior baseline (Güz 2025, Chapman-Shaoxing, 78 classes, 1D-CNN) stalled at Test Acc 88.43% / Macro-F1 0.8713, with 11 classes at F1 &lt; 0.60.</a:t>
-            </a:r>
-          </a:p>
-          <a:p>
-            <a:pPr algn="l">
-              <a:lnSpc>
-                <a:spcPct val="125000"/>
-              </a:lnSpc>
-              <a:spcAft>
-                <a:spcPts val="600"/>
-              </a:spcAft>
-            </a:pPr>
-            <a:r>
-              <a:rPr sz="2000">
-                <a:solidFill>
-                  <a:srgbClr val="2C3E50"/>
-                </a:solidFill>
-                <a:latin typeface="Calibri"/>
-              </a:rPr>
-              <a:t>•  Explicit target from the thesis proposal: ≥ 90% accuracy. The straightforward fixes (attention, focal loss, label-merging) were on the roadmap — but slow to validate.</a:t>
-            </a:r>
-          </a:p>
-          <a:p>
-            <a:pPr algn="l">
-              <a:lnSpc>
-                <a:spcPct val="125000"/>
-              </a:lnSpc>
-              <a:spcAft>
-                <a:spcPts val="600"/>
-              </a:spcAft>
-            </a:pPr>
-            <a:r>
-              <a:rPr sz="2000">
-                <a:solidFill>
-                  <a:srgbClr val="2C3E50"/>
-                </a:solidFill>
-                <a:latin typeface="Calibri"/>
-              </a:rPr>
-              <a:t>•  Quiet observation: is 5000 samples really the right receptive-field length for QRS-morphology learning, or a legacy of the sensor sampling rate?</a:t>
-            </a:r>
-          </a:p>
-        </p:txBody>
-      </p:sp>
-      <p:sp>
-        <p:nvSpPr>
-          <p:cNvPr id="6" name="TextBox 5"/>
-          <p:cNvSpPr txBox="1"/>
-          <p:nvPr/>
-        </p:nvSpPr>
-        <p:spPr>
-          <a:xfrm>
-            <a:off x="288000" y="6570000"/>
-            <a:ext cx="7200000" cy="180000"/>
-          </a:xfrm>
-          <a:prstGeom prst="rect">
-            <a:avLst/>
-          </a:prstGeom>
-          <a:noFill/>
-        </p:spPr>
-        <p:txBody>
-          <a:bodyPr wrap="square" lIns="0" rIns="0" tIns="0" bIns="0">
-            <a:spAutoFit/>
-          </a:bodyPr>
-          <a:lstStyle/>
-          <a:p>
-            <a:pPr algn="l"/>
-            <a:r>
-              <a:rPr sz="1000" b="0" i="0">
-                <a:solidFill>
-                  <a:srgbClr val="7F8C8D"/>
-                </a:solidFill>
-                <a:latin typeface="Calibri"/>
-              </a:rPr>
-              <a:t>Elaman Nazarkulov  ·  KTMÜ</a:t>
-            </a:r>
-          </a:p>
-        </p:txBody>
-      </p:sp>
-      <p:sp>
-        <p:nvSpPr>
-          <p:cNvPr id="7" name="TextBox 6"/>
-          <p:cNvSpPr txBox="1"/>
-          <p:nvPr/>
-        </p:nvSpPr>
-        <p:spPr>
-          <a:xfrm>
-            <a:off x="10032119" y="6570000"/>
-            <a:ext cx="1800000" cy="180000"/>
-          </a:xfrm>
-          <a:prstGeom prst="rect">
-            <a:avLst/>
-          </a:prstGeom>
-          <a:noFill/>
-        </p:spPr>
-        <p:txBody>
-          <a:bodyPr wrap="square" lIns="0" rIns="0" tIns="0" bIns="0">
-            <a:spAutoFit/>
-          </a:bodyPr>
-          <a:lstStyle/>
-          <a:p>
-            <a:pPr algn="r"/>
-            <a:r>
-              <a:rPr sz="1000" b="0" i="0">
-                <a:solidFill>
-                  <a:srgbClr val="7F8C8D"/>
-                </a:solidFill>
-                <a:latin typeface="Calibri"/>
-              </a:rPr>
-              <a:t>1 / 20</a:t>
-            </a:r>
-          </a:p>
-        </p:txBody>
-      </p:sp>
-    </p:spTree>
-  </p:cSld>
-  <p:clrMapOvr>
-    <a:masterClrMapping/>
-  </p:clrMapOvr>
-  <p:transition spd="med">
-    <p:fade/>
-  </p:transition>
-  <p:timing>
-    <p:tnLst>
-      <p:par>
-        <p:cTn id="1" dur="indefinite" restart="never" nodeType="tmRoot">
-          <p:childTnLst>
-            <p:seq concurrent="1" nextAc="seek">
-              <p:cTn id="2" dur="indefinite" nodeType="mainSeq">
-                <p:childTnLst>
-                  <p:par>
-                    <p:cTn id="3" fill="hold">
-                      <p:stCondLst>
-                        <p:cond delay="indefinite"/>
-                      </p:stCondLst>
-                      <p:childTnLst>
-                        <p:par>
-                          <p:cTn id="4" fill="hold">
-                            <p:stCondLst>
-                              <p:cond delay="0"/>
-                            </p:stCondLst>
-                            <p:childTnLst>
-                              <p:par>
-                                <p:cTn id="5" presetID="1" presetClass="entr" presetSubtype="0" fill="hold" grpId="0" nodeType="clickEffect">
-                                  <p:stCondLst>
-                                    <p:cond delay="0"/>
-                                  </p:stCondLst>
-                                  <p:childTnLst>
-                                    <p:set>
-                                      <p:cBhvr>
-                                        <p:cTn id="6" dur="1" fill="hold">
-                                          <p:stCondLst>
-                                            <p:cond delay="0"/>
-                                          </p:stCondLst>
-                                        </p:cTn>
-                                        <p:tgtEl>
-                                          <p:spTgt spid="5"/>
-                                        </p:tgtEl>
-                                        <p:attrNameLst>
-                                          <p:attrName>style.visibility</p:attrName>
-                                        </p:attrNameLst>
-                                      </p:cBhvr>
-                                      <p:to>
-                                        <p:strVal val="visible"/>
-                                      </p:to>
-                                    </p:set>
-                                  </p:childTnLst>
-                                </p:cTn>
-                              </p:par>
-                            </p:childTnLst>
-                          </p:cTn>
-                        </p:par>
-                      </p:childTnLst>
-                    </p:cTn>
-                  </p:par>
-                </p:childTnLst>
-              </p:cTn>
-              <p:prevCondLst>
-                <p:cond evt="onPrev" delay="0">
-                  <p:tgtEl>
-                    <p:sldTgt/>
-                  </p:tgtEl>
-                </p:cond>
-              </p:prevCondLst>
-              <p:nextCondLst>
-                <p:cond evt="onNext" delay="0">
-                  <p:tgtEl>
-                    <p:sldTgt/>
-                  </p:tgtEl>
-                </p:cond>
-              </p:nextCondLst>
-            </p:seq>
-          </p:childTnLst>
-        </p:cTn>
-      </p:par>
-    </p:tnLst>
-  </p:timing>
-</p:sld>
-</file>
-
-<file path=ppt/slides/slide3.xml><?xml version="1.0" encoding="utf-8"?>
-<p:sld xmlns:a="http://schemas.openxmlformats.org/drawingml/2006/main" xmlns:p="http://schemas.openxmlformats.org/presentationml/2006/main" xmlns:r="http://schemas.openxmlformats.org/officeDocument/2006/relationships">
-  <p:cSld>
-    <p:spTree>
-      <p:nvGrpSpPr>
-        <p:cNvPr id="1" name=""/>
-        <p:cNvGrpSpPr/>
-        <p:nvPr/>
-      </p:nvGrpSpPr>
-      <p:grpSpPr/>
-      <p:sp>
-        <p:nvSpPr>
-          <p:cNvPr id="2" name="Rectangle 1"/>
+              <a:t>Research Question</a:t>
+            </a:r>
+          </a:p>
+        </p:txBody>
+      </p:sp>
+      <p:sp>
+        <p:nvSpPr>
+          <p:cNvPr id="4" name="Rectangle 3"/>
           <p:cNvSpPr/>
           <p:nvPr/>
         </p:nvSpPr>
         <p:spPr>
           <a:xfrm>
-            <a:off x="0" y="0"/>
-            <a:ext cx="12192119" cy="612000"/>
+            <a:off x="720000" y="1620000"/>
+            <a:ext cx="10800000" cy="1620000"/>
           </a:xfrm>
           <a:prstGeom prst="rect">
             <a:avLst/>
           </a:prstGeom>
           <a:solidFill>
-            <a:srgbClr val="0B3D91"/>
+            <a:srgbClr val="F8F9FA"/>
           </a:solidFill>
           <a:ln>
             <a:noFill/>
@@ -7957,85 +11302,6 @@
       </p:sp>
       <p:sp>
         <p:nvSpPr>
-          <p:cNvPr id="3" name="TextBox 2"/>
-          <p:cNvSpPr txBox="1"/>
-          <p:nvPr/>
-        </p:nvSpPr>
-        <p:spPr>
-          <a:xfrm>
-            <a:off x="360000" y="108000"/>
-            <a:ext cx="11520000" cy="432000"/>
-          </a:xfrm>
-          <a:prstGeom prst="rect">
-            <a:avLst/>
-          </a:prstGeom>
-          <a:noFill/>
-        </p:spPr>
-        <p:txBody>
-          <a:bodyPr wrap="square" lIns="0" rIns="0" tIns="0" bIns="0">
-            <a:spAutoFit/>
-          </a:bodyPr>
-          <a:lstStyle/>
-          <a:p>
-            <a:pPr algn="l"/>
-            <a:r>
-              <a:rPr sz="2600" b="1" i="0">
-                <a:solidFill>
-                  <a:srgbClr val="FFFFFF"/>
-                </a:solidFill>
-                <a:latin typeface="Calibri"/>
-              </a:rPr>
-              <a:t>Research Question</a:t>
-            </a:r>
-          </a:p>
-        </p:txBody>
-      </p:sp>
-      <p:sp>
-        <p:nvSpPr>
-          <p:cNvPr id="4" name="Rectangle 3"/>
-          <p:cNvSpPr/>
-          <p:nvPr/>
-        </p:nvSpPr>
-        <p:spPr>
-          <a:xfrm>
-            <a:off x="720000" y="1620000"/>
-            <a:ext cx="10800000" cy="1620000"/>
-          </a:xfrm>
-          <a:prstGeom prst="rect">
-            <a:avLst/>
-          </a:prstGeom>
-          <a:solidFill>
-            <a:srgbClr val="F8F9FA"/>
-          </a:solidFill>
-          <a:ln>
-            <a:noFill/>
-          </a:ln>
-          <a:effectLst/>
-        </p:spPr>
-        <p:style>
-          <a:lnRef idx="1">
-            <a:schemeClr val="accent1"/>
-          </a:lnRef>
-          <a:fillRef idx="3">
-            <a:schemeClr val="accent1"/>
-          </a:fillRef>
-          <a:effectRef idx="2">
-            <a:schemeClr val="accent1"/>
-          </a:effectRef>
-          <a:fontRef idx="minor">
-            <a:schemeClr val="lt1"/>
-          </a:fontRef>
-        </p:style>
-        <p:txBody>
-          <a:bodyPr rtlCol="0" anchor="ctr"/>
-          <a:lstStyle/>
-          <a:p>
-            <a:pPr algn="ctr"/>
-          </a:p>
-        </p:txBody>
-      </p:sp>
-      <p:sp>
-        <p:nvSpPr>
           <p:cNvPr id="5" name="TextBox 4"/>
           <p:cNvSpPr txBox="1"/>
           <p:nvPr/>
@@ -8214,7 +11480,7 @@
                 </a:solidFill>
                 <a:latin typeface="Calibri"/>
               </a:rPr>
-              <a:t>2 / 20</a:t>
+              <a:t>2 / 21</a:t>
             </a:r>
           </a:p>
         </p:txBody>
@@ -8596,7 +11862,7 @@
                 </a:solidFill>
                 <a:latin typeface="Calibri"/>
               </a:rPr>
-              <a:t>3 / 20</a:t>
+              <a:t>3 / 21</a:t>
             </a:r>
           </a:p>
         </p:txBody>
@@ -9417,7 +12683,7 @@
                 </a:solidFill>
                 <a:latin typeface="Calibri"/>
               </a:rPr>
-              <a:t>4 / 20</a:t>
+              <a:t>4 / 21</a:t>
             </a:r>
           </a:p>
         </p:txBody>
@@ -10474,7 +13740,7 @@
                 </a:solidFill>
                 <a:latin typeface="Calibri"/>
               </a:rPr>
-              <a:t>5 / 20</a:t>
+              <a:t>5 / 21</a:t>
             </a:r>
           </a:p>
         </p:txBody>
@@ -11252,7 +14518,7 @@
                 </a:solidFill>
                 <a:latin typeface="Calibri"/>
               </a:rPr>
-              <a:t>6 / 20</a:t>
+              <a:t>6 / 21</a:t>
             </a:r>
           </a:p>
         </p:txBody>
@@ -11389,6 +14655,577 @@
 </file>
 
 <file path=ppt/slides/slide8.xml><?xml version="1.0" encoding="utf-8"?>
+<p:sld xmlns:a="http://schemas.openxmlformats.org/drawingml/2006/main" xmlns:p="http://schemas.openxmlformats.org/presentationml/2006/main" xmlns:r="http://schemas.openxmlformats.org/officeDocument/2006/relationships">
+  <p:cSld>
+    <p:spTree>
+      <p:nvGrpSpPr>
+        <p:cNvPr id="1" name=""/>
+        <p:cNvGrpSpPr/>
+        <p:nvPr/>
+      </p:nvGrpSpPr>
+      <p:grpSpPr/>
+      <p:sp>
+        <p:nvSpPr>
+          <p:cNvPr id="2" name="Rectangle 1"/>
+          <p:cNvSpPr/>
+          <p:nvPr/>
+        </p:nvSpPr>
+        <p:spPr>
+          <a:xfrm>
+            <a:off x="0" y="0"/>
+            <a:ext cx="12192119" cy="612000"/>
+          </a:xfrm>
+          <a:prstGeom prst="rect">
+            <a:avLst/>
+          </a:prstGeom>
+          <a:solidFill>
+            <a:srgbClr val="0B3D91"/>
+          </a:solidFill>
+          <a:ln>
+            <a:noFill/>
+          </a:ln>
+          <a:effectLst/>
+        </p:spPr>
+        <p:style>
+          <a:lnRef idx="1">
+            <a:schemeClr val="accent1"/>
+          </a:lnRef>
+          <a:fillRef idx="3">
+            <a:schemeClr val="accent1"/>
+          </a:fillRef>
+          <a:effectRef idx="2">
+            <a:schemeClr val="accent1"/>
+          </a:effectRef>
+          <a:fontRef idx="minor">
+            <a:schemeClr val="lt1"/>
+          </a:fontRef>
+        </p:style>
+        <p:txBody>
+          <a:bodyPr rtlCol="0" anchor="ctr"/>
+          <a:lstStyle/>
+          <a:p>
+            <a:pPr algn="ctr"/>
+          </a:p>
+        </p:txBody>
+      </p:sp>
+      <p:sp>
+        <p:nvSpPr>
+          <p:cNvPr id="3" name="TextBox 2"/>
+          <p:cNvSpPr txBox="1"/>
+          <p:nvPr/>
+        </p:nvSpPr>
+        <p:spPr>
+          <a:xfrm>
+            <a:off x="360000" y="108000"/>
+            <a:ext cx="11520000" cy="432000"/>
+          </a:xfrm>
+          <a:prstGeom prst="rect">
+            <a:avLst/>
+          </a:prstGeom>
+          <a:noFill/>
+        </p:spPr>
+        <p:txBody>
+          <a:bodyPr wrap="square" lIns="0" rIns="0" tIns="0" bIns="0">
+            <a:spAutoFit/>
+          </a:bodyPr>
+          <a:lstStyle/>
+          <a:p>
+            <a:pPr algn="l"/>
+            <a:r>
+              <a:rPr sz="2600" b="1" i="0">
+                <a:solidFill>
+                  <a:srgbClr val="FFFFFF"/>
+                </a:solidFill>
+                <a:latin typeface="Calibri"/>
+              </a:rPr>
+              <a:t>Why It Works — Geometric Invariance</a:t>
+            </a:r>
+          </a:p>
+        </p:txBody>
+      </p:sp>
+      <p:sp>
+        <p:nvSpPr>
+          <p:cNvPr id="4" name="TextBox 3"/>
+          <p:cNvSpPr txBox="1"/>
+          <p:nvPr/>
+        </p:nvSpPr>
+        <p:spPr>
+          <a:xfrm>
+            <a:off x="360000" y="684000"/>
+            <a:ext cx="11520000" cy="360000"/>
+          </a:xfrm>
+          <a:prstGeom prst="rect">
+            <a:avLst/>
+          </a:prstGeom>
+          <a:noFill/>
+        </p:spPr>
+        <p:txBody>
+          <a:bodyPr wrap="square" lIns="0" rIns="0" tIns="0" bIns="0">
+            <a:spAutoFit/>
+          </a:bodyPr>
+          <a:lstStyle/>
+          <a:p>
+            <a:pPr algn="l"/>
+            <a:r>
+              <a:rPr sz="1400" b="0" i="1">
+                <a:solidFill>
+                  <a:srgbClr val="7F8C8D"/>
+                </a:solidFill>
+                <a:latin typeface="Calibri"/>
+              </a:rPr>
+              <a:t>What scipy.signal.decimate preserves: the fiducial-point graph (P / Q / R / S / T per beat).</a:t>
+            </a:r>
+          </a:p>
+        </p:txBody>
+      </p:sp>
+      <p:pic>
+        <p:nvPicPr>
+          <p:cNvPr id="5" name="Picture 4" descr="Figure_geometry_invariance.png"/>
+          <p:cNvPicPr>
+            <a:picLocks noChangeAspect="1"/>
+          </p:cNvPicPr>
+          <p:nvPr/>
+        </p:nvPicPr>
+        <p:blipFill>
+          <a:blip r:embed="rId2"/>
+          <a:stretch>
+            <a:fillRect/>
+          </a:stretch>
+        </p:blipFill>
+        <p:spPr>
+          <a:xfrm>
+            <a:off x="2400501" y="972000"/>
+            <a:ext cx="7366998" cy="3960000"/>
+          </a:xfrm>
+          <a:prstGeom prst="rect">
+            <a:avLst/>
+          </a:prstGeom>
+        </p:spPr>
+      </p:pic>
+      <p:sp>
+        <p:nvSpPr>
+          <p:cNvPr id="6" name="Rectangle 5"/>
+          <p:cNvSpPr/>
+          <p:nvPr/>
+        </p:nvSpPr>
+        <p:spPr>
+          <a:xfrm>
+            <a:off x="540000" y="5112000"/>
+            <a:ext cx="3528000" cy="1440000"/>
+          </a:xfrm>
+          <a:prstGeom prst="rect">
+            <a:avLst/>
+          </a:prstGeom>
+          <a:solidFill>
+            <a:srgbClr val="F8F9FA"/>
+          </a:solidFill>
+          <a:ln>
+            <a:noFill/>
+          </a:ln>
+          <a:effectLst/>
+        </p:spPr>
+        <p:style>
+          <a:lnRef idx="1">
+            <a:schemeClr val="accent1"/>
+          </a:lnRef>
+          <a:fillRef idx="3">
+            <a:schemeClr val="accent1"/>
+          </a:fillRef>
+          <a:effectRef idx="2">
+            <a:schemeClr val="accent1"/>
+          </a:effectRef>
+          <a:fontRef idx="minor">
+            <a:schemeClr val="lt1"/>
+          </a:fontRef>
+        </p:style>
+        <p:txBody>
+          <a:bodyPr rtlCol="0" anchor="ctr"/>
+          <a:lstStyle/>
+          <a:p>
+            <a:pPr algn="ctr"/>
+          </a:p>
+        </p:txBody>
+      </p:sp>
+      <p:sp>
+        <p:nvSpPr>
+          <p:cNvPr id="7" name="TextBox 6"/>
+          <p:cNvSpPr txBox="1"/>
+          <p:nvPr/>
+        </p:nvSpPr>
+        <p:spPr>
+          <a:xfrm>
+            <a:off x="720000" y="5237999"/>
+            <a:ext cx="3168000" cy="324000"/>
+          </a:xfrm>
+          <a:prstGeom prst="rect">
+            <a:avLst/>
+          </a:prstGeom>
+          <a:noFill/>
+        </p:spPr>
+        <p:txBody>
+          <a:bodyPr wrap="square" lIns="0" rIns="0" tIns="0" bIns="0">
+            <a:spAutoFit/>
+          </a:bodyPr>
+          <a:lstStyle/>
+          <a:p>
+            <a:pPr algn="l"/>
+            <a:r>
+              <a:rPr sz="1400" b="1" i="0">
+                <a:solidFill>
+                  <a:srgbClr val="0B3D91"/>
+                </a:solidFill>
+                <a:latin typeface="Calibri"/>
+              </a:rPr>
+              <a:t>Receptive field</a:t>
+            </a:r>
+          </a:p>
+        </p:txBody>
+      </p:sp>
+      <p:sp>
+        <p:nvSpPr>
+          <p:cNvPr id="8" name="TextBox 7"/>
+          <p:cNvSpPr txBox="1"/>
+          <p:nvPr/>
+        </p:nvSpPr>
+        <p:spPr>
+          <a:xfrm>
+            <a:off x="720000" y="5562000"/>
+            <a:ext cx="3168000" cy="917999"/>
+          </a:xfrm>
+          <a:prstGeom prst="rect">
+            <a:avLst/>
+          </a:prstGeom>
+          <a:noFill/>
+        </p:spPr>
+        <p:txBody>
+          <a:bodyPr wrap="square" lIns="0" rIns="0" tIns="0" bIns="0">
+            <a:spAutoFit/>
+          </a:bodyPr>
+          <a:lstStyle/>
+          <a:p>
+            <a:pPr algn="l"/>
+            <a:r>
+              <a:rPr sz="1200" b="0" i="0">
+                <a:solidFill>
+                  <a:srgbClr val="2C3E50"/>
+                </a:solidFill>
+                <a:latin typeface="Calibri"/>
+              </a:rPr>
+              <a:t>2048-sample CNN window now covers 100% of the input instead of ~40% at len=5000.</a:t>
+            </a:r>
+          </a:p>
+        </p:txBody>
+      </p:sp>
+      <p:sp>
+        <p:nvSpPr>
+          <p:cNvPr id="9" name="Rectangle 8"/>
+          <p:cNvSpPr/>
+          <p:nvPr/>
+        </p:nvSpPr>
+        <p:spPr>
+          <a:xfrm>
+            <a:off x="4212000" y="5112000"/>
+            <a:ext cx="3528000" cy="1440000"/>
+          </a:xfrm>
+          <a:prstGeom prst="rect">
+            <a:avLst/>
+          </a:prstGeom>
+          <a:solidFill>
+            <a:srgbClr val="F8F9FA"/>
+          </a:solidFill>
+          <a:ln>
+            <a:noFill/>
+          </a:ln>
+          <a:effectLst/>
+        </p:spPr>
+        <p:style>
+          <a:lnRef idx="1">
+            <a:schemeClr val="accent1"/>
+          </a:lnRef>
+          <a:fillRef idx="3">
+            <a:schemeClr val="accent1"/>
+          </a:fillRef>
+          <a:effectRef idx="2">
+            <a:schemeClr val="accent1"/>
+          </a:effectRef>
+          <a:fontRef idx="minor">
+            <a:schemeClr val="lt1"/>
+          </a:fontRef>
+        </p:style>
+        <p:txBody>
+          <a:bodyPr rtlCol="0" anchor="ctr"/>
+          <a:lstStyle/>
+          <a:p>
+            <a:pPr algn="ctr"/>
+          </a:p>
+        </p:txBody>
+      </p:sp>
+      <p:sp>
+        <p:nvSpPr>
+          <p:cNvPr id="10" name="TextBox 9"/>
+          <p:cNvSpPr txBox="1"/>
+          <p:nvPr/>
+        </p:nvSpPr>
+        <p:spPr>
+          <a:xfrm>
+            <a:off x="4392000" y="5237999"/>
+            <a:ext cx="3168000" cy="324000"/>
+          </a:xfrm>
+          <a:prstGeom prst="rect">
+            <a:avLst/>
+          </a:prstGeom>
+          <a:noFill/>
+        </p:spPr>
+        <p:txBody>
+          <a:bodyPr wrap="square" lIns="0" rIns="0" tIns="0" bIns="0">
+            <a:spAutoFit/>
+          </a:bodyPr>
+          <a:lstStyle/>
+          <a:p>
+            <a:pPr algn="l"/>
+            <a:r>
+              <a:rPr sz="1400" b="1" i="0">
+                <a:solidFill>
+                  <a:srgbClr val="0B3D91"/>
+                </a:solidFill>
+                <a:latin typeface="Calibri"/>
+              </a:rPr>
+              <a:t>Fiducial-point density</a:t>
+            </a:r>
+          </a:p>
+        </p:txBody>
+      </p:sp>
+      <p:sp>
+        <p:nvSpPr>
+          <p:cNvPr id="11" name="TextBox 10"/>
+          <p:cNvSpPr txBox="1"/>
+          <p:nvPr/>
+        </p:nvSpPr>
+        <p:spPr>
+          <a:xfrm>
+            <a:off x="4392000" y="5562000"/>
+            <a:ext cx="3168000" cy="917999"/>
+          </a:xfrm>
+          <a:prstGeom prst="rect">
+            <a:avLst/>
+          </a:prstGeom>
+          <a:noFill/>
+        </p:spPr>
+        <p:txBody>
+          <a:bodyPr wrap="square" lIns="0" rIns="0" tIns="0" bIns="0">
+            <a:spAutoFit/>
+          </a:bodyPr>
+          <a:lstStyle/>
+          <a:p>
+            <a:pPr algn="l"/>
+            <a:r>
+              <a:rPr sz="1200" b="0" i="0">
+                <a:solidFill>
+                  <a:srgbClr val="2C3E50"/>
+                </a:solidFill>
+                <a:latin typeface="Calibri"/>
+              </a:rPr>
+              <a:t>≈60 P/Q/R/S/T points span 12% of the len=500 input vs 1.2% of len=5000 — 10× more gradient signal per fiducial.</a:t>
+            </a:r>
+          </a:p>
+        </p:txBody>
+      </p:sp>
+      <p:sp>
+        <p:nvSpPr>
+          <p:cNvPr id="12" name="Rectangle 11"/>
+          <p:cNvSpPr/>
+          <p:nvPr/>
+        </p:nvSpPr>
+        <p:spPr>
+          <a:xfrm>
+            <a:off x="7883999" y="5112000"/>
+            <a:ext cx="3528000" cy="1440000"/>
+          </a:xfrm>
+          <a:prstGeom prst="rect">
+            <a:avLst/>
+          </a:prstGeom>
+          <a:solidFill>
+            <a:srgbClr val="F8F9FA"/>
+          </a:solidFill>
+          <a:ln>
+            <a:noFill/>
+          </a:ln>
+          <a:effectLst/>
+        </p:spPr>
+        <p:style>
+          <a:lnRef idx="1">
+            <a:schemeClr val="accent1"/>
+          </a:lnRef>
+          <a:fillRef idx="3">
+            <a:schemeClr val="accent1"/>
+          </a:fillRef>
+          <a:effectRef idx="2">
+            <a:schemeClr val="accent1"/>
+          </a:effectRef>
+          <a:fontRef idx="minor">
+            <a:schemeClr val="lt1"/>
+          </a:fontRef>
+        </p:style>
+        <p:txBody>
+          <a:bodyPr rtlCol="0" anchor="ctr"/>
+          <a:lstStyle/>
+          <a:p>
+            <a:pPr algn="ctr"/>
+          </a:p>
+        </p:txBody>
+      </p:sp>
+      <p:sp>
+        <p:nvSpPr>
+          <p:cNvPr id="13" name="TextBox 12"/>
+          <p:cNvSpPr txBox="1"/>
+          <p:nvPr/>
+        </p:nvSpPr>
+        <p:spPr>
+          <a:xfrm>
+            <a:off x="8063999" y="5237999"/>
+            <a:ext cx="3168000" cy="324000"/>
+          </a:xfrm>
+          <a:prstGeom prst="rect">
+            <a:avLst/>
+          </a:prstGeom>
+          <a:noFill/>
+        </p:spPr>
+        <p:txBody>
+          <a:bodyPr wrap="square" lIns="0" rIns="0" tIns="0" bIns="0">
+            <a:spAutoFit/>
+          </a:bodyPr>
+          <a:lstStyle/>
+          <a:p>
+            <a:pPr algn="l"/>
+            <a:r>
+              <a:rPr sz="1400" b="1" i="0">
+                <a:solidFill>
+                  <a:srgbClr val="0B3D91"/>
+                </a:solidFill>
+                <a:latin typeface="Calibri"/>
+              </a:rPr>
+              <a:t>Parameter economy</a:t>
+            </a:r>
+          </a:p>
+        </p:txBody>
+      </p:sp>
+      <p:sp>
+        <p:nvSpPr>
+          <p:cNvPr id="14" name="TextBox 13"/>
+          <p:cNvSpPr txBox="1"/>
+          <p:nvPr/>
+        </p:nvSpPr>
+        <p:spPr>
+          <a:xfrm>
+            <a:off x="8063999" y="5562000"/>
+            <a:ext cx="3168000" cy="917999"/>
+          </a:xfrm>
+          <a:prstGeom prst="rect">
+            <a:avLst/>
+          </a:prstGeom>
+          <a:noFill/>
+        </p:spPr>
+        <p:txBody>
+          <a:bodyPr wrap="square" lIns="0" rIns="0" tIns="0" bIns="0">
+            <a:spAutoFit/>
+          </a:bodyPr>
+          <a:lstStyle/>
+          <a:p>
+            <a:pPr algn="l"/>
+            <a:r>
+              <a:rPr sz="1200" b="0" i="0">
+                <a:solidFill>
+                  <a:srgbClr val="2C3E50"/>
+                </a:solidFill>
+                <a:latin typeface="Calibri"/>
+              </a:rPr>
+              <a:t>Same 3.72M params reallocated from baseline modelling to morphology that distinguishes LVH, AV-block, atrial flutter, etc.</a:t>
+            </a:r>
+          </a:p>
+        </p:txBody>
+      </p:sp>
+      <p:sp>
+        <p:nvSpPr>
+          <p:cNvPr id="15" name="TextBox 14"/>
+          <p:cNvSpPr txBox="1"/>
+          <p:nvPr/>
+        </p:nvSpPr>
+        <p:spPr>
+          <a:xfrm>
+            <a:off x="288000" y="6570000"/>
+            <a:ext cx="7200000" cy="180000"/>
+          </a:xfrm>
+          <a:prstGeom prst="rect">
+            <a:avLst/>
+          </a:prstGeom>
+          <a:noFill/>
+        </p:spPr>
+        <p:txBody>
+          <a:bodyPr wrap="square" lIns="0" rIns="0" tIns="0" bIns="0">
+            <a:spAutoFit/>
+          </a:bodyPr>
+          <a:lstStyle/>
+          <a:p>
+            <a:pPr algn="l"/>
+            <a:r>
+              <a:rPr sz="1000" b="0" i="0">
+                <a:solidFill>
+                  <a:srgbClr val="7F8C8D"/>
+                </a:solidFill>
+                <a:latin typeface="Calibri"/>
+              </a:rPr>
+              <a:t>Why it works · geometric invariance</a:t>
+            </a:r>
+          </a:p>
+        </p:txBody>
+      </p:sp>
+      <p:sp>
+        <p:nvSpPr>
+          <p:cNvPr id="16" name="TextBox 15"/>
+          <p:cNvSpPr txBox="1"/>
+          <p:nvPr/>
+        </p:nvSpPr>
+        <p:spPr>
+          <a:xfrm>
+            <a:off x="10032119" y="6570000"/>
+            <a:ext cx="1800000" cy="180000"/>
+          </a:xfrm>
+          <a:prstGeom prst="rect">
+            <a:avLst/>
+          </a:prstGeom>
+          <a:noFill/>
+        </p:spPr>
+        <p:txBody>
+          <a:bodyPr wrap="square" lIns="0" rIns="0" tIns="0" bIns="0">
+            <a:spAutoFit/>
+          </a:bodyPr>
+          <a:lstStyle/>
+          <a:p>
+            <a:pPr algn="r"/>
+            <a:r>
+              <a:rPr sz="1000" b="0" i="0">
+                <a:solidFill>
+                  <a:srgbClr val="7F8C8D"/>
+                </a:solidFill>
+                <a:latin typeface="Calibri"/>
+              </a:rPr>
+              <a:t>7 / 21</a:t>
+            </a:r>
+          </a:p>
+        </p:txBody>
+      </p:sp>
+    </p:spTree>
+  </p:cSld>
+  <p:clrMapOvr>
+    <a:masterClrMapping/>
+  </p:clrMapOvr>
+  <p:transition spd="med">
+    <p:fade/>
+  </p:transition>
+</p:sld>
+</file>
+
+<file path=ppt/slides/slide9.xml><?xml version="1.0" encoding="utf-8"?>
 <p:sld xmlns:a="http://schemas.openxmlformats.org/drawingml/2006/main" xmlns:p="http://schemas.openxmlformats.org/presentationml/2006/main" xmlns:r="http://schemas.openxmlformats.org/officeDocument/2006/relationships">
   <p:cSld>
     <p:spTree>
@@ -12395,7 +16232,7 @@
                 </a:solidFill>
                 <a:latin typeface="Calibri"/>
               </a:rPr>
-              <a:t>7 / 20</a:t>
+              <a:t>8 / 21</a:t>
             </a:r>
           </a:p>
         </p:txBody>
@@ -12483,1057 +16320,6 @@
       </p:par>
     </p:tnLst>
   </p:timing>
-</p:sld>
-</file>
-
-<file path=ppt/slides/slide9.xml><?xml version="1.0" encoding="utf-8"?>
-<p:sld xmlns:a="http://schemas.openxmlformats.org/drawingml/2006/main" xmlns:p="http://schemas.openxmlformats.org/presentationml/2006/main" xmlns:r="http://schemas.openxmlformats.org/officeDocument/2006/relationships">
-  <p:cSld>
-    <p:spTree>
-      <p:nvGrpSpPr>
-        <p:cNvPr id="1" name=""/>
-        <p:cNvGrpSpPr/>
-        <p:nvPr/>
-      </p:nvGrpSpPr>
-      <p:grpSpPr/>
-      <p:sp>
-        <p:nvSpPr>
-          <p:cNvPr id="2" name="Rectangle 1"/>
-          <p:cNvSpPr/>
-          <p:nvPr/>
-        </p:nvSpPr>
-        <p:spPr>
-          <a:xfrm>
-            <a:off x="0" y="0"/>
-            <a:ext cx="12192119" cy="612000"/>
-          </a:xfrm>
-          <a:prstGeom prst="rect">
-            <a:avLst/>
-          </a:prstGeom>
-          <a:solidFill>
-            <a:srgbClr val="0B3D91"/>
-          </a:solidFill>
-          <a:ln>
-            <a:noFill/>
-          </a:ln>
-          <a:effectLst/>
-        </p:spPr>
-        <p:style>
-          <a:lnRef idx="1">
-            <a:schemeClr val="accent1"/>
-          </a:lnRef>
-          <a:fillRef idx="3">
-            <a:schemeClr val="accent1"/>
-          </a:fillRef>
-          <a:effectRef idx="2">
-            <a:schemeClr val="accent1"/>
-          </a:effectRef>
-          <a:fontRef idx="minor">
-            <a:schemeClr val="lt1"/>
-          </a:fontRef>
-        </p:style>
-        <p:txBody>
-          <a:bodyPr rtlCol="0" anchor="ctr"/>
-          <a:lstStyle/>
-          <a:p>
-            <a:pPr algn="ctr"/>
-          </a:p>
-        </p:txBody>
-      </p:sp>
-      <p:sp>
-        <p:nvSpPr>
-          <p:cNvPr id="3" name="TextBox 2"/>
-          <p:cNvSpPr txBox="1"/>
-          <p:nvPr/>
-        </p:nvSpPr>
-        <p:spPr>
-          <a:xfrm>
-            <a:off x="360000" y="108000"/>
-            <a:ext cx="11520000" cy="432000"/>
-          </a:xfrm>
-          <a:prstGeom prst="rect">
-            <a:avLst/>
-          </a:prstGeom>
-          <a:noFill/>
-        </p:spPr>
-        <p:txBody>
-          <a:bodyPr wrap="square" lIns="0" rIns="0" tIns="0" bIns="0">
-            <a:spAutoFit/>
-          </a:bodyPr>
-          <a:lstStyle/>
-          <a:p>
-            <a:pPr algn="l"/>
-            <a:r>
-              <a:rPr sz="2600" b="1" i="0">
-                <a:solidFill>
-                  <a:srgbClr val="FFFFFF"/>
-                </a:solidFill>
-                <a:latin typeface="Calibri"/>
-              </a:rPr>
-              <a:t>Results — Headline Numbers</a:t>
-            </a:r>
-          </a:p>
-        </p:txBody>
-      </p:sp>
-      <p:graphicFrame>
-        <p:nvGraphicFramePr>
-          <p:cNvPr id="4" name="Table 3"/>
-          <p:cNvGraphicFramePr>
-            <a:graphicFrameLocks noGrp="1"/>
-          </p:cNvGraphicFramePr>
-          <p:nvPr/>
-        </p:nvGraphicFramePr>
-        <p:xfrm>
-          <a:off x="540000" y="1080000"/>
-          <a:ext cx="10980000" cy="2520000"/>
-        </p:xfrm>
-        <a:graphic>
-          <a:graphicData uri="http://schemas.openxmlformats.org/drawingml/2006/table">
-            <a:tbl>
-              <a:tblPr firstRow="1" bandRow="1">
-                <a:tableStyleId>{5C22544A-7EE6-4342-B048-85BDC9FD1C3A}</a:tableStyleId>
-              </a:tblPr>
-              <a:tblGrid>
-                <a:gridCol w="1568571"/>
-                <a:gridCol w="1568571"/>
-                <a:gridCol w="1568571"/>
-                <a:gridCol w="1568571"/>
-                <a:gridCol w="1568571"/>
-                <a:gridCol w="1568571"/>
-                <a:gridCol w="1568574"/>
-              </a:tblGrid>
-              <a:tr h="504000">
-                <a:tc>
-                  <a:txBody>
-                    <a:bodyPr/>
-                    <a:lstStyle/>
-                    <a:p>
-                      <a:r>
-                        <a:rPr sz="1300" b="1">
-                          <a:solidFill>
-                            <a:srgbClr val="FFFFFF"/>
-                          </a:solidFill>
-                          <a:latin typeface="Calibri"/>
-                        </a:rPr>
-                        <a:t>Config</a:t>
-                      </a:r>
-                    </a:p>
-                  </a:txBody>
-                  <a:tcPr>
-                    <a:solidFill>
-                      <a:srgbClr val="0B3D91"/>
-                    </a:solidFill>
-                  </a:tcPr>
-                </a:tc>
-                <a:tc>
-                  <a:txBody>
-                    <a:bodyPr/>
-                    <a:lstStyle/>
-                    <a:p>
-                      <a:r>
-                        <a:rPr sz="1300" b="1">
-                          <a:solidFill>
-                            <a:srgbClr val="FFFFFF"/>
-                          </a:solidFill>
-                          <a:latin typeface="Calibri"/>
-                        </a:rPr>
-                        <a:t>Test Acc</a:t>
-                      </a:r>
-                    </a:p>
-                  </a:txBody>
-                  <a:tcPr>
-                    <a:solidFill>
-                      <a:srgbClr val="0B3D91"/>
-                    </a:solidFill>
-                  </a:tcPr>
-                </a:tc>
-                <a:tc>
-                  <a:txBody>
-                    <a:bodyPr/>
-                    <a:lstStyle/>
-                    <a:p>
-                      <a:r>
-                        <a:rPr sz="1300" b="1">
-                          <a:solidFill>
-                            <a:srgbClr val="FFFFFF"/>
-                          </a:solidFill>
-                          <a:latin typeface="Calibri"/>
-                        </a:rPr>
-                        <a:t>Macro P</a:t>
-                      </a:r>
-                    </a:p>
-                  </a:txBody>
-                  <a:tcPr>
-                    <a:solidFill>
-                      <a:srgbClr val="0B3D91"/>
-                    </a:solidFill>
-                  </a:tcPr>
-                </a:tc>
-                <a:tc>
-                  <a:txBody>
-                    <a:bodyPr/>
-                    <a:lstStyle/>
-                    <a:p>
-                      <a:r>
-                        <a:rPr sz="1300" b="1">
-                          <a:solidFill>
-                            <a:srgbClr val="FFFFFF"/>
-                          </a:solidFill>
-                          <a:latin typeface="Calibri"/>
-                        </a:rPr>
-                        <a:t>Macro R</a:t>
-                      </a:r>
-                    </a:p>
-                  </a:txBody>
-                  <a:tcPr>
-                    <a:solidFill>
-                      <a:srgbClr val="0B3D91"/>
-                    </a:solidFill>
-                  </a:tcPr>
-                </a:tc>
-                <a:tc>
-                  <a:txBody>
-                    <a:bodyPr/>
-                    <a:lstStyle/>
-                    <a:p>
-                      <a:r>
-                        <a:rPr sz="1300" b="1">
-                          <a:solidFill>
-                            <a:srgbClr val="FFFFFF"/>
-                          </a:solidFill>
-                          <a:latin typeface="Calibri"/>
-                        </a:rPr>
-                        <a:t>Macro F1</a:t>
-                      </a:r>
-                    </a:p>
-                  </a:txBody>
-                  <a:tcPr>
-                    <a:solidFill>
-                      <a:srgbClr val="0B3D91"/>
-                    </a:solidFill>
-                  </a:tcPr>
-                </a:tc>
-                <a:tc>
-                  <a:txBody>
-                    <a:bodyPr/>
-                    <a:lstStyle/>
-                    <a:p>
-                      <a:r>
-                        <a:rPr sz="1300" b="1">
-                          <a:solidFill>
-                            <a:srgbClr val="FFFFFF"/>
-                          </a:solidFill>
-                          <a:latin typeface="Calibri"/>
-                        </a:rPr>
-                        <a:t>Inference</a:t>
-                      </a:r>
-                    </a:p>
-                  </a:txBody>
-                  <a:tcPr>
-                    <a:solidFill>
-                      <a:srgbClr val="0B3D91"/>
-                    </a:solidFill>
-                  </a:tcPr>
-                </a:tc>
-                <a:tc>
-                  <a:txBody>
-                    <a:bodyPr/>
-                    <a:lstStyle/>
-                    <a:p>
-                      <a:r>
-                        <a:rPr sz="1300" b="1">
-                          <a:solidFill>
-                            <a:srgbClr val="FFFFFF"/>
-                          </a:solidFill>
-                          <a:latin typeface="Calibri"/>
-                        </a:rPr>
-                        <a:t>Confidence</a:t>
-                      </a:r>
-                    </a:p>
-                  </a:txBody>
-                  <a:tcPr>
-                    <a:solidFill>
-                      <a:srgbClr val="0B3D91"/>
-                    </a:solidFill>
-                  </a:tcPr>
-                </a:tc>
-              </a:tr>
-              <a:tr h="504000">
-                <a:tc>
-                  <a:txBody>
-                    <a:bodyPr/>
-                    <a:lstStyle/>
-                    <a:p>
-                      <a:r>
-                        <a:rPr sz="1300">
-                          <a:solidFill>
-                            <a:srgbClr val="2C3E50"/>
-                          </a:solidFill>
-                          <a:latin typeface="Calibri"/>
-                        </a:rPr>
-                        <a:t>len=5000 (baseline)</a:t>
-                      </a:r>
-                    </a:p>
-                  </a:txBody>
-                  <a:tcPr>
-                    <a:solidFill>
-                      <a:srgbClr val="FFFFFF"/>
-                    </a:solidFill>
-                  </a:tcPr>
-                </a:tc>
-                <a:tc>
-                  <a:txBody>
-                    <a:bodyPr/>
-                    <a:lstStyle/>
-                    <a:p>
-                      <a:r>
-                        <a:rPr sz="1300">
-                          <a:solidFill>
-                            <a:srgbClr val="2C3E50"/>
-                          </a:solidFill>
-                          <a:latin typeface="Calibri"/>
-                        </a:rPr>
-                        <a:t>88.43%</a:t>
-                      </a:r>
-                    </a:p>
-                  </a:txBody>
-                  <a:tcPr>
-                    <a:solidFill>
-                      <a:srgbClr val="FFFFFF"/>
-                    </a:solidFill>
-                  </a:tcPr>
-                </a:tc>
-                <a:tc>
-                  <a:txBody>
-                    <a:bodyPr/>
-                    <a:lstStyle/>
-                    <a:p>
-                      <a:r>
-                        <a:rPr sz="1300">
-                          <a:solidFill>
-                            <a:srgbClr val="2C3E50"/>
-                          </a:solidFill>
-                          <a:latin typeface="Calibri"/>
-                        </a:rPr>
-                        <a:t>0.8768</a:t>
-                      </a:r>
-                    </a:p>
-                  </a:txBody>
-                  <a:tcPr>
-                    <a:solidFill>
-                      <a:srgbClr val="FFFFFF"/>
-                    </a:solidFill>
-                  </a:tcPr>
-                </a:tc>
-                <a:tc>
-                  <a:txBody>
-                    <a:bodyPr/>
-                    <a:lstStyle/>
-                    <a:p>
-                      <a:r>
-                        <a:rPr sz="1300">
-                          <a:solidFill>
-                            <a:srgbClr val="2C3E50"/>
-                          </a:solidFill>
-                          <a:latin typeface="Calibri"/>
-                        </a:rPr>
-                        <a:t>0.8847</a:t>
-                      </a:r>
-                    </a:p>
-                  </a:txBody>
-                  <a:tcPr>
-                    <a:solidFill>
-                      <a:srgbClr val="FFFFFF"/>
-                    </a:solidFill>
-                  </a:tcPr>
-                </a:tc>
-                <a:tc>
-                  <a:txBody>
-                    <a:bodyPr/>
-                    <a:lstStyle/>
-                    <a:p>
-                      <a:r>
-                        <a:rPr sz="1300">
-                          <a:solidFill>
-                            <a:srgbClr val="2C3E50"/>
-                          </a:solidFill>
-                          <a:latin typeface="Calibri"/>
-                        </a:rPr>
-                        <a:t>0.8713</a:t>
-                      </a:r>
-                    </a:p>
-                  </a:txBody>
-                  <a:tcPr>
-                    <a:solidFill>
-                      <a:srgbClr val="FFFFFF"/>
-                    </a:solidFill>
-                  </a:tcPr>
-                </a:tc>
-                <a:tc>
-                  <a:txBody>
-                    <a:bodyPr/>
-                    <a:lstStyle/>
-                    <a:p>
-                      <a:r>
-                        <a:rPr sz="1300">
-                          <a:solidFill>
-                            <a:srgbClr val="2C3E50"/>
-                          </a:solidFill>
-                          <a:latin typeface="Calibri"/>
-                        </a:rPr>
-                        <a:t>89.88 ms</a:t>
-                      </a:r>
-                    </a:p>
-                  </a:txBody>
-                  <a:tcPr>
-                    <a:solidFill>
-                      <a:srgbClr val="FFFFFF"/>
-                    </a:solidFill>
-                  </a:tcPr>
-                </a:tc>
-                <a:tc>
-                  <a:txBody>
-                    <a:bodyPr/>
-                    <a:lstStyle/>
-                    <a:p>
-                      <a:r>
-                        <a:rPr sz="1300">
-                          <a:solidFill>
-                            <a:srgbClr val="2C3E50"/>
-                          </a:solidFill>
-                          <a:latin typeface="Calibri"/>
-                        </a:rPr>
-                        <a:t>12.89%</a:t>
-                      </a:r>
-                    </a:p>
-                  </a:txBody>
-                  <a:tcPr>
-                    <a:solidFill>
-                      <a:srgbClr val="FFFFFF"/>
-                    </a:solidFill>
-                  </a:tcPr>
-                </a:tc>
-              </a:tr>
-              <a:tr h="504000">
-                <a:tc>
-                  <a:txBody>
-                    <a:bodyPr/>
-                    <a:lstStyle/>
-                    <a:p>
-                      <a:r>
-                        <a:rPr sz="1300">
-                          <a:solidFill>
-                            <a:srgbClr val="2C3E50"/>
-                          </a:solidFill>
-                          <a:latin typeface="Calibri"/>
-                        </a:rPr>
-                        <a:t>len=1000</a:t>
-                      </a:r>
-                    </a:p>
-                  </a:txBody>
-                  <a:tcPr>
-                    <a:solidFill>
-                      <a:srgbClr val="F8F9FA"/>
-                    </a:solidFill>
-                  </a:tcPr>
-                </a:tc>
-                <a:tc>
-                  <a:txBody>
-                    <a:bodyPr/>
-                    <a:lstStyle/>
-                    <a:p>
-                      <a:r>
-                        <a:rPr sz="1300">
-                          <a:solidFill>
-                            <a:srgbClr val="2C3E50"/>
-                          </a:solidFill>
-                          <a:latin typeface="Calibri"/>
-                        </a:rPr>
-                        <a:t>97.22%</a:t>
-                      </a:r>
-                    </a:p>
-                  </a:txBody>
-                  <a:tcPr>
-                    <a:solidFill>
-                      <a:srgbClr val="F8F9FA"/>
-                    </a:solidFill>
-                  </a:tcPr>
-                </a:tc>
-                <a:tc>
-                  <a:txBody>
-                    <a:bodyPr/>
-                    <a:lstStyle/>
-                    <a:p>
-                      <a:r>
-                        <a:rPr sz="1300">
-                          <a:solidFill>
-                            <a:srgbClr val="2C3E50"/>
-                          </a:solidFill>
-                          <a:latin typeface="Calibri"/>
-                        </a:rPr>
-                        <a:t>0.9740</a:t>
-                      </a:r>
-                    </a:p>
-                  </a:txBody>
-                  <a:tcPr>
-                    <a:solidFill>
-                      <a:srgbClr val="F8F9FA"/>
-                    </a:solidFill>
-                  </a:tcPr>
-                </a:tc>
-                <a:tc>
-                  <a:txBody>
-                    <a:bodyPr/>
-                    <a:lstStyle/>
-                    <a:p>
-                      <a:r>
-                        <a:rPr sz="1300">
-                          <a:solidFill>
-                            <a:srgbClr val="2C3E50"/>
-                          </a:solidFill>
-                          <a:latin typeface="Calibri"/>
-                        </a:rPr>
-                        <a:t>0.9729</a:t>
-                      </a:r>
-                    </a:p>
-                  </a:txBody>
-                  <a:tcPr>
-                    <a:solidFill>
-                      <a:srgbClr val="F8F9FA"/>
-                    </a:solidFill>
-                  </a:tcPr>
-                </a:tc>
-                <a:tc>
-                  <a:txBody>
-                    <a:bodyPr/>
-                    <a:lstStyle/>
-                    <a:p>
-                      <a:r>
-                        <a:rPr sz="1300">
-                          <a:solidFill>
-                            <a:srgbClr val="2C3E50"/>
-                          </a:solidFill>
-                          <a:latin typeface="Calibri"/>
-                        </a:rPr>
-                        <a:t>0.9716</a:t>
-                      </a:r>
-                    </a:p>
-                  </a:txBody>
-                  <a:tcPr>
-                    <a:solidFill>
-                      <a:srgbClr val="F8F9FA"/>
-                    </a:solidFill>
-                  </a:tcPr>
-                </a:tc>
-                <a:tc>
-                  <a:txBody>
-                    <a:bodyPr/>
-                    <a:lstStyle/>
-                    <a:p>
-                      <a:r>
-                        <a:rPr sz="1300">
-                          <a:solidFill>
-                            <a:srgbClr val="2C3E50"/>
-                          </a:solidFill>
-                          <a:latin typeface="Calibri"/>
-                        </a:rPr>
-                        <a:t>26.14 ms</a:t>
-                      </a:r>
-                    </a:p>
-                  </a:txBody>
-                  <a:tcPr>
-                    <a:solidFill>
-                      <a:srgbClr val="F8F9FA"/>
-                    </a:solidFill>
-                  </a:tcPr>
-                </a:tc>
-                <a:tc>
-                  <a:txBody>
-                    <a:bodyPr/>
-                    <a:lstStyle/>
-                    <a:p>
-                      <a:r>
-                        <a:rPr sz="1300">
-                          <a:solidFill>
-                            <a:srgbClr val="2C3E50"/>
-                          </a:solidFill>
-                          <a:latin typeface="Calibri"/>
-                        </a:rPr>
-                        <a:t>68.88%</a:t>
-                      </a:r>
-                    </a:p>
-                  </a:txBody>
-                  <a:tcPr>
-                    <a:solidFill>
-                      <a:srgbClr val="F8F9FA"/>
-                    </a:solidFill>
-                  </a:tcPr>
-                </a:tc>
-              </a:tr>
-              <a:tr h="504000">
-                <a:tc>
-                  <a:txBody>
-                    <a:bodyPr/>
-                    <a:lstStyle/>
-                    <a:p>
-                      <a:r>
-                        <a:rPr sz="1300">
-                          <a:solidFill>
-                            <a:srgbClr val="2C3E50"/>
-                          </a:solidFill>
-                          <a:latin typeface="Calibri"/>
-                        </a:rPr>
-                        <a:t>len=500</a:t>
-                      </a:r>
-                    </a:p>
-                  </a:txBody>
-                  <a:tcPr>
-                    <a:solidFill>
-                      <a:srgbClr val="FFFFFF"/>
-                    </a:solidFill>
-                  </a:tcPr>
-                </a:tc>
-                <a:tc>
-                  <a:txBody>
-                    <a:bodyPr/>
-                    <a:lstStyle/>
-                    <a:p>
-                      <a:r>
-                        <a:rPr sz="1300">
-                          <a:solidFill>
-                            <a:srgbClr val="2C3E50"/>
-                          </a:solidFill>
-                          <a:latin typeface="Calibri"/>
-                        </a:rPr>
-                        <a:t>97.34%</a:t>
-                      </a:r>
-                    </a:p>
-                  </a:txBody>
-                  <a:tcPr>
-                    <a:solidFill>
-                      <a:srgbClr val="FFFFFF"/>
-                    </a:solidFill>
-                  </a:tcPr>
-                </a:tc>
-                <a:tc>
-                  <a:txBody>
-                    <a:bodyPr/>
-                    <a:lstStyle/>
-                    <a:p>
-                      <a:r>
-                        <a:rPr sz="1300">
-                          <a:solidFill>
-                            <a:srgbClr val="2C3E50"/>
-                          </a:solidFill>
-                          <a:latin typeface="Calibri"/>
-                        </a:rPr>
-                        <a:t>0.9734</a:t>
-                      </a:r>
-                    </a:p>
-                  </a:txBody>
-                  <a:tcPr>
-                    <a:solidFill>
-                      <a:srgbClr val="FFFFFF"/>
-                    </a:solidFill>
-                  </a:tcPr>
-                </a:tc>
-                <a:tc>
-                  <a:txBody>
-                    <a:bodyPr/>
-                    <a:lstStyle/>
-                    <a:p>
-                      <a:r>
-                        <a:rPr sz="1300">
-                          <a:solidFill>
-                            <a:srgbClr val="2C3E50"/>
-                          </a:solidFill>
-                          <a:latin typeface="Calibri"/>
-                        </a:rPr>
-                        <a:t>0.9749</a:t>
-                      </a:r>
-                    </a:p>
-                  </a:txBody>
-                  <a:tcPr>
-                    <a:solidFill>
-                      <a:srgbClr val="FFFFFF"/>
-                    </a:solidFill>
-                  </a:tcPr>
-                </a:tc>
-                <a:tc>
-                  <a:txBody>
-                    <a:bodyPr/>
-                    <a:lstStyle/>
-                    <a:p>
-                      <a:r>
-                        <a:rPr sz="1300">
-                          <a:solidFill>
-                            <a:srgbClr val="2C3E50"/>
-                          </a:solidFill>
-                          <a:latin typeface="Calibri"/>
-                        </a:rPr>
-                        <a:t>0.9737</a:t>
-                      </a:r>
-                    </a:p>
-                  </a:txBody>
-                  <a:tcPr>
-                    <a:solidFill>
-                      <a:srgbClr val="FFFFFF"/>
-                    </a:solidFill>
-                  </a:tcPr>
-                </a:tc>
-                <a:tc>
-                  <a:txBody>
-                    <a:bodyPr/>
-                    <a:lstStyle/>
-                    <a:p>
-                      <a:r>
-                        <a:rPr sz="1300">
-                          <a:solidFill>
-                            <a:srgbClr val="2C3E50"/>
-                          </a:solidFill>
-                          <a:latin typeface="Calibri"/>
-                        </a:rPr>
-                        <a:t>27.20 ms</a:t>
-                      </a:r>
-                    </a:p>
-                  </a:txBody>
-                  <a:tcPr>
-                    <a:solidFill>
-                      <a:srgbClr val="FFFFFF"/>
-                    </a:solidFill>
-                  </a:tcPr>
-                </a:tc>
-                <a:tc>
-                  <a:txBody>
-                    <a:bodyPr/>
-                    <a:lstStyle/>
-                    <a:p>
-                      <a:r>
-                        <a:rPr sz="1300">
-                          <a:solidFill>
-                            <a:srgbClr val="2C3E50"/>
-                          </a:solidFill>
-                          <a:latin typeface="Calibri"/>
-                        </a:rPr>
-                        <a:t>76.23%</a:t>
-                      </a:r>
-                    </a:p>
-                  </a:txBody>
-                  <a:tcPr>
-                    <a:solidFill>
-                      <a:srgbClr val="FFFFFF"/>
-                    </a:solidFill>
-                  </a:tcPr>
-                </a:tc>
-              </a:tr>
-              <a:tr h="504000">
-                <a:tc>
-                  <a:txBody>
-                    <a:bodyPr/>
-                    <a:lstStyle/>
-                    <a:p>
-                      <a:r>
-                        <a:rPr sz="1300">
-                          <a:solidFill>
-                            <a:srgbClr val="2C3E50"/>
-                          </a:solidFill>
-                          <a:latin typeface="Calibri"/>
-                        </a:rPr>
-                        <a:t>len=500 + 4 workers</a:t>
-                      </a:r>
-                    </a:p>
-                  </a:txBody>
-                  <a:tcPr>
-                    <a:solidFill>
-                      <a:srgbClr val="F8F9FA"/>
-                    </a:solidFill>
-                  </a:tcPr>
-                </a:tc>
-                <a:tc>
-                  <a:txBody>
-                    <a:bodyPr/>
-                    <a:lstStyle/>
-                    <a:p>
-                      <a:r>
-                        <a:rPr sz="1300">
-                          <a:solidFill>
-                            <a:srgbClr val="2C3E50"/>
-                          </a:solidFill>
-                          <a:latin typeface="Calibri"/>
-                        </a:rPr>
-                        <a:t>97.38%</a:t>
-                      </a:r>
-                    </a:p>
-                  </a:txBody>
-                  <a:tcPr>
-                    <a:solidFill>
-                      <a:srgbClr val="F8F9FA"/>
-                    </a:solidFill>
-                  </a:tcPr>
-                </a:tc>
-                <a:tc>
-                  <a:txBody>
-                    <a:bodyPr/>
-                    <a:lstStyle/>
-                    <a:p>
-                      <a:r>
-                        <a:rPr sz="1300">
-                          <a:solidFill>
-                            <a:srgbClr val="2C3E50"/>
-                          </a:solidFill>
-                          <a:latin typeface="Calibri"/>
-                        </a:rPr>
-                        <a:t>0.9741</a:t>
-                      </a:r>
-                    </a:p>
-                  </a:txBody>
-                  <a:tcPr>
-                    <a:solidFill>
-                      <a:srgbClr val="F8F9FA"/>
-                    </a:solidFill>
-                  </a:tcPr>
-                </a:tc>
-                <a:tc>
-                  <a:txBody>
-                    <a:bodyPr/>
-                    <a:lstStyle/>
-                    <a:p>
-                      <a:r>
-                        <a:rPr sz="1300">
-                          <a:solidFill>
-                            <a:srgbClr val="2C3E50"/>
-                          </a:solidFill>
-                          <a:latin typeface="Calibri"/>
-                        </a:rPr>
-                        <a:t>0.9751</a:t>
-                      </a:r>
-                    </a:p>
-                  </a:txBody>
-                  <a:tcPr>
-                    <a:solidFill>
-                      <a:srgbClr val="F8F9FA"/>
-                    </a:solidFill>
-                  </a:tcPr>
-                </a:tc>
-                <a:tc>
-                  <a:txBody>
-                    <a:bodyPr/>
-                    <a:lstStyle/>
-                    <a:p>
-                      <a:r>
-                        <a:rPr sz="1300">
-                          <a:solidFill>
-                            <a:srgbClr val="2C3E50"/>
-                          </a:solidFill>
-                          <a:latin typeface="Calibri"/>
-                        </a:rPr>
-                        <a:t>0.9744</a:t>
-                      </a:r>
-                    </a:p>
-                  </a:txBody>
-                  <a:tcPr>
-                    <a:solidFill>
-                      <a:srgbClr val="F8F9FA"/>
-                    </a:solidFill>
-                  </a:tcPr>
-                </a:tc>
-                <a:tc>
-                  <a:txBody>
-                    <a:bodyPr/>
-                    <a:lstStyle/>
-                    <a:p>
-                      <a:r>
-                        <a:rPr sz="1300">
-                          <a:solidFill>
-                            <a:srgbClr val="2C3E50"/>
-                          </a:solidFill>
-                          <a:latin typeface="Calibri"/>
-                        </a:rPr>
-                        <a:t>43.50 ms</a:t>
-                      </a:r>
-                    </a:p>
-                  </a:txBody>
-                  <a:tcPr>
-                    <a:solidFill>
-                      <a:srgbClr val="F8F9FA"/>
-                    </a:solidFill>
-                  </a:tcPr>
-                </a:tc>
-                <a:tc>
-                  <a:txBody>
-                    <a:bodyPr/>
-                    <a:lstStyle/>
-                    <a:p>
-                      <a:r>
-                        <a:rPr sz="1300">
-                          <a:solidFill>
-                            <a:srgbClr val="2C3E50"/>
-                          </a:solidFill>
-                          <a:latin typeface="Calibri"/>
-                        </a:rPr>
-                        <a:t>69.59%</a:t>
-                      </a:r>
-                    </a:p>
-                  </a:txBody>
-                  <a:tcPr>
-                    <a:solidFill>
-                      <a:srgbClr val="F8F9FA"/>
-                    </a:solidFill>
-                  </a:tcPr>
-                </a:tc>
-              </a:tr>
-            </a:tbl>
-          </a:graphicData>
-        </a:graphic>
-      </p:graphicFrame>
-      <p:sp>
-        <p:nvSpPr>
-          <p:cNvPr id="5" name="TextBox 4"/>
-          <p:cNvSpPr txBox="1"/>
-          <p:nvPr/>
-        </p:nvSpPr>
-        <p:spPr>
-          <a:xfrm>
-            <a:off x="540000" y="3960000"/>
-            <a:ext cx="10980000" cy="432000"/>
-          </a:xfrm>
-          <a:prstGeom prst="rect">
-            <a:avLst/>
-          </a:prstGeom>
-          <a:noFill/>
-        </p:spPr>
-        <p:txBody>
-          <a:bodyPr wrap="square" lIns="0" rIns="0" tIns="0" bIns="0">
-            <a:spAutoFit/>
-          </a:bodyPr>
-          <a:lstStyle/>
-          <a:p>
-            <a:pPr algn="l"/>
-            <a:r>
-              <a:rPr sz="2000" b="1" i="0">
-                <a:solidFill>
-                  <a:srgbClr val="27AE60"/>
-                </a:solidFill>
-                <a:latin typeface="Calibri"/>
-              </a:rPr>
-              <a:t>Δ (len=5000 → len=500): accuracy +8.91 pp,  macro F1 +10.24 pp,  inference 3.3× faster.</a:t>
-            </a:r>
-          </a:p>
-        </p:txBody>
-      </p:sp>
-      <p:sp>
-        <p:nvSpPr>
-          <p:cNvPr id="6" name="TextBox 5"/>
-          <p:cNvSpPr txBox="1"/>
-          <p:nvPr/>
-        </p:nvSpPr>
-        <p:spPr>
-          <a:xfrm>
-            <a:off x="540000" y="4500000"/>
-            <a:ext cx="10980000" cy="1440000"/>
-          </a:xfrm>
-          <a:prstGeom prst="rect">
-            <a:avLst/>
-          </a:prstGeom>
-          <a:noFill/>
-        </p:spPr>
-        <p:txBody>
-          <a:bodyPr wrap="square" lIns="0" rIns="0" tIns="0" bIns="0">
-            <a:spAutoFit/>
-          </a:bodyPr>
-          <a:lstStyle/>
-          <a:p>
-            <a:pPr algn="l"/>
-            <a:r>
-              <a:rPr sz="1600" b="0" i="1">
-                <a:solidFill>
-                  <a:srgbClr val="2C3E50"/>
-                </a:solidFill>
-                <a:latin typeface="Calibri"/>
-              </a:rPr>
-              <a:t>Target from thesis proposal (≥ 90 %) and from the v2 aspiration (94.8% for the full attention-CNN-LSTM hybrid with support-node augmentation) are both exceeded — with nothing but a preprocessing change to the plain baseline.</a:t>
-            </a:r>
-          </a:p>
-        </p:txBody>
-      </p:sp>
-      <p:sp>
-        <p:nvSpPr>
-          <p:cNvPr id="7" name="TextBox 6"/>
-          <p:cNvSpPr txBox="1"/>
-          <p:nvPr/>
-        </p:nvSpPr>
-        <p:spPr>
-          <a:xfrm>
-            <a:off x="288000" y="6570000"/>
-            <a:ext cx="7200000" cy="180000"/>
-          </a:xfrm>
-          <a:prstGeom prst="rect">
-            <a:avLst/>
-          </a:prstGeom>
-          <a:noFill/>
-        </p:spPr>
-        <p:txBody>
-          <a:bodyPr wrap="square" lIns="0" rIns="0" tIns="0" bIns="0">
-            <a:spAutoFit/>
-          </a:bodyPr>
-          <a:lstStyle/>
-          <a:p>
-            <a:pPr algn="l"/>
-            <a:r>
-              <a:rPr sz="1000" b="0" i="0">
-                <a:solidFill>
-                  <a:srgbClr val="7F8C8D"/>
-                </a:solidFill>
-                <a:latin typeface="Calibri"/>
-              </a:rPr>
-              <a:t>Results — headline</a:t>
-            </a:r>
-          </a:p>
-        </p:txBody>
-      </p:sp>
-      <p:sp>
-        <p:nvSpPr>
-          <p:cNvPr id="8" name="TextBox 7"/>
-          <p:cNvSpPr txBox="1"/>
-          <p:nvPr/>
-        </p:nvSpPr>
-        <p:spPr>
-          <a:xfrm>
-            <a:off x="10032119" y="6570000"/>
-            <a:ext cx="1800000" cy="180000"/>
-          </a:xfrm>
-          <a:prstGeom prst="rect">
-            <a:avLst/>
-          </a:prstGeom>
-          <a:noFill/>
-        </p:spPr>
-        <p:txBody>
-          <a:bodyPr wrap="square" lIns="0" rIns="0" tIns="0" bIns="0">
-            <a:spAutoFit/>
-          </a:bodyPr>
-          <a:lstStyle/>
-          <a:p>
-            <a:pPr algn="r"/>
-            <a:r>
-              <a:rPr sz="1000" b="0" i="0">
-                <a:solidFill>
-                  <a:srgbClr val="7F8C8D"/>
-                </a:solidFill>
-                <a:latin typeface="Calibri"/>
-              </a:rPr>
-              <a:t>8 / 20</a:t>
-            </a:r>
-          </a:p>
-        </p:txBody>
-      </p:sp>
-    </p:spTree>
-  </p:cSld>
-  <p:clrMapOvr>
-    <a:masterClrMapping/>
-  </p:clrMapOvr>
-  <p:transition spd="med">
-    <p:fade/>
-  </p:transition>
 </p:sld>
 </file>
 
